--- a/lectures/week5/lecture1/slides/week5_lecture1.pptx
+++ b/lectures/week5/lecture1/slides/week5_lecture1.pptx
@@ -5,7 +5,7 @@
     <p:sldMasterId id="2147483665" r:id="rId1"/>
   </p:sldMasterIdLst>
   <p:notesMasterIdLst>
-    <p:notesMasterId r:id="rId31"/>
+    <p:notesMasterId r:id="rId29"/>
   </p:notesMasterIdLst>
   <p:sldIdLst>
     <p:sldId id="405" r:id="rId2"/>
@@ -25,18 +25,16 @@
     <p:sldId id="392" r:id="rId16"/>
     <p:sldId id="393" r:id="rId17"/>
     <p:sldId id="403" r:id="rId18"/>
-    <p:sldId id="409" r:id="rId19"/>
-    <p:sldId id="394" r:id="rId20"/>
-    <p:sldId id="395" r:id="rId21"/>
-    <p:sldId id="396" r:id="rId22"/>
-    <p:sldId id="397" r:id="rId23"/>
-    <p:sldId id="398" r:id="rId24"/>
-    <p:sldId id="400" r:id="rId25"/>
-    <p:sldId id="399" r:id="rId26"/>
-    <p:sldId id="401" r:id="rId27"/>
-    <p:sldId id="357" r:id="rId28"/>
-    <p:sldId id="408" r:id="rId29"/>
-    <p:sldId id="404" r:id="rId30"/>
+    <p:sldId id="394" r:id="rId19"/>
+    <p:sldId id="395" r:id="rId20"/>
+    <p:sldId id="396" r:id="rId21"/>
+    <p:sldId id="397" r:id="rId22"/>
+    <p:sldId id="398" r:id="rId23"/>
+    <p:sldId id="400" r:id="rId24"/>
+    <p:sldId id="399" r:id="rId25"/>
+    <p:sldId id="401" r:id="rId26"/>
+    <p:sldId id="357" r:id="rId27"/>
+    <p:sldId id="404" r:id="rId28"/>
   </p:sldIdLst>
   <p:sldSz cx="12192000" cy="6858000"/>
   <p:notesSz cx="6858000" cy="9144000"/>
@@ -225,7 +223,7 @@
           <a:p>
             <a:fld id="{125D7D83-D401-9A49-861D-A02E2788C764}" type="datetimeFigureOut">
               <a:rPr lang="en-US" smtClean="0"/>
-              <a:t>2/3/25</a:t>
+              <a:t>2/1/26</a:t>
             </a:fld>
             <a:endParaRPr lang="en-US"/>
           </a:p>
@@ -537,6 +535,61 @@
           <a:bodyPr/>
           <a:lstStyle/>
           <a:p>
+            <a:pPr marL="0" marR="0" lvl="0" indent="0" algn="l" defTabSz="914400" rtl="0" eaLnBrk="1" fontAlgn="auto" latinLnBrk="0" hangingPunct="1">
+              <a:lnSpc>
+                <a:spcPct val="100000"/>
+              </a:lnSpc>
+              <a:spcBef>
+                <a:spcPts val="0"/>
+              </a:spcBef>
+              <a:spcAft>
+                <a:spcPts val="0"/>
+              </a:spcAft>
+              <a:buClrTx/>
+              <a:buSzTx/>
+              <a:buFontTx/>
+              <a:buNone/>
+              <a:tabLst/>
+              <a:defRPr/>
+            </a:pPr>
+            <a:r>
+              <a:rPr lang="en-US" sz="1200" kern="1200" dirty="0">
+                <a:solidFill>
+                  <a:schemeClr val="tx1"/>
+                </a:solidFill>
+                <a:effectLst/>
+                <a:latin typeface="+mn-lt"/>
+                <a:ea typeface="+mn-ea"/>
+                <a:cs typeface="+mn-cs"/>
+              </a:rPr>
+              <a:t>A string is an </a:t>
+            </a:r>
+            <a:r>
+              <a:rPr lang="en-US" sz="1200" b="1" kern="1200" dirty="0">
+                <a:solidFill>
+                  <a:schemeClr val="tx1"/>
+                </a:solidFill>
+                <a:effectLst/>
+                <a:latin typeface="+mn-lt"/>
+                <a:ea typeface="+mn-ea"/>
+                <a:cs typeface="+mn-cs"/>
+              </a:rPr>
+              <a:t>ordered sequence of characters</a:t>
+            </a:r>
+            <a:r>
+              <a:rPr lang="en-US" sz="1200" kern="1200" dirty="0">
+                <a:solidFill>
+                  <a:schemeClr val="tx1"/>
+                </a:solidFill>
+                <a:effectLst/>
+                <a:latin typeface="+mn-lt"/>
+                <a:ea typeface="+mn-ea"/>
+                <a:cs typeface="+mn-cs"/>
+              </a:rPr>
+              <a:t>, just like a list.</a:t>
+            </a:r>
+          </a:p>
+          <a:p>
             <a:endParaRPr lang="en-US" dirty="0"/>
           </a:p>
         </p:txBody>
@@ -556,9 +609,9 @@
           <a:bodyPr/>
           <a:lstStyle/>
           <a:p>
-            <a:fld id="{C723D110-B33C-3E49-B5DC-7F1369944E63}" type="slidenum">
+            <a:fld id="{0236AFEF-5B50-AD45-8E89-F62EC9932D28}" type="slidenum">
               <a:rPr lang="en-US" smtClean="0"/>
-              <a:t>14</a:t>
+              <a:t>3</a:t>
             </a:fld>
             <a:endParaRPr lang="en-US"/>
           </a:p>
@@ -567,7 +620,7 @@
     </p:spTree>
     <p:extLst>
       <p:ext uri="{BB962C8B-B14F-4D97-AF65-F5344CB8AC3E}">
-        <p14:creationId xmlns:p14="http://schemas.microsoft.com/office/powerpoint/2010/main" val="2574314572"/>
+        <p14:creationId xmlns:p14="http://schemas.microsoft.com/office/powerpoint/2010/main" val="3471686058"/>
       </p:ext>
     </p:extLst>
   </p:cSld>
@@ -642,7 +695,7 @@
           <a:p>
             <a:fld id="{C723D110-B33C-3E49-B5DC-7F1369944E63}" type="slidenum">
               <a:rPr lang="en-US" smtClean="0"/>
-              <a:t>17</a:t>
+              <a:t>14</a:t>
             </a:fld>
             <a:endParaRPr lang="en-US"/>
           </a:p>
@@ -651,7 +704,7 @@
     </p:spTree>
     <p:extLst>
       <p:ext uri="{BB962C8B-B14F-4D97-AF65-F5344CB8AC3E}">
-        <p14:creationId xmlns:p14="http://schemas.microsoft.com/office/powerpoint/2010/main" val="4221022430"/>
+        <p14:creationId xmlns:p14="http://schemas.microsoft.com/office/powerpoint/2010/main" val="2574314572"/>
       </p:ext>
     </p:extLst>
   </p:cSld>
@@ -705,7 +758,7 @@
           <a:bodyPr/>
           <a:lstStyle/>
           <a:p>
-            <a:endParaRPr lang="en-CA" dirty="0"/>
+            <a:endParaRPr lang="en-US" dirty="0"/>
           </a:p>
         </p:txBody>
       </p:sp>
@@ -724,9 +777,9 @@
           <a:bodyPr/>
           <a:lstStyle/>
           <a:p>
-            <a:fld id="{0236AFEF-5B50-AD45-8E89-F62EC9932D28}" type="slidenum">
+            <a:fld id="{C723D110-B33C-3E49-B5DC-7F1369944E63}" type="slidenum">
               <a:rPr lang="en-US" smtClean="0"/>
-              <a:t>23</a:t>
+              <a:t>17</a:t>
             </a:fld>
             <a:endParaRPr lang="en-US"/>
           </a:p>
@@ -735,7 +788,7 @@
     </p:spTree>
     <p:extLst>
       <p:ext uri="{BB962C8B-B14F-4D97-AF65-F5344CB8AC3E}">
-        <p14:creationId xmlns:p14="http://schemas.microsoft.com/office/powerpoint/2010/main" val="2651107767"/>
+        <p14:creationId xmlns:p14="http://schemas.microsoft.com/office/powerpoint/2010/main" val="4221022430"/>
       </p:ext>
     </p:extLst>
   </p:cSld>
@@ -789,7 +842,7 @@
           <a:bodyPr/>
           <a:lstStyle/>
           <a:p>
-            <a:endParaRPr lang="en-US" dirty="0"/>
+            <a:endParaRPr lang="en-CA" dirty="0"/>
           </a:p>
         </p:txBody>
       </p:sp>
@@ -808,9 +861,93 @@
           <a:bodyPr/>
           <a:lstStyle/>
           <a:p>
+            <a:fld id="{0236AFEF-5B50-AD45-8E89-F62EC9932D28}" type="slidenum">
+              <a:rPr lang="en-US" smtClean="0"/>
+              <a:t>22</a:t>
+            </a:fld>
+            <a:endParaRPr lang="en-US"/>
+          </a:p>
+        </p:txBody>
+      </p:sp>
+    </p:spTree>
+    <p:extLst>
+      <p:ext uri="{BB962C8B-B14F-4D97-AF65-F5344CB8AC3E}">
+        <p14:creationId xmlns:p14="http://schemas.microsoft.com/office/powerpoint/2010/main" val="2651107767"/>
+      </p:ext>
+    </p:extLst>
+  </p:cSld>
+  <p:clrMapOvr>
+    <a:masterClrMapping/>
+  </p:clrMapOvr>
+</p:notes>
+</file>
+
+<file path=ppt/notesSlides/notesSlide5.xml><?xml version="1.0" encoding="utf-8"?>
+<p:notes xmlns:a="http://schemas.openxmlformats.org/drawingml/2006/main" xmlns:r="http://schemas.openxmlformats.org/officeDocument/2006/relationships" xmlns:p="http://schemas.openxmlformats.org/presentationml/2006/main">
+  <p:cSld>
+    <p:spTree>
+      <p:nvGrpSpPr>
+        <p:cNvPr id="1" name=""/>
+        <p:cNvGrpSpPr/>
+        <p:nvPr/>
+      </p:nvGrpSpPr>
+      <p:grpSpPr>
+        <a:xfrm>
+          <a:off x="0" y="0"/>
+          <a:ext cx="0" cy="0"/>
+          <a:chOff x="0" y="0"/>
+          <a:chExt cx="0" cy="0"/>
+        </a:xfrm>
+      </p:grpSpPr>
+      <p:sp>
+        <p:nvSpPr>
+          <p:cNvPr id="2" name="Slide Image Placeholder 1"/>
+          <p:cNvSpPr>
+            <a:spLocks noGrp="1" noRot="1" noChangeAspect="1"/>
+          </p:cNvSpPr>
+          <p:nvPr>
+            <p:ph type="sldImg"/>
+          </p:nvPr>
+        </p:nvSpPr>
+        <p:spPr/>
+      </p:sp>
+      <p:sp>
+        <p:nvSpPr>
+          <p:cNvPr id="3" name="Notes Placeholder 2"/>
+          <p:cNvSpPr>
+            <a:spLocks noGrp="1"/>
+          </p:cNvSpPr>
+          <p:nvPr>
+            <p:ph type="body" idx="1"/>
+          </p:nvPr>
+        </p:nvSpPr>
+        <p:spPr/>
+        <p:txBody>
+          <a:bodyPr/>
+          <a:lstStyle/>
+          <a:p>
+            <a:endParaRPr lang="en-US" dirty="0"/>
+          </a:p>
+        </p:txBody>
+      </p:sp>
+      <p:sp>
+        <p:nvSpPr>
+          <p:cNvPr id="4" name="Slide Number Placeholder 3"/>
+          <p:cNvSpPr>
+            <a:spLocks noGrp="1"/>
+          </p:cNvSpPr>
+          <p:nvPr>
+            <p:ph type="sldNum" sz="quarter" idx="5"/>
+          </p:nvPr>
+        </p:nvSpPr>
+        <p:spPr/>
+        <p:txBody>
+          <a:bodyPr/>
+          <a:lstStyle/>
+          <a:p>
             <a:fld id="{C723D110-B33C-3E49-B5DC-7F1369944E63}" type="slidenum">
               <a:rPr lang="en-US" smtClean="0"/>
-              <a:t>27</a:t>
+              <a:t>26</a:t>
             </a:fld>
             <a:endParaRPr lang="en-US"/>
           </a:p>
@@ -2223,8 +2360,8 @@
         </p:nvSpPr>
         <p:spPr>
           <a:xfrm>
-            <a:off x="335947" y="4426565"/>
-            <a:ext cx="7580601" cy="2185214"/>
+            <a:off x="335947" y="4261465"/>
+            <a:ext cx="7580601" cy="2431435"/>
           </a:xfrm>
           <a:prstGeom prst="rect">
             <a:avLst/>
@@ -2293,7 +2430,7 @@
                   <a:srgbClr val="66FF99"/>
                 </a:solidFill>
               </a:rPr>
-              <a:t>Lab 3 Due Friday 11:59 PM</a:t>
+              <a:t>Lab 3 (In-Person Lab) this week.</a:t>
             </a:r>
           </a:p>
           <a:p>
@@ -2327,21 +2464,8 @@
                   <a:srgbClr val="66FF99"/>
                 </a:solidFill>
               </a:rPr>
-              <a:t>Reflection 5 Released Friday 6:00 pm</a:t>
-            </a:r>
-            <a:r>
-              <a:rPr lang="en-US" sz="1600" dirty="0">
-                <a:solidFill>
-                  <a:srgbClr val="CC99FF"/>
-                </a:solidFill>
-              </a:rPr>
-              <a:t>.</a:t>
-            </a:r>
-            <a:endParaRPr lang="en-US" sz="1600" dirty="0">
-              <a:solidFill>
-                <a:srgbClr val="66FF99"/>
-              </a:solidFill>
-            </a:endParaRPr>
+              <a:t>Reflection 5 Released Friday 6:00 pm.</a:t>
+            </a:r>
           </a:p>
           <a:p>
             <a:pPr marL="285750" indent="-285750">
@@ -2357,15 +2481,7 @@
                   <a:srgbClr val="66FF99"/>
                 </a:solidFill>
               </a:rPr>
-              <a:t>Tutorial (Online), Practical, Office Hour sessions running all week</a:t>
-            </a:r>
-            <a:r>
-              <a:rPr lang="en-US" sz="1600" dirty="0">
-                <a:solidFill>
-                  <a:srgbClr val="CC99FF"/>
-                </a:solidFill>
-              </a:rPr>
-              <a:t>.</a:t>
+              <a:t>Tutorial (Online), Practical, Office Hour sessions running all week.</a:t>
             </a:r>
           </a:p>
           <a:p>
@@ -2382,32 +2498,30 @@
                   <a:srgbClr val="66FF99"/>
                 </a:solidFill>
               </a:rPr>
-              <a:t>Looking for more practice</a:t>
-            </a:r>
+              <a:t>Term Test 1 Next Thursday</a:t>
+            </a:r>
+          </a:p>
+          <a:p>
+            <a:pPr marL="285750" indent="-285750">
+              <a:buClr>
+                <a:srgbClr val="CC99FF"/>
+              </a:buClr>
+              <a:buFont typeface="Wingdings" panose="05000000000000000000" pitchFamily="2" charset="2"/>
+              <a:buChar char="§"/>
+            </a:pPr>
             <a:r>
               <a:rPr lang="en-US" sz="1600" dirty="0">
                 <a:solidFill>
-                  <a:srgbClr val="CC99FF"/>
-                </a:solidFill>
-              </a:rPr>
-              <a:t>?</a:t>
-            </a:r>
-            <a:r>
-              <a:rPr lang="en-US" sz="1600" dirty="0">
-                <a:solidFill>
                   <a:srgbClr val="66FF99"/>
                 </a:solidFill>
               </a:rPr>
-              <a:t> Check out the textbook</a:t>
-            </a:r>
-            <a:r>
-              <a:rPr lang="en-US" sz="1600" dirty="0">
-                <a:solidFill>
-                  <a:srgbClr val="CC99FF"/>
-                </a:solidFill>
-              </a:rPr>
-              <a:t>.</a:t>
-            </a:r>
+              <a:t>Term Test Online Review next week</a:t>
+            </a:r>
+            <a:endParaRPr lang="en-US" sz="1600" dirty="0">
+              <a:solidFill>
+                <a:srgbClr val="CC99FF"/>
+              </a:solidFill>
+            </a:endParaRPr>
           </a:p>
         </p:txBody>
       </p:sp>
@@ -2421,6 +2535,14 @@
   <p:clrMapOvr>
     <a:masterClrMapping/>
   </p:clrMapOvr>
+  <mc:AlternateContent xmlns:mc="http://schemas.openxmlformats.org/markup-compatibility/2006">
+    <mc:Choice xmlns:p14="http://schemas.microsoft.com/office/powerpoint/2010/main" Requires="p14">
+      <p:transition spd="slow" p14:dur="2000" advTm="32330"/>
+    </mc:Choice>
+    <mc:Fallback>
+      <p:transition spd="slow" advTm="32330"/>
+    </mc:Fallback>
+  </mc:AlternateContent>
 </p:sld>
 </file>
 
@@ -10861,302 +10983,6 @@
 </file>
 
 <file path=ppt/slides/slide18.xml><?xml version="1.0" encoding="utf-8"?>
-<p:sld xmlns:a="http://schemas.openxmlformats.org/drawingml/2006/main" xmlns:r="http://schemas.openxmlformats.org/officeDocument/2006/relationships" xmlns:p="http://schemas.openxmlformats.org/presentationml/2006/main" show="0">
-  <p:cSld>
-    <p:spTree>
-      <p:nvGrpSpPr>
-        <p:cNvPr id="1" name="">
-          <a:extLst>
-            <a:ext uri="{FF2B5EF4-FFF2-40B4-BE49-F238E27FC236}">
-              <a16:creationId xmlns:a16="http://schemas.microsoft.com/office/drawing/2014/main" id="{25B58D73-5A7B-A2AF-A95C-8030B7237569}"/>
-            </a:ext>
-          </a:extLst>
-        </p:cNvPr>
-        <p:cNvGrpSpPr/>
-        <p:nvPr/>
-      </p:nvGrpSpPr>
-      <p:grpSpPr>
-        <a:xfrm>
-          <a:off x="0" y="0"/>
-          <a:ext cx="0" cy="0"/>
-          <a:chOff x="0" y="0"/>
-          <a:chExt cx="0" cy="0"/>
-        </a:xfrm>
-      </p:grpSpPr>
-      <p:sp>
-        <p:nvSpPr>
-          <p:cNvPr id="2" name="Title 1">
-            <a:extLst>
-              <a:ext uri="{FF2B5EF4-FFF2-40B4-BE49-F238E27FC236}">
-                <a16:creationId xmlns:a16="http://schemas.microsoft.com/office/drawing/2014/main" id="{CABFE72E-FA77-02EA-56E7-17BC530E2581}"/>
-              </a:ext>
-            </a:extLst>
-          </p:cNvPr>
-          <p:cNvSpPr>
-            <a:spLocks noGrp="1"/>
-          </p:cNvSpPr>
-          <p:nvPr>
-            <p:ph type="title"/>
-          </p:nvPr>
-        </p:nvSpPr>
-        <p:spPr/>
-        <p:txBody>
-          <a:bodyPr>
-            <a:normAutofit fontScale="90000"/>
-          </a:bodyPr>
-          <a:lstStyle/>
-          <a:p>
-            <a:r>
-              <a:rPr lang="en-CA" dirty="0" err="1"/>
-              <a:t>Mentimeter</a:t>
-            </a:r>
-            <a:r>
-              <a:rPr lang="en-CA" dirty="0"/>
-              <a:t> Checkpoint</a:t>
-            </a:r>
-          </a:p>
-        </p:txBody>
-      </p:sp>
-      <p:sp>
-        <p:nvSpPr>
-          <p:cNvPr id="3" name="Content Placeholder 2">
-            <a:extLst>
-              <a:ext uri="{FF2B5EF4-FFF2-40B4-BE49-F238E27FC236}">
-                <a16:creationId xmlns:a16="http://schemas.microsoft.com/office/drawing/2014/main" id="{2A9D0601-3BDD-84E9-ADDE-EED351143DF2}"/>
-              </a:ext>
-            </a:extLst>
-          </p:cNvPr>
-          <p:cNvSpPr>
-            <a:spLocks noGrp="1"/>
-          </p:cNvSpPr>
-          <p:nvPr>
-            <p:ph idx="1"/>
-          </p:nvPr>
-        </p:nvSpPr>
-        <p:spPr/>
-        <p:txBody>
-          <a:bodyPr/>
-          <a:lstStyle/>
-          <a:p>
-            <a:r>
-              <a:rPr lang="en-CA" b="1" i="0" u="none" strike="noStrike" dirty="0">
-                <a:effectLst/>
-                <a:latin typeface="MentiText"/>
-              </a:rPr>
-              <a:t>Jo</a:t>
-            </a:r>
-            <a:r>
-              <a:rPr lang="en-CA" b="1" dirty="0">
-                <a:latin typeface="MentiText"/>
-              </a:rPr>
-              <a:t>in at </a:t>
-            </a:r>
-            <a:r>
-              <a:rPr lang="en-CA" b="1" dirty="0">
-                <a:solidFill>
-                  <a:srgbClr val="00FF00"/>
-                </a:solidFill>
-                <a:latin typeface="MentiText"/>
-                <a:hlinkClick r:id="rId2">
-                  <a:extLst>
-                    <a:ext uri="{A12FA001-AC4F-418D-AE19-62706E023703}">
-                      <ahyp:hlinkClr xmlns:ahyp="http://schemas.microsoft.com/office/drawing/2018/hyperlinkcolor" val="tx"/>
-                    </a:ext>
-                  </a:extLst>
-                </a:hlinkClick>
-              </a:rPr>
-              <a:t>www.menti.com</a:t>
-            </a:r>
-            <a:r>
-              <a:rPr lang="en-CA" b="1" dirty="0">
-                <a:latin typeface="MentiText"/>
-              </a:rPr>
-              <a:t>:</a:t>
-            </a:r>
-          </a:p>
-          <a:p>
-            <a:pPr lvl="1"/>
-            <a:r>
-              <a:rPr lang="en-CA" sz="2800" b="1" i="0" u="none" strike="noStrike" dirty="0">
-                <a:effectLst/>
-                <a:latin typeface="MentiText"/>
-              </a:rPr>
-              <a:t>Code: </a:t>
-            </a:r>
-            <a:r>
-              <a:rPr lang="en-GB" sz="2800" b="1" i="0" u="none" strike="noStrike" dirty="0">
-                <a:solidFill>
-                  <a:srgbClr val="FFFF00"/>
-                </a:solidFill>
-                <a:effectLst/>
-                <a:latin typeface="MentiText"/>
-              </a:rPr>
-              <a:t>5588 5723</a:t>
-            </a:r>
-          </a:p>
-          <a:p>
-            <a:r>
-              <a:rPr lang="en-GB" b="1" dirty="0">
-                <a:latin typeface="MentiText"/>
-              </a:rPr>
-              <a:t>Link</a:t>
-            </a:r>
-            <a:r>
-              <a:rPr lang="en-GB" b="0" i="0" u="none" strike="noStrike" dirty="0">
-                <a:effectLst/>
-                <a:latin typeface="MentiText"/>
-              </a:rPr>
-              <a:t> </a:t>
-            </a:r>
-            <a:endParaRPr lang="en-CA" dirty="0">
-              <a:hlinkClick r:id="rId3">
-                <a:extLst>
-                  <a:ext uri="{A12FA001-AC4F-418D-AE19-62706E023703}">
-                    <ahyp:hlinkClr xmlns:ahyp="http://schemas.microsoft.com/office/drawing/2018/hyperlinkcolor" val="tx"/>
-                  </a:ext>
-                </a:extLst>
-              </a:hlinkClick>
-            </a:endParaRPr>
-          </a:p>
-          <a:p>
-            <a:pPr lvl="1"/>
-            <a:r>
-              <a:rPr lang="en-CA" dirty="0">
-                <a:solidFill>
-                  <a:srgbClr val="00FF00"/>
-                </a:solidFill>
-                <a:hlinkClick r:id="rId4">
-                  <a:extLst>
-                    <a:ext uri="{A12FA001-AC4F-418D-AE19-62706E023703}">
-                      <ahyp:hlinkClr xmlns:ahyp="http://schemas.microsoft.com/office/drawing/2018/hyperlinkcolor" val="tx"/>
-                    </a:ext>
-                  </a:extLst>
-                </a:hlinkClick>
-              </a:rPr>
-              <a:t>https://www.menti.com/aluwubkvk8u5</a:t>
-            </a:r>
-            <a:r>
-              <a:rPr lang="en-CA" dirty="0">
-                <a:solidFill>
-                  <a:srgbClr val="00FF00"/>
-                </a:solidFill>
-              </a:rPr>
-              <a:t> </a:t>
-            </a:r>
-          </a:p>
-        </p:txBody>
-      </p:sp>
-      <p:pic>
-        <p:nvPicPr>
-          <p:cNvPr id="1030" name="Picture 6" descr="Check Point Vector Images (over 9,600)">
-            <a:extLst>
-              <a:ext uri="{FF2B5EF4-FFF2-40B4-BE49-F238E27FC236}">
-                <a16:creationId xmlns:a16="http://schemas.microsoft.com/office/drawing/2014/main" id="{7471CB85-373C-F2A8-94C9-EF23CD6C08FC}"/>
-              </a:ext>
-            </a:extLst>
-          </p:cNvPr>
-          <p:cNvPicPr>
-            <a:picLocks noChangeAspect="1" noChangeArrowheads="1"/>
-          </p:cNvPicPr>
-          <p:nvPr/>
-        </p:nvPicPr>
-        <p:blipFill>
-          <a:blip r:embed="rId5">
-            <a:extLst>
-              <a:ext uri="{BEBA8EAE-BF5A-486C-A8C5-ECC9F3942E4B}">
-                <a14:imgProps xmlns:a14="http://schemas.microsoft.com/office/drawing/2010/main">
-                  <a14:imgLayer r:embed="rId6">
-                    <a14:imgEffect>
-                      <a14:backgroundRemoval t="10000" b="90000" l="5100" r="96175">
-                        <a14:foregroundMark x1="5464" y1="27200" x2="5464" y2="59600"/>
-                        <a14:foregroundMark x1="5464" y1="59600" x2="7650" y2="69200"/>
-                        <a14:foregroundMark x1="94171" y1="24400" x2="94171" y2="62000"/>
-                        <a14:foregroundMark x1="95082" y1="76400" x2="96175" y2="69200"/>
-                      </a14:backgroundRemoval>
-                    </a14:imgEffect>
-                  </a14:imgLayer>
-                </a14:imgProps>
-              </a:ext>
-              <a:ext uri="{28A0092B-C50C-407E-A947-70E740481C1C}">
-                <a14:useLocalDpi xmlns:a14="http://schemas.microsoft.com/office/drawing/2010/main" val="0"/>
-              </a:ext>
-            </a:extLst>
-          </a:blip>
-          <a:srcRect/>
-          <a:stretch>
-            <a:fillRect/>
-          </a:stretch>
-        </p:blipFill>
-        <p:spPr bwMode="auto">
-          <a:xfrm>
-            <a:off x="7577464" y="503401"/>
-            <a:ext cx="3866106" cy="1760522"/>
-          </a:xfrm>
-          <a:prstGeom prst="rect">
-            <a:avLst/>
-          </a:prstGeom>
-          <a:noFill/>
-          <a:extLst>
-            <a:ext uri="{909E8E84-426E-40DD-AFC4-6F175D3DCCD1}">
-              <a14:hiddenFill xmlns:a14="http://schemas.microsoft.com/office/drawing/2010/main">
-                <a:solidFill>
-                  <a:srgbClr val="FFFFFF"/>
-                </a:solidFill>
-              </a14:hiddenFill>
-            </a:ext>
-          </a:extLst>
-        </p:spPr>
-      </p:pic>
-      <p:pic>
-        <p:nvPicPr>
-          <p:cNvPr id="5" name="Picture 4" descr="A qr code on a white background&#10;&#10;AI-generated content may be incorrect.">
-            <a:extLst>
-              <a:ext uri="{FF2B5EF4-FFF2-40B4-BE49-F238E27FC236}">
-                <a16:creationId xmlns:a16="http://schemas.microsoft.com/office/drawing/2014/main" id="{5807DE38-81A5-5690-A172-FE28F74B6C81}"/>
-              </a:ext>
-            </a:extLst>
-          </p:cNvPr>
-          <p:cNvPicPr>
-            <a:picLocks noChangeAspect="1"/>
-          </p:cNvPicPr>
-          <p:nvPr/>
-        </p:nvPicPr>
-        <p:blipFill>
-          <a:blip r:embed="rId7">
-            <a:extLst>
-              <a:ext uri="{28A0092B-C50C-407E-A947-70E740481C1C}">
-                <a14:useLocalDpi xmlns:a14="http://schemas.microsoft.com/office/drawing/2010/main" val="0"/>
-              </a:ext>
-            </a:extLst>
-          </a:blip>
-          <a:stretch>
-            <a:fillRect/>
-          </a:stretch>
-        </p:blipFill>
-        <p:spPr>
-          <a:xfrm>
-            <a:off x="7340478" y="2073324"/>
-            <a:ext cx="4340077" cy="4340077"/>
-          </a:xfrm>
-          <a:prstGeom prst="rect">
-            <a:avLst/>
-          </a:prstGeom>
-        </p:spPr>
-      </p:pic>
-    </p:spTree>
-    <p:extLst>
-      <p:ext uri="{BB962C8B-B14F-4D97-AF65-F5344CB8AC3E}">
-        <p14:creationId xmlns:p14="http://schemas.microsoft.com/office/powerpoint/2010/main" val="816510864"/>
-      </p:ext>
-    </p:extLst>
-  </p:cSld>
-  <p:clrMapOvr>
-    <a:masterClrMapping/>
-  </p:clrMapOvr>
-</p:sld>
-</file>
-
-<file path=ppt/slides/slide19.xml><?xml version="1.0" encoding="utf-8"?>
 <p:sld xmlns:a="http://schemas.openxmlformats.org/drawingml/2006/main" xmlns:r="http://schemas.openxmlformats.org/officeDocument/2006/relationships" xmlns:p="http://schemas.openxmlformats.org/presentationml/2006/main">
   <p:cSld>
     <p:spTree>
@@ -11303,53 +11129,6 @@
       </p:sp>
       <p:pic>
         <p:nvPicPr>
-          <p:cNvPr id="9218" name="Picture 2" descr="there seems to be a problem with this string. swirl it around while i chase  it - Programmer Cat - quickmeme">
-            <a:extLst>
-              <a:ext uri="{FF2B5EF4-FFF2-40B4-BE49-F238E27FC236}">
-                <a16:creationId xmlns:a16="http://schemas.microsoft.com/office/drawing/2014/main" id="{9F65F3EF-97A1-D14D-AA55-34033C6C785B}"/>
-              </a:ext>
-            </a:extLst>
-          </p:cNvPr>
-          <p:cNvPicPr>
-            <a:picLocks noChangeAspect="1" noChangeArrowheads="1"/>
-          </p:cNvPicPr>
-          <p:nvPr/>
-        </p:nvPicPr>
-        <p:blipFill>
-          <a:blip r:embed="rId2">
-            <a:extLst>
-              <a:ext uri="{28A0092B-C50C-407E-A947-70E740481C1C}">
-                <a14:useLocalDpi xmlns:a14="http://schemas.microsoft.com/office/drawing/2010/main" val="0"/>
-              </a:ext>
-            </a:extLst>
-          </a:blip>
-          <a:srcRect/>
-          <a:stretch>
-            <a:fillRect/>
-          </a:stretch>
-        </p:blipFill>
-        <p:spPr bwMode="auto">
-          <a:xfrm>
-            <a:off x="8405445" y="1236401"/>
-            <a:ext cx="3651740" cy="4894085"/>
-          </a:xfrm>
-          <a:prstGeom prst="rect">
-            <a:avLst/>
-          </a:prstGeom>
-          <a:noFill/>
-          <a:extLst>
-            <a:ext uri="{909E8E84-426E-40DD-AFC4-6F175D3DCCD1}">
-              <a14:hiddenFill xmlns:a14="http://schemas.microsoft.com/office/drawing/2010/main">
-                <a:solidFill>
-                  <a:srgbClr val="FFFFFF"/>
-                </a:solidFill>
-              </a14:hiddenFill>
-            </a:ext>
-          </a:extLst>
-        </p:spPr>
-      </p:pic>
-      <p:pic>
-        <p:nvPicPr>
           <p:cNvPr id="5" name="Graphic 4" descr="Tick with solid fill">
             <a:extLst>
               <a:ext uri="{FF2B5EF4-FFF2-40B4-BE49-F238E27FC236}">
@@ -11363,13 +11142,13 @@
           <p:nvPr/>
         </p:nvPicPr>
         <p:blipFill>
-          <a:blip r:embed="rId3">
+          <a:blip r:embed="rId2">
             <a:extLst>
               <a:ext uri="{28A0092B-C50C-407E-A947-70E740481C1C}">
                 <a14:useLocalDpi xmlns:a14="http://schemas.microsoft.com/office/drawing/2010/main" val="0"/>
               </a:ext>
               <a:ext uri="{96DAC541-7B7A-43D3-8B79-37D633B846F1}">
-                <asvg:svgBlip xmlns:asvg="http://schemas.microsoft.com/office/drawing/2016/SVG/main" r:embed="rId4"/>
+                <asvg:svgBlip xmlns:asvg="http://schemas.microsoft.com/office/drawing/2016/SVG/main" r:embed="rId3"/>
               </a:ext>
             </a:extLst>
           </a:blip>
@@ -11402,13 +11181,13 @@
           <p:nvPr/>
         </p:nvPicPr>
         <p:blipFill>
-          <a:blip r:embed="rId3">
+          <a:blip r:embed="rId2">
             <a:extLst>
               <a:ext uri="{28A0092B-C50C-407E-A947-70E740481C1C}">
                 <a14:useLocalDpi xmlns:a14="http://schemas.microsoft.com/office/drawing/2010/main" val="0"/>
               </a:ext>
               <a:ext uri="{96DAC541-7B7A-43D3-8B79-37D633B846F1}">
-                <asvg:svgBlip xmlns:asvg="http://schemas.microsoft.com/office/drawing/2016/SVG/main" r:embed="rId4"/>
+                <asvg:svgBlip xmlns:asvg="http://schemas.microsoft.com/office/drawing/2016/SVG/main" r:embed="rId3"/>
               </a:ext>
             </a:extLst>
           </a:blip>
@@ -11441,13 +11220,13 @@
           <p:nvPr/>
         </p:nvPicPr>
         <p:blipFill>
-          <a:blip r:embed="rId3">
+          <a:blip r:embed="rId2">
             <a:extLst>
               <a:ext uri="{28A0092B-C50C-407E-A947-70E740481C1C}">
                 <a14:useLocalDpi xmlns:a14="http://schemas.microsoft.com/office/drawing/2010/main" val="0"/>
               </a:ext>
               <a:ext uri="{96DAC541-7B7A-43D3-8B79-37D633B846F1}">
-                <asvg:svgBlip xmlns:asvg="http://schemas.microsoft.com/office/drawing/2016/SVG/main" r:embed="rId4"/>
+                <asvg:svgBlip xmlns:asvg="http://schemas.microsoft.com/office/drawing/2016/SVG/main" r:embed="rId3"/>
               </a:ext>
             </a:extLst>
           </a:blip>
@@ -11480,13 +11259,13 @@
           <p:nvPr/>
         </p:nvPicPr>
         <p:blipFill>
-          <a:blip r:embed="rId3">
+          <a:blip r:embed="rId2">
             <a:extLst>
               <a:ext uri="{28A0092B-C50C-407E-A947-70E740481C1C}">
                 <a14:useLocalDpi xmlns:a14="http://schemas.microsoft.com/office/drawing/2010/main" val="0"/>
               </a:ext>
               <a:ext uri="{96DAC541-7B7A-43D3-8B79-37D633B846F1}">
-                <asvg:svgBlip xmlns:asvg="http://schemas.microsoft.com/office/drawing/2016/SVG/main" r:embed="rId4"/>
+                <asvg:svgBlip xmlns:asvg="http://schemas.microsoft.com/office/drawing/2016/SVG/main" r:embed="rId3"/>
               </a:ext>
             </a:extLst>
           </a:blip>
@@ -11508,6 +11287,1376 @@
     <p:extLst>
       <p:ext uri="{BB962C8B-B14F-4D97-AF65-F5344CB8AC3E}">
         <p14:creationId xmlns:p14="http://schemas.microsoft.com/office/powerpoint/2010/main" val="998678803"/>
+      </p:ext>
+    </p:extLst>
+  </p:cSld>
+  <p:clrMapOvr>
+    <a:masterClrMapping/>
+  </p:clrMapOvr>
+</p:sld>
+</file>
+
+<file path=ppt/slides/slide19.xml><?xml version="1.0" encoding="utf-8"?>
+<p:sld xmlns:a="http://schemas.openxmlformats.org/drawingml/2006/main" xmlns:r="http://schemas.openxmlformats.org/officeDocument/2006/relationships" xmlns:p="http://schemas.openxmlformats.org/presentationml/2006/main">
+  <p:cSld>
+    <p:spTree>
+      <p:nvGrpSpPr>
+        <p:cNvPr id="1" name=""/>
+        <p:cNvGrpSpPr/>
+        <p:nvPr/>
+      </p:nvGrpSpPr>
+      <p:grpSpPr>
+        <a:xfrm>
+          <a:off x="0" y="0"/>
+          <a:ext cx="0" cy="0"/>
+          <a:chOff x="0" y="0"/>
+          <a:chExt cx="0" cy="0"/>
+        </a:xfrm>
+      </p:grpSpPr>
+      <p:sp>
+        <p:nvSpPr>
+          <p:cNvPr id="2" name="Title 1">
+            <a:extLst>
+              <a:ext uri="{FF2B5EF4-FFF2-40B4-BE49-F238E27FC236}">
+                <a16:creationId xmlns:a16="http://schemas.microsoft.com/office/drawing/2014/main" id="{30E3161A-E17B-D441-9A47-659DE5D944D7}"/>
+              </a:ext>
+            </a:extLst>
+          </p:cNvPr>
+          <p:cNvSpPr>
+            <a:spLocks noGrp="1"/>
+          </p:cNvSpPr>
+          <p:nvPr>
+            <p:ph type="title"/>
+          </p:nvPr>
+        </p:nvSpPr>
+        <p:spPr/>
+        <p:txBody>
+          <a:bodyPr>
+            <a:normAutofit fontScale="90000"/>
+          </a:bodyPr>
+          <a:lstStyle/>
+          <a:p>
+            <a:r>
+              <a:rPr lang="en-US" dirty="0"/>
+              <a:t>String Methods</a:t>
+            </a:r>
+          </a:p>
+        </p:txBody>
+      </p:sp>
+      <p:sp>
+        <p:nvSpPr>
+          <p:cNvPr id="3" name="Content Placeholder 2">
+            <a:extLst>
+              <a:ext uri="{FF2B5EF4-FFF2-40B4-BE49-F238E27FC236}">
+                <a16:creationId xmlns:a16="http://schemas.microsoft.com/office/drawing/2014/main" id="{EC57B960-1118-4C42-8919-04D0AD72EF45}"/>
+              </a:ext>
+            </a:extLst>
+          </p:cNvPr>
+          <p:cNvSpPr>
+            <a:spLocks noGrp="1"/>
+          </p:cNvSpPr>
+          <p:nvPr>
+            <p:ph idx="1"/>
+          </p:nvPr>
+        </p:nvSpPr>
+        <p:spPr/>
+        <p:txBody>
+          <a:bodyPr/>
+          <a:lstStyle/>
+          <a:p>
+            <a:r>
+              <a:rPr lang="en-US" dirty="0"/>
+              <a:t>Strings are objects and just like other objects, the </a:t>
+            </a:r>
+            <a:r>
+              <a:rPr lang="en-US" dirty="0">
+                <a:solidFill>
+                  <a:schemeClr val="accent6"/>
+                </a:solidFill>
+              </a:rPr>
+              <a:t>str</a:t>
+            </a:r>
+            <a:r>
+              <a:rPr lang="en-US" dirty="0"/>
+              <a:t> type has associated methods that are only valid for strings</a:t>
+            </a:r>
+          </a:p>
+          <a:p>
+            <a:r>
+              <a:rPr lang="en-US" dirty="0"/>
+              <a:t>To find out which methods are associated with objects, use the built-in function </a:t>
+            </a:r>
+            <a:r>
+              <a:rPr lang="en-US" dirty="0" err="1">
+                <a:solidFill>
+                  <a:srgbClr val="00B0F0"/>
+                </a:solidFill>
+              </a:rPr>
+              <a:t>dir</a:t>
+            </a:r>
+            <a:endParaRPr lang="en-US" dirty="0">
+              <a:solidFill>
+                <a:srgbClr val="00B0F0"/>
+              </a:solidFill>
+            </a:endParaRPr>
+          </a:p>
+          <a:p>
+            <a:endParaRPr lang="en-US" dirty="0">
+              <a:solidFill>
+                <a:srgbClr val="00B0F0"/>
+              </a:solidFill>
+            </a:endParaRPr>
+          </a:p>
+        </p:txBody>
+      </p:sp>
+      <p:sp>
+        <p:nvSpPr>
+          <p:cNvPr id="4" name="Content Placeholder 2">
+            <a:extLst>
+              <a:ext uri="{FF2B5EF4-FFF2-40B4-BE49-F238E27FC236}">
+                <a16:creationId xmlns:a16="http://schemas.microsoft.com/office/drawing/2014/main" id="{AC88BD85-6339-D54E-9A75-9A7956CAAE6D}"/>
+              </a:ext>
+            </a:extLst>
+          </p:cNvPr>
+          <p:cNvSpPr txBox="1">
+            <a:spLocks/>
+          </p:cNvSpPr>
+          <p:nvPr/>
+        </p:nvSpPr>
+        <p:spPr>
+          <a:xfrm>
+            <a:off x="838199" y="3691516"/>
+            <a:ext cx="9109365" cy="2969587"/>
+          </a:xfrm>
+          <a:prstGeom prst="rect">
+            <a:avLst/>
+          </a:prstGeom>
+        </p:spPr>
+        <p:txBody>
+          <a:bodyPr vert="horz" lIns="91440" tIns="45720" rIns="91440" bIns="45720" rtlCol="0">
+            <a:normAutofit fontScale="62500" lnSpcReduction="20000"/>
+          </a:bodyPr>
+          <a:lstStyle>
+            <a:lvl1pPr marL="228600" indent="-228600" algn="l" defTabSz="914400" rtl="0" eaLnBrk="1" latinLnBrk="0" hangingPunct="1">
+              <a:lnSpc>
+                <a:spcPct val="90000"/>
+              </a:lnSpc>
+              <a:spcBef>
+                <a:spcPts val="1000"/>
+              </a:spcBef>
+              <a:buClr>
+                <a:srgbClr val="007EE5"/>
+              </a:buClr>
+              <a:buFont typeface="Wingdings" panose="05000000000000000000" pitchFamily="2" charset="2"/>
+              <a:buChar char="§"/>
+              <a:defRPr sz="2800" kern="1200">
+                <a:solidFill>
+                  <a:srgbClr val="FFFFFF"/>
+                </a:solidFill>
+                <a:latin typeface="+mn-lt"/>
+                <a:ea typeface="+mn-ea"/>
+                <a:cs typeface="+mn-cs"/>
+              </a:defRPr>
+            </a:lvl1pPr>
+            <a:lvl2pPr marL="685800" indent="-228600" algn="l" defTabSz="914400" rtl="0" eaLnBrk="1" latinLnBrk="0" hangingPunct="1">
+              <a:lnSpc>
+                <a:spcPct val="90000"/>
+              </a:lnSpc>
+              <a:spcBef>
+                <a:spcPts val="500"/>
+              </a:spcBef>
+              <a:buClr>
+                <a:srgbClr val="007EE5"/>
+              </a:buClr>
+              <a:buFont typeface="Wingdings" panose="05000000000000000000" pitchFamily="2" charset="2"/>
+              <a:buChar char="§"/>
+              <a:defRPr sz="2400" kern="1200">
+                <a:solidFill>
+                  <a:srgbClr val="FFFFFF"/>
+                </a:solidFill>
+                <a:latin typeface="+mn-lt"/>
+                <a:ea typeface="+mn-ea"/>
+                <a:cs typeface="+mn-cs"/>
+              </a:defRPr>
+            </a:lvl2pPr>
+            <a:lvl3pPr marL="1143000" indent="-228600" algn="l" defTabSz="914400" rtl="0" eaLnBrk="1" latinLnBrk="0" hangingPunct="1">
+              <a:lnSpc>
+                <a:spcPct val="90000"/>
+              </a:lnSpc>
+              <a:spcBef>
+                <a:spcPts val="500"/>
+              </a:spcBef>
+              <a:buClr>
+                <a:srgbClr val="007EE5"/>
+              </a:buClr>
+              <a:buFont typeface="Wingdings" panose="05000000000000000000" pitchFamily="2" charset="2"/>
+              <a:buChar char="§"/>
+              <a:defRPr sz="2000" kern="1200">
+                <a:solidFill>
+                  <a:srgbClr val="FFFFFF"/>
+                </a:solidFill>
+                <a:latin typeface="+mn-lt"/>
+                <a:ea typeface="+mn-ea"/>
+                <a:cs typeface="+mn-cs"/>
+              </a:defRPr>
+            </a:lvl3pPr>
+            <a:lvl4pPr marL="1600200" indent="-228600" algn="l" defTabSz="914400" rtl="0" eaLnBrk="1" latinLnBrk="0" hangingPunct="1">
+              <a:lnSpc>
+                <a:spcPct val="90000"/>
+              </a:lnSpc>
+              <a:spcBef>
+                <a:spcPts val="500"/>
+              </a:spcBef>
+              <a:buClr>
+                <a:srgbClr val="007EE5"/>
+              </a:buClr>
+              <a:buFont typeface="Wingdings" panose="05000000000000000000" pitchFamily="2" charset="2"/>
+              <a:buChar char="§"/>
+              <a:defRPr sz="1800" kern="1200">
+                <a:solidFill>
+                  <a:srgbClr val="FFFFFF"/>
+                </a:solidFill>
+                <a:latin typeface="+mn-lt"/>
+                <a:ea typeface="+mn-ea"/>
+                <a:cs typeface="+mn-cs"/>
+              </a:defRPr>
+            </a:lvl4pPr>
+            <a:lvl5pPr marL="2057400" indent="-228600" algn="l" defTabSz="914400" rtl="0" eaLnBrk="1" latinLnBrk="0" hangingPunct="1">
+              <a:lnSpc>
+                <a:spcPct val="90000"/>
+              </a:lnSpc>
+              <a:spcBef>
+                <a:spcPts val="500"/>
+              </a:spcBef>
+              <a:buClr>
+                <a:srgbClr val="007EE5"/>
+              </a:buClr>
+              <a:buFont typeface="Wingdings" panose="05000000000000000000" pitchFamily="2" charset="2"/>
+              <a:buChar char="§"/>
+              <a:defRPr sz="1800" kern="1200">
+                <a:solidFill>
+                  <a:srgbClr val="FFFFFF"/>
+                </a:solidFill>
+                <a:latin typeface="+mn-lt"/>
+                <a:ea typeface="+mn-ea"/>
+                <a:cs typeface="+mn-cs"/>
+              </a:defRPr>
+            </a:lvl5pPr>
+            <a:lvl6pPr marL="2514600" indent="-228600" algn="l" defTabSz="914400" rtl="0" eaLnBrk="1" latinLnBrk="0" hangingPunct="1">
+              <a:lnSpc>
+                <a:spcPct val="90000"/>
+              </a:lnSpc>
+              <a:spcBef>
+                <a:spcPts val="500"/>
+              </a:spcBef>
+              <a:buFont typeface="Arial" panose="020B0604020202020204" pitchFamily="34" charset="0"/>
+              <a:buChar char="•"/>
+              <a:defRPr sz="1800" kern="1200">
+                <a:solidFill>
+                  <a:schemeClr val="tx1"/>
+                </a:solidFill>
+                <a:latin typeface="+mn-lt"/>
+                <a:ea typeface="+mn-ea"/>
+                <a:cs typeface="+mn-cs"/>
+              </a:defRPr>
+            </a:lvl6pPr>
+            <a:lvl7pPr marL="2971800" indent="-228600" algn="l" defTabSz="914400" rtl="0" eaLnBrk="1" latinLnBrk="0" hangingPunct="1">
+              <a:lnSpc>
+                <a:spcPct val="90000"/>
+              </a:lnSpc>
+              <a:spcBef>
+                <a:spcPts val="500"/>
+              </a:spcBef>
+              <a:buFont typeface="Arial" panose="020B0604020202020204" pitchFamily="34" charset="0"/>
+              <a:buChar char="•"/>
+              <a:defRPr sz="1800" kern="1200">
+                <a:solidFill>
+                  <a:schemeClr val="tx1"/>
+                </a:solidFill>
+                <a:latin typeface="+mn-lt"/>
+                <a:ea typeface="+mn-ea"/>
+                <a:cs typeface="+mn-cs"/>
+              </a:defRPr>
+            </a:lvl7pPr>
+            <a:lvl8pPr marL="3429000" indent="-228600" algn="l" defTabSz="914400" rtl="0" eaLnBrk="1" latinLnBrk="0" hangingPunct="1">
+              <a:lnSpc>
+                <a:spcPct val="90000"/>
+              </a:lnSpc>
+              <a:spcBef>
+                <a:spcPts val="500"/>
+              </a:spcBef>
+              <a:buFont typeface="Arial" panose="020B0604020202020204" pitchFamily="34" charset="0"/>
+              <a:buChar char="•"/>
+              <a:defRPr sz="1800" kern="1200">
+                <a:solidFill>
+                  <a:schemeClr val="tx1"/>
+                </a:solidFill>
+                <a:latin typeface="+mn-lt"/>
+                <a:ea typeface="+mn-ea"/>
+                <a:cs typeface="+mn-cs"/>
+              </a:defRPr>
+            </a:lvl8pPr>
+            <a:lvl9pPr marL="3886200" indent="-228600" algn="l" defTabSz="914400" rtl="0" eaLnBrk="1" latinLnBrk="0" hangingPunct="1">
+              <a:lnSpc>
+                <a:spcPct val="90000"/>
+              </a:lnSpc>
+              <a:spcBef>
+                <a:spcPts val="500"/>
+              </a:spcBef>
+              <a:buFont typeface="Arial" panose="020B0604020202020204" pitchFamily="34" charset="0"/>
+              <a:buChar char="•"/>
+              <a:defRPr sz="1800" kern="1200">
+                <a:solidFill>
+                  <a:schemeClr val="tx1"/>
+                </a:solidFill>
+                <a:latin typeface="+mn-lt"/>
+                <a:ea typeface="+mn-ea"/>
+                <a:cs typeface="+mn-cs"/>
+              </a:defRPr>
+            </a:lvl9pPr>
+          </a:lstStyle>
+          <a:p>
+            <a:pPr marL="0" indent="0">
+              <a:lnSpc>
+                <a:spcPct val="100000"/>
+              </a:lnSpc>
+              <a:buNone/>
+            </a:pPr>
+            <a:r>
+              <a:rPr lang="en-CA" sz="2400" spc="-15" dirty="0">
+                <a:solidFill>
+                  <a:srgbClr val="00FF00"/>
+                </a:solidFill>
+                <a:latin typeface="Courier New"/>
+                <a:cs typeface="Courier New"/>
+              </a:rPr>
+              <a:t>&gt;&gt;&gt; </a:t>
+            </a:r>
+            <a:r>
+              <a:rPr lang="en-CA" sz="2400" spc="-15" dirty="0" err="1">
+                <a:solidFill>
+                  <a:srgbClr val="00FF00"/>
+                </a:solidFill>
+                <a:latin typeface="Courier New"/>
+                <a:cs typeface="Courier New"/>
+              </a:rPr>
+              <a:t>dir</a:t>
+            </a:r>
+            <a:r>
+              <a:rPr lang="en-CA" sz="2400" spc="-15" dirty="0">
+                <a:solidFill>
+                  <a:srgbClr val="00FF00"/>
+                </a:solidFill>
+                <a:latin typeface="Courier New"/>
+                <a:cs typeface="Courier New"/>
+              </a:rPr>
+              <a:t>(str)</a:t>
+            </a:r>
+          </a:p>
+          <a:p>
+            <a:pPr marL="0" indent="0">
+              <a:lnSpc>
+                <a:spcPct val="100000"/>
+              </a:lnSpc>
+              <a:buNone/>
+            </a:pPr>
+            <a:r>
+              <a:rPr lang="en-CA" sz="2400" spc="-15" dirty="0">
+                <a:solidFill>
+                  <a:srgbClr val="00FF00"/>
+                </a:solidFill>
+                <a:latin typeface="Courier New"/>
+                <a:cs typeface="Courier New"/>
+              </a:rPr>
+              <a:t>['__add__', '__class__', '__contains__', '__</a:t>
+            </a:r>
+            <a:r>
+              <a:rPr lang="en-CA" sz="2400" spc="-15" dirty="0" err="1">
+                <a:solidFill>
+                  <a:srgbClr val="00FF00"/>
+                </a:solidFill>
+                <a:latin typeface="Courier New"/>
+                <a:cs typeface="Courier New"/>
+              </a:rPr>
+              <a:t>delattr</a:t>
+            </a:r>
+            <a:r>
+              <a:rPr lang="en-CA" sz="2400" spc="-15" dirty="0">
+                <a:solidFill>
+                  <a:srgbClr val="00FF00"/>
+                </a:solidFill>
+                <a:latin typeface="Courier New"/>
+                <a:cs typeface="Courier New"/>
+              </a:rPr>
+              <a:t>__', '__</a:t>
+            </a:r>
+            <a:r>
+              <a:rPr lang="en-CA" sz="2400" spc="-15" dirty="0" err="1">
+                <a:solidFill>
+                  <a:srgbClr val="00FF00"/>
+                </a:solidFill>
+                <a:latin typeface="Courier New"/>
+                <a:cs typeface="Courier New"/>
+              </a:rPr>
+              <a:t>dir</a:t>
+            </a:r>
+            <a:r>
+              <a:rPr lang="en-CA" sz="2400" spc="-15" dirty="0">
+                <a:solidFill>
+                  <a:srgbClr val="00FF00"/>
+                </a:solidFill>
+                <a:latin typeface="Courier New"/>
+                <a:cs typeface="Courier New"/>
+              </a:rPr>
+              <a:t>__', '__doc__', '__eq__', '__format__', '__</a:t>
+            </a:r>
+            <a:r>
+              <a:rPr lang="en-CA" sz="2400" spc="-15" dirty="0" err="1">
+                <a:solidFill>
+                  <a:srgbClr val="00FF00"/>
+                </a:solidFill>
+                <a:latin typeface="Courier New"/>
+                <a:cs typeface="Courier New"/>
+              </a:rPr>
+              <a:t>ge</a:t>
+            </a:r>
+            <a:r>
+              <a:rPr lang="en-CA" sz="2400" spc="-15" dirty="0">
+                <a:solidFill>
+                  <a:srgbClr val="00FF00"/>
+                </a:solidFill>
+                <a:latin typeface="Courier New"/>
+                <a:cs typeface="Courier New"/>
+              </a:rPr>
+              <a:t>__', '__</a:t>
+            </a:r>
+            <a:r>
+              <a:rPr lang="en-CA" sz="2400" spc="-15" dirty="0" err="1">
+                <a:solidFill>
+                  <a:srgbClr val="00FF00"/>
+                </a:solidFill>
+                <a:latin typeface="Courier New"/>
+                <a:cs typeface="Courier New"/>
+              </a:rPr>
+              <a:t>getattribute</a:t>
+            </a:r>
+            <a:r>
+              <a:rPr lang="en-CA" sz="2400" spc="-15" dirty="0">
+                <a:solidFill>
+                  <a:srgbClr val="00FF00"/>
+                </a:solidFill>
+                <a:latin typeface="Courier New"/>
+                <a:cs typeface="Courier New"/>
+              </a:rPr>
+              <a:t>__', '__</a:t>
+            </a:r>
+            <a:r>
+              <a:rPr lang="en-CA" sz="2400" spc="-15" dirty="0" err="1">
+                <a:solidFill>
+                  <a:srgbClr val="00FF00"/>
+                </a:solidFill>
+                <a:latin typeface="Courier New"/>
+                <a:cs typeface="Courier New"/>
+              </a:rPr>
+              <a:t>getitem</a:t>
+            </a:r>
+            <a:r>
+              <a:rPr lang="en-CA" sz="2400" spc="-15" dirty="0">
+                <a:solidFill>
+                  <a:srgbClr val="00FF00"/>
+                </a:solidFill>
+                <a:latin typeface="Courier New"/>
+                <a:cs typeface="Courier New"/>
+              </a:rPr>
+              <a:t>__', '__</a:t>
+            </a:r>
+            <a:r>
+              <a:rPr lang="en-CA" sz="2400" spc="-15" dirty="0" err="1">
+                <a:solidFill>
+                  <a:srgbClr val="00FF00"/>
+                </a:solidFill>
+                <a:latin typeface="Courier New"/>
+                <a:cs typeface="Courier New"/>
+              </a:rPr>
+              <a:t>getnewargs</a:t>
+            </a:r>
+            <a:r>
+              <a:rPr lang="en-CA" sz="2400" spc="-15" dirty="0">
+                <a:solidFill>
+                  <a:srgbClr val="00FF00"/>
+                </a:solidFill>
+                <a:latin typeface="Courier New"/>
+                <a:cs typeface="Courier New"/>
+              </a:rPr>
+              <a:t>__', '__</a:t>
+            </a:r>
+            <a:r>
+              <a:rPr lang="en-CA" sz="2400" spc="-15" dirty="0" err="1">
+                <a:solidFill>
+                  <a:srgbClr val="00FF00"/>
+                </a:solidFill>
+                <a:latin typeface="Courier New"/>
+                <a:cs typeface="Courier New"/>
+              </a:rPr>
+              <a:t>gt</a:t>
+            </a:r>
+            <a:r>
+              <a:rPr lang="en-CA" sz="2400" spc="-15" dirty="0">
+                <a:solidFill>
+                  <a:srgbClr val="00FF00"/>
+                </a:solidFill>
+                <a:latin typeface="Courier New"/>
+                <a:cs typeface="Courier New"/>
+              </a:rPr>
+              <a:t>__', '__hash__', '__</a:t>
+            </a:r>
+            <a:r>
+              <a:rPr lang="en-CA" sz="2400" spc="-15" dirty="0" err="1">
+                <a:solidFill>
+                  <a:srgbClr val="00FF00"/>
+                </a:solidFill>
+                <a:latin typeface="Courier New"/>
+                <a:cs typeface="Courier New"/>
+              </a:rPr>
+              <a:t>init</a:t>
+            </a:r>
+            <a:r>
+              <a:rPr lang="en-CA" sz="2400" spc="-15" dirty="0">
+                <a:solidFill>
+                  <a:srgbClr val="00FF00"/>
+                </a:solidFill>
+                <a:latin typeface="Courier New"/>
+                <a:cs typeface="Courier New"/>
+              </a:rPr>
+              <a:t>__', '__</a:t>
+            </a:r>
+            <a:r>
+              <a:rPr lang="en-CA" sz="2400" spc="-15" dirty="0" err="1">
+                <a:solidFill>
+                  <a:srgbClr val="00FF00"/>
+                </a:solidFill>
+                <a:latin typeface="Courier New"/>
+                <a:cs typeface="Courier New"/>
+              </a:rPr>
+              <a:t>init_subclass</a:t>
+            </a:r>
+            <a:r>
+              <a:rPr lang="en-CA" sz="2400" spc="-15" dirty="0">
+                <a:solidFill>
+                  <a:srgbClr val="00FF00"/>
+                </a:solidFill>
+                <a:latin typeface="Courier New"/>
+                <a:cs typeface="Courier New"/>
+              </a:rPr>
+              <a:t>__', '__</a:t>
+            </a:r>
+            <a:r>
+              <a:rPr lang="en-CA" sz="2400" spc="-15" dirty="0" err="1">
+                <a:solidFill>
+                  <a:srgbClr val="00FF00"/>
+                </a:solidFill>
+                <a:latin typeface="Courier New"/>
+                <a:cs typeface="Courier New"/>
+              </a:rPr>
+              <a:t>iter</a:t>
+            </a:r>
+            <a:r>
+              <a:rPr lang="en-CA" sz="2400" spc="-15" dirty="0">
+                <a:solidFill>
+                  <a:srgbClr val="00FF00"/>
+                </a:solidFill>
+                <a:latin typeface="Courier New"/>
+                <a:cs typeface="Courier New"/>
+              </a:rPr>
+              <a:t>__', '__le__', '__</a:t>
+            </a:r>
+            <a:r>
+              <a:rPr lang="en-CA" sz="2400" spc="-15" dirty="0" err="1">
+                <a:solidFill>
+                  <a:srgbClr val="00FF00"/>
+                </a:solidFill>
+                <a:latin typeface="Courier New"/>
+                <a:cs typeface="Courier New"/>
+              </a:rPr>
+              <a:t>len</a:t>
+            </a:r>
+            <a:r>
+              <a:rPr lang="en-CA" sz="2400" spc="-15" dirty="0">
+                <a:solidFill>
+                  <a:srgbClr val="00FF00"/>
+                </a:solidFill>
+                <a:latin typeface="Courier New"/>
+                <a:cs typeface="Courier New"/>
+              </a:rPr>
+              <a:t>__', '__</a:t>
+            </a:r>
+            <a:r>
+              <a:rPr lang="en-CA" sz="2400" spc="-15" dirty="0" err="1">
+                <a:solidFill>
+                  <a:srgbClr val="00FF00"/>
+                </a:solidFill>
+                <a:latin typeface="Courier New"/>
+                <a:cs typeface="Courier New"/>
+              </a:rPr>
+              <a:t>lt</a:t>
+            </a:r>
+            <a:r>
+              <a:rPr lang="en-CA" sz="2400" spc="-15" dirty="0">
+                <a:solidFill>
+                  <a:srgbClr val="00FF00"/>
+                </a:solidFill>
+                <a:latin typeface="Courier New"/>
+                <a:cs typeface="Courier New"/>
+              </a:rPr>
+              <a:t>__', '__mod__', '__</a:t>
+            </a:r>
+            <a:r>
+              <a:rPr lang="en-CA" sz="2400" spc="-15" dirty="0" err="1">
+                <a:solidFill>
+                  <a:srgbClr val="00FF00"/>
+                </a:solidFill>
+                <a:latin typeface="Courier New"/>
+                <a:cs typeface="Courier New"/>
+              </a:rPr>
+              <a:t>mul</a:t>
+            </a:r>
+            <a:r>
+              <a:rPr lang="en-CA" sz="2400" spc="-15" dirty="0">
+                <a:solidFill>
+                  <a:srgbClr val="00FF00"/>
+                </a:solidFill>
+                <a:latin typeface="Courier New"/>
+                <a:cs typeface="Courier New"/>
+              </a:rPr>
+              <a:t>__', '__ne__', '__new__', '__reduce__', '__</a:t>
+            </a:r>
+            <a:r>
+              <a:rPr lang="en-CA" sz="2400" spc="-15" dirty="0" err="1">
+                <a:solidFill>
+                  <a:srgbClr val="00FF00"/>
+                </a:solidFill>
+                <a:latin typeface="Courier New"/>
+                <a:cs typeface="Courier New"/>
+              </a:rPr>
+              <a:t>reduce_ex</a:t>
+            </a:r>
+            <a:r>
+              <a:rPr lang="en-CA" sz="2400" spc="-15" dirty="0">
+                <a:solidFill>
+                  <a:srgbClr val="00FF00"/>
+                </a:solidFill>
+                <a:latin typeface="Courier New"/>
+                <a:cs typeface="Courier New"/>
+              </a:rPr>
+              <a:t>__', '__</a:t>
+            </a:r>
+            <a:r>
+              <a:rPr lang="en-CA" sz="2400" spc="-15" dirty="0" err="1">
+                <a:solidFill>
+                  <a:srgbClr val="00FF00"/>
+                </a:solidFill>
+                <a:latin typeface="Courier New"/>
+                <a:cs typeface="Courier New"/>
+              </a:rPr>
+              <a:t>repr</a:t>
+            </a:r>
+            <a:r>
+              <a:rPr lang="en-CA" sz="2400" spc="-15" dirty="0">
+                <a:solidFill>
+                  <a:srgbClr val="00FF00"/>
+                </a:solidFill>
+                <a:latin typeface="Courier New"/>
+                <a:cs typeface="Courier New"/>
+              </a:rPr>
+              <a:t>__', '__</a:t>
+            </a:r>
+            <a:r>
+              <a:rPr lang="en-CA" sz="2400" spc="-15" dirty="0" err="1">
+                <a:solidFill>
+                  <a:srgbClr val="00FF00"/>
+                </a:solidFill>
+                <a:latin typeface="Courier New"/>
+                <a:cs typeface="Courier New"/>
+              </a:rPr>
+              <a:t>rmod</a:t>
+            </a:r>
+            <a:r>
+              <a:rPr lang="en-CA" sz="2400" spc="-15" dirty="0">
+                <a:solidFill>
+                  <a:srgbClr val="00FF00"/>
+                </a:solidFill>
+                <a:latin typeface="Courier New"/>
+                <a:cs typeface="Courier New"/>
+              </a:rPr>
+              <a:t>__', '__</a:t>
+            </a:r>
+            <a:r>
+              <a:rPr lang="en-CA" sz="2400" spc="-15" dirty="0" err="1">
+                <a:solidFill>
+                  <a:srgbClr val="00FF00"/>
+                </a:solidFill>
+                <a:latin typeface="Courier New"/>
+                <a:cs typeface="Courier New"/>
+              </a:rPr>
+              <a:t>rmul</a:t>
+            </a:r>
+            <a:r>
+              <a:rPr lang="en-CA" sz="2400" spc="-15" dirty="0">
+                <a:solidFill>
+                  <a:srgbClr val="00FF00"/>
+                </a:solidFill>
+                <a:latin typeface="Courier New"/>
+                <a:cs typeface="Courier New"/>
+              </a:rPr>
+              <a:t>__', '__</a:t>
+            </a:r>
+            <a:r>
+              <a:rPr lang="en-CA" sz="2400" spc="-15" dirty="0" err="1">
+                <a:solidFill>
+                  <a:srgbClr val="00FF00"/>
+                </a:solidFill>
+                <a:latin typeface="Courier New"/>
+                <a:cs typeface="Courier New"/>
+              </a:rPr>
+              <a:t>setattr</a:t>
+            </a:r>
+            <a:r>
+              <a:rPr lang="en-CA" sz="2400" spc="-15" dirty="0">
+                <a:solidFill>
+                  <a:srgbClr val="00FF00"/>
+                </a:solidFill>
+                <a:latin typeface="Courier New"/>
+                <a:cs typeface="Courier New"/>
+              </a:rPr>
+              <a:t>__', '__</a:t>
+            </a:r>
+            <a:r>
+              <a:rPr lang="en-CA" sz="2400" spc="-15" dirty="0" err="1">
+                <a:solidFill>
+                  <a:srgbClr val="00FF00"/>
+                </a:solidFill>
+                <a:latin typeface="Courier New"/>
+                <a:cs typeface="Courier New"/>
+              </a:rPr>
+              <a:t>sizeof</a:t>
+            </a:r>
+            <a:r>
+              <a:rPr lang="en-CA" sz="2400" spc="-15" dirty="0">
+                <a:solidFill>
+                  <a:srgbClr val="00FF00"/>
+                </a:solidFill>
+                <a:latin typeface="Courier New"/>
+                <a:cs typeface="Courier New"/>
+              </a:rPr>
+              <a:t>__', '__str__', '__</a:t>
+            </a:r>
+            <a:r>
+              <a:rPr lang="en-CA" sz="2400" spc="-15" dirty="0" err="1">
+                <a:solidFill>
+                  <a:srgbClr val="00FF00"/>
+                </a:solidFill>
+                <a:latin typeface="Courier New"/>
+                <a:cs typeface="Courier New"/>
+              </a:rPr>
+              <a:t>subclasshook</a:t>
+            </a:r>
+            <a:r>
+              <a:rPr lang="en-CA" sz="2400" spc="-15" dirty="0">
+                <a:solidFill>
+                  <a:srgbClr val="00FF00"/>
+                </a:solidFill>
+                <a:latin typeface="Courier New"/>
+                <a:cs typeface="Courier New"/>
+              </a:rPr>
+              <a:t>__', 'capitalize', '</a:t>
+            </a:r>
+            <a:r>
+              <a:rPr lang="en-CA" sz="2400" spc="-15" dirty="0" err="1">
+                <a:solidFill>
+                  <a:srgbClr val="00FF00"/>
+                </a:solidFill>
+                <a:latin typeface="Courier New"/>
+                <a:cs typeface="Courier New"/>
+              </a:rPr>
+              <a:t>casefold</a:t>
+            </a:r>
+            <a:r>
+              <a:rPr lang="en-CA" sz="2400" spc="-15" dirty="0">
+                <a:solidFill>
+                  <a:srgbClr val="00FF00"/>
+                </a:solidFill>
+                <a:latin typeface="Courier New"/>
+                <a:cs typeface="Courier New"/>
+              </a:rPr>
+              <a:t>', 'center', 'count', 'encode', '</a:t>
+            </a:r>
+            <a:r>
+              <a:rPr lang="en-CA" sz="2400" spc="-15" dirty="0" err="1">
+                <a:solidFill>
+                  <a:srgbClr val="00FF00"/>
+                </a:solidFill>
+                <a:latin typeface="Courier New"/>
+                <a:cs typeface="Courier New"/>
+              </a:rPr>
+              <a:t>endswith</a:t>
+            </a:r>
+            <a:r>
+              <a:rPr lang="en-CA" sz="2400" spc="-15" dirty="0">
+                <a:solidFill>
+                  <a:srgbClr val="00FF00"/>
+                </a:solidFill>
+                <a:latin typeface="Courier New"/>
+                <a:cs typeface="Courier New"/>
+              </a:rPr>
+              <a:t>', '</a:t>
+            </a:r>
+            <a:r>
+              <a:rPr lang="en-CA" sz="2400" spc="-15" dirty="0" err="1">
+                <a:solidFill>
+                  <a:srgbClr val="00FF00"/>
+                </a:solidFill>
+                <a:latin typeface="Courier New"/>
+                <a:cs typeface="Courier New"/>
+              </a:rPr>
+              <a:t>expandtabs</a:t>
+            </a:r>
+            <a:r>
+              <a:rPr lang="en-CA" sz="2400" spc="-15" dirty="0">
+                <a:solidFill>
+                  <a:srgbClr val="00FF00"/>
+                </a:solidFill>
+                <a:latin typeface="Courier New"/>
+                <a:cs typeface="Courier New"/>
+              </a:rPr>
+              <a:t>', 'find', 'format', '</a:t>
+            </a:r>
+            <a:r>
+              <a:rPr lang="en-CA" sz="2400" spc="-15" dirty="0" err="1">
+                <a:solidFill>
+                  <a:srgbClr val="00FF00"/>
+                </a:solidFill>
+                <a:latin typeface="Courier New"/>
+                <a:cs typeface="Courier New"/>
+              </a:rPr>
+              <a:t>format_map</a:t>
+            </a:r>
+            <a:r>
+              <a:rPr lang="en-CA" sz="2400" spc="-15" dirty="0">
+                <a:solidFill>
+                  <a:srgbClr val="00FF00"/>
+                </a:solidFill>
+                <a:latin typeface="Courier New"/>
+                <a:cs typeface="Courier New"/>
+              </a:rPr>
+              <a:t>', 'index', '</a:t>
+            </a:r>
+            <a:r>
+              <a:rPr lang="en-CA" sz="2400" spc="-15" dirty="0" err="1">
+                <a:solidFill>
+                  <a:srgbClr val="00FF00"/>
+                </a:solidFill>
+                <a:latin typeface="Courier New"/>
+                <a:cs typeface="Courier New"/>
+              </a:rPr>
+              <a:t>isalnum</a:t>
+            </a:r>
+            <a:r>
+              <a:rPr lang="en-CA" sz="2400" spc="-15" dirty="0">
+                <a:solidFill>
+                  <a:srgbClr val="00FF00"/>
+                </a:solidFill>
+                <a:latin typeface="Courier New"/>
+                <a:cs typeface="Courier New"/>
+              </a:rPr>
+              <a:t>', '</a:t>
+            </a:r>
+            <a:r>
+              <a:rPr lang="en-CA" sz="2400" spc="-15" dirty="0" err="1">
+                <a:solidFill>
+                  <a:srgbClr val="00FF00"/>
+                </a:solidFill>
+                <a:latin typeface="Courier New"/>
+                <a:cs typeface="Courier New"/>
+              </a:rPr>
+              <a:t>isalpha</a:t>
+            </a:r>
+            <a:r>
+              <a:rPr lang="en-CA" sz="2400" spc="-15" dirty="0">
+                <a:solidFill>
+                  <a:srgbClr val="00FF00"/>
+                </a:solidFill>
+                <a:latin typeface="Courier New"/>
+                <a:cs typeface="Courier New"/>
+              </a:rPr>
+              <a:t>', '</a:t>
+            </a:r>
+            <a:r>
+              <a:rPr lang="en-CA" sz="2400" spc="-15" dirty="0" err="1">
+                <a:solidFill>
+                  <a:srgbClr val="00FF00"/>
+                </a:solidFill>
+                <a:latin typeface="Courier New"/>
+                <a:cs typeface="Courier New"/>
+              </a:rPr>
+              <a:t>isascii</a:t>
+            </a:r>
+            <a:r>
+              <a:rPr lang="en-CA" sz="2400" spc="-15" dirty="0">
+                <a:solidFill>
+                  <a:srgbClr val="00FF00"/>
+                </a:solidFill>
+                <a:latin typeface="Courier New"/>
+                <a:cs typeface="Courier New"/>
+              </a:rPr>
+              <a:t>', '</a:t>
+            </a:r>
+            <a:r>
+              <a:rPr lang="en-CA" sz="2400" spc="-15" dirty="0" err="1">
+                <a:solidFill>
+                  <a:srgbClr val="00FF00"/>
+                </a:solidFill>
+                <a:latin typeface="Courier New"/>
+                <a:cs typeface="Courier New"/>
+              </a:rPr>
+              <a:t>isdecimal</a:t>
+            </a:r>
+            <a:r>
+              <a:rPr lang="en-CA" sz="2400" spc="-15" dirty="0">
+                <a:solidFill>
+                  <a:srgbClr val="00FF00"/>
+                </a:solidFill>
+                <a:latin typeface="Courier New"/>
+                <a:cs typeface="Courier New"/>
+              </a:rPr>
+              <a:t>', '</a:t>
+            </a:r>
+            <a:r>
+              <a:rPr lang="en-CA" sz="2400" spc="-15" dirty="0" err="1">
+                <a:solidFill>
+                  <a:srgbClr val="00FF00"/>
+                </a:solidFill>
+                <a:latin typeface="Courier New"/>
+                <a:cs typeface="Courier New"/>
+              </a:rPr>
+              <a:t>isdigit</a:t>
+            </a:r>
+            <a:r>
+              <a:rPr lang="en-CA" sz="2400" spc="-15" dirty="0">
+                <a:solidFill>
+                  <a:srgbClr val="00FF00"/>
+                </a:solidFill>
+                <a:latin typeface="Courier New"/>
+                <a:cs typeface="Courier New"/>
+              </a:rPr>
+              <a:t>', '</a:t>
+            </a:r>
+            <a:r>
+              <a:rPr lang="en-CA" sz="2400" spc="-15" dirty="0" err="1">
+                <a:solidFill>
+                  <a:srgbClr val="00FF00"/>
+                </a:solidFill>
+                <a:latin typeface="Courier New"/>
+                <a:cs typeface="Courier New"/>
+              </a:rPr>
+              <a:t>isidentifier</a:t>
+            </a:r>
+            <a:r>
+              <a:rPr lang="en-CA" sz="2400" spc="-15" dirty="0">
+                <a:solidFill>
+                  <a:srgbClr val="00FF00"/>
+                </a:solidFill>
+                <a:latin typeface="Courier New"/>
+                <a:cs typeface="Courier New"/>
+              </a:rPr>
+              <a:t>', '</a:t>
+            </a:r>
+            <a:r>
+              <a:rPr lang="en-CA" sz="2400" spc="-15" dirty="0" err="1">
+                <a:solidFill>
+                  <a:srgbClr val="00FF00"/>
+                </a:solidFill>
+                <a:latin typeface="Courier New"/>
+                <a:cs typeface="Courier New"/>
+              </a:rPr>
+              <a:t>islower</a:t>
+            </a:r>
+            <a:r>
+              <a:rPr lang="en-CA" sz="2400" spc="-15" dirty="0">
+                <a:solidFill>
+                  <a:srgbClr val="00FF00"/>
+                </a:solidFill>
+                <a:latin typeface="Courier New"/>
+                <a:cs typeface="Courier New"/>
+              </a:rPr>
+              <a:t>', '</a:t>
+            </a:r>
+            <a:r>
+              <a:rPr lang="en-CA" sz="2400" spc="-15" dirty="0" err="1">
+                <a:solidFill>
+                  <a:srgbClr val="00FF00"/>
+                </a:solidFill>
+                <a:latin typeface="Courier New"/>
+                <a:cs typeface="Courier New"/>
+              </a:rPr>
+              <a:t>isnumeric</a:t>
+            </a:r>
+            <a:r>
+              <a:rPr lang="en-CA" sz="2400" spc="-15" dirty="0">
+                <a:solidFill>
+                  <a:srgbClr val="00FF00"/>
+                </a:solidFill>
+                <a:latin typeface="Courier New"/>
+                <a:cs typeface="Courier New"/>
+              </a:rPr>
+              <a:t>', '</a:t>
+            </a:r>
+            <a:r>
+              <a:rPr lang="en-CA" sz="2400" spc="-15" dirty="0" err="1">
+                <a:solidFill>
+                  <a:srgbClr val="00FF00"/>
+                </a:solidFill>
+                <a:latin typeface="Courier New"/>
+                <a:cs typeface="Courier New"/>
+              </a:rPr>
+              <a:t>isprintable</a:t>
+            </a:r>
+            <a:r>
+              <a:rPr lang="en-CA" sz="2400" spc="-15" dirty="0">
+                <a:solidFill>
+                  <a:srgbClr val="00FF00"/>
+                </a:solidFill>
+                <a:latin typeface="Courier New"/>
+                <a:cs typeface="Courier New"/>
+              </a:rPr>
+              <a:t>', '</a:t>
+            </a:r>
+            <a:r>
+              <a:rPr lang="en-CA" sz="2400" spc="-15" dirty="0" err="1">
+                <a:solidFill>
+                  <a:srgbClr val="00FF00"/>
+                </a:solidFill>
+                <a:latin typeface="Courier New"/>
+                <a:cs typeface="Courier New"/>
+              </a:rPr>
+              <a:t>isspace</a:t>
+            </a:r>
+            <a:r>
+              <a:rPr lang="en-CA" sz="2400" spc="-15" dirty="0">
+                <a:solidFill>
+                  <a:srgbClr val="00FF00"/>
+                </a:solidFill>
+                <a:latin typeface="Courier New"/>
+                <a:cs typeface="Courier New"/>
+              </a:rPr>
+              <a:t>', '</a:t>
+            </a:r>
+            <a:r>
+              <a:rPr lang="en-CA" sz="2400" spc="-15" dirty="0" err="1">
+                <a:solidFill>
+                  <a:srgbClr val="00FF00"/>
+                </a:solidFill>
+                <a:latin typeface="Courier New"/>
+                <a:cs typeface="Courier New"/>
+              </a:rPr>
+              <a:t>istitle</a:t>
+            </a:r>
+            <a:r>
+              <a:rPr lang="en-CA" sz="2400" spc="-15" dirty="0">
+                <a:solidFill>
+                  <a:srgbClr val="00FF00"/>
+                </a:solidFill>
+                <a:latin typeface="Courier New"/>
+                <a:cs typeface="Courier New"/>
+              </a:rPr>
+              <a:t>', '</a:t>
+            </a:r>
+            <a:r>
+              <a:rPr lang="en-CA" sz="2400" spc="-15" dirty="0" err="1">
+                <a:solidFill>
+                  <a:srgbClr val="00FF00"/>
+                </a:solidFill>
+                <a:latin typeface="Courier New"/>
+                <a:cs typeface="Courier New"/>
+              </a:rPr>
+              <a:t>isupper</a:t>
+            </a:r>
+            <a:r>
+              <a:rPr lang="en-CA" sz="2400" spc="-15" dirty="0">
+                <a:solidFill>
+                  <a:srgbClr val="00FF00"/>
+                </a:solidFill>
+                <a:latin typeface="Courier New"/>
+                <a:cs typeface="Courier New"/>
+              </a:rPr>
+              <a:t>', 'join', '</a:t>
+            </a:r>
+            <a:r>
+              <a:rPr lang="en-CA" sz="2400" spc="-15" dirty="0" err="1">
+                <a:solidFill>
+                  <a:srgbClr val="00FF00"/>
+                </a:solidFill>
+                <a:latin typeface="Courier New"/>
+                <a:cs typeface="Courier New"/>
+              </a:rPr>
+              <a:t>ljust</a:t>
+            </a:r>
+            <a:r>
+              <a:rPr lang="en-CA" sz="2400" spc="-15" dirty="0">
+                <a:solidFill>
+                  <a:srgbClr val="00FF00"/>
+                </a:solidFill>
+                <a:latin typeface="Courier New"/>
+                <a:cs typeface="Courier New"/>
+              </a:rPr>
+              <a:t>', 'lower', '</a:t>
+            </a:r>
+            <a:r>
+              <a:rPr lang="en-CA" sz="2400" spc="-15" dirty="0" err="1">
+                <a:solidFill>
+                  <a:srgbClr val="00FF00"/>
+                </a:solidFill>
+                <a:latin typeface="Courier New"/>
+                <a:cs typeface="Courier New"/>
+              </a:rPr>
+              <a:t>lstrip</a:t>
+            </a:r>
+            <a:r>
+              <a:rPr lang="en-CA" sz="2400" spc="-15" dirty="0">
+                <a:solidFill>
+                  <a:srgbClr val="00FF00"/>
+                </a:solidFill>
+                <a:latin typeface="Courier New"/>
+                <a:cs typeface="Courier New"/>
+              </a:rPr>
+              <a:t>', '</a:t>
+            </a:r>
+            <a:r>
+              <a:rPr lang="en-CA" sz="2400" spc="-15" dirty="0" err="1">
+                <a:solidFill>
+                  <a:srgbClr val="00FF00"/>
+                </a:solidFill>
+                <a:latin typeface="Courier New"/>
+                <a:cs typeface="Courier New"/>
+              </a:rPr>
+              <a:t>maketrans</a:t>
+            </a:r>
+            <a:r>
+              <a:rPr lang="en-CA" sz="2400" spc="-15" dirty="0">
+                <a:solidFill>
+                  <a:srgbClr val="00FF00"/>
+                </a:solidFill>
+                <a:latin typeface="Courier New"/>
+                <a:cs typeface="Courier New"/>
+              </a:rPr>
+              <a:t>', 'partition', 'replace', '</a:t>
+            </a:r>
+            <a:r>
+              <a:rPr lang="en-CA" sz="2400" spc="-15" dirty="0" err="1">
+                <a:solidFill>
+                  <a:srgbClr val="00FF00"/>
+                </a:solidFill>
+                <a:latin typeface="Courier New"/>
+                <a:cs typeface="Courier New"/>
+              </a:rPr>
+              <a:t>rfind</a:t>
+            </a:r>
+            <a:r>
+              <a:rPr lang="en-CA" sz="2400" spc="-15" dirty="0">
+                <a:solidFill>
+                  <a:srgbClr val="00FF00"/>
+                </a:solidFill>
+                <a:latin typeface="Courier New"/>
+                <a:cs typeface="Courier New"/>
+              </a:rPr>
+              <a:t>', '</a:t>
+            </a:r>
+            <a:r>
+              <a:rPr lang="en-CA" sz="2400" spc="-15" dirty="0" err="1">
+                <a:solidFill>
+                  <a:srgbClr val="00FF00"/>
+                </a:solidFill>
+                <a:latin typeface="Courier New"/>
+                <a:cs typeface="Courier New"/>
+              </a:rPr>
+              <a:t>rindex</a:t>
+            </a:r>
+            <a:r>
+              <a:rPr lang="en-CA" sz="2400" spc="-15" dirty="0">
+                <a:solidFill>
+                  <a:srgbClr val="00FF00"/>
+                </a:solidFill>
+                <a:latin typeface="Courier New"/>
+                <a:cs typeface="Courier New"/>
+              </a:rPr>
+              <a:t>', '</a:t>
+            </a:r>
+            <a:r>
+              <a:rPr lang="en-CA" sz="2400" spc="-15" dirty="0" err="1">
+                <a:solidFill>
+                  <a:srgbClr val="00FF00"/>
+                </a:solidFill>
+                <a:latin typeface="Courier New"/>
+                <a:cs typeface="Courier New"/>
+              </a:rPr>
+              <a:t>rjust</a:t>
+            </a:r>
+            <a:r>
+              <a:rPr lang="en-CA" sz="2400" spc="-15" dirty="0">
+                <a:solidFill>
+                  <a:srgbClr val="00FF00"/>
+                </a:solidFill>
+                <a:latin typeface="Courier New"/>
+                <a:cs typeface="Courier New"/>
+              </a:rPr>
+              <a:t>', '</a:t>
+            </a:r>
+            <a:r>
+              <a:rPr lang="en-CA" sz="2400" spc="-15" dirty="0" err="1">
+                <a:solidFill>
+                  <a:srgbClr val="00FF00"/>
+                </a:solidFill>
+                <a:latin typeface="Courier New"/>
+                <a:cs typeface="Courier New"/>
+              </a:rPr>
+              <a:t>rpartition</a:t>
+            </a:r>
+            <a:r>
+              <a:rPr lang="en-CA" sz="2400" spc="-15" dirty="0">
+                <a:solidFill>
+                  <a:srgbClr val="00FF00"/>
+                </a:solidFill>
+                <a:latin typeface="Courier New"/>
+                <a:cs typeface="Courier New"/>
+              </a:rPr>
+              <a:t>', '</a:t>
+            </a:r>
+            <a:r>
+              <a:rPr lang="en-CA" sz="2400" spc="-15" dirty="0" err="1">
+                <a:solidFill>
+                  <a:srgbClr val="00FF00"/>
+                </a:solidFill>
+                <a:latin typeface="Courier New"/>
+                <a:cs typeface="Courier New"/>
+              </a:rPr>
+              <a:t>rsplit</a:t>
+            </a:r>
+            <a:r>
+              <a:rPr lang="en-CA" sz="2400" spc="-15" dirty="0">
+                <a:solidFill>
+                  <a:srgbClr val="00FF00"/>
+                </a:solidFill>
+                <a:latin typeface="Courier New"/>
+                <a:cs typeface="Courier New"/>
+              </a:rPr>
+              <a:t>', '</a:t>
+            </a:r>
+            <a:r>
+              <a:rPr lang="en-CA" sz="2400" spc="-15" dirty="0" err="1">
+                <a:solidFill>
+                  <a:srgbClr val="00FF00"/>
+                </a:solidFill>
+                <a:latin typeface="Courier New"/>
+                <a:cs typeface="Courier New"/>
+              </a:rPr>
+              <a:t>rstrip</a:t>
+            </a:r>
+            <a:r>
+              <a:rPr lang="en-CA" sz="2400" spc="-15" dirty="0">
+                <a:solidFill>
+                  <a:srgbClr val="00FF00"/>
+                </a:solidFill>
+                <a:latin typeface="Courier New"/>
+                <a:cs typeface="Courier New"/>
+              </a:rPr>
+              <a:t>', 'split', '</a:t>
+            </a:r>
+            <a:r>
+              <a:rPr lang="en-CA" sz="2400" spc="-15" dirty="0" err="1">
+                <a:solidFill>
+                  <a:srgbClr val="00FF00"/>
+                </a:solidFill>
+                <a:latin typeface="Courier New"/>
+                <a:cs typeface="Courier New"/>
+              </a:rPr>
+              <a:t>splitlines</a:t>
+            </a:r>
+            <a:r>
+              <a:rPr lang="en-CA" sz="2400" spc="-15" dirty="0">
+                <a:solidFill>
+                  <a:srgbClr val="00FF00"/>
+                </a:solidFill>
+                <a:latin typeface="Courier New"/>
+                <a:cs typeface="Courier New"/>
+              </a:rPr>
+              <a:t>', '</a:t>
+            </a:r>
+            <a:r>
+              <a:rPr lang="en-CA" sz="2400" spc="-15" dirty="0" err="1">
+                <a:solidFill>
+                  <a:srgbClr val="00FF00"/>
+                </a:solidFill>
+                <a:latin typeface="Courier New"/>
+                <a:cs typeface="Courier New"/>
+              </a:rPr>
+              <a:t>startswith</a:t>
+            </a:r>
+            <a:r>
+              <a:rPr lang="en-CA" sz="2400" spc="-15" dirty="0">
+                <a:solidFill>
+                  <a:srgbClr val="00FF00"/>
+                </a:solidFill>
+                <a:latin typeface="Courier New"/>
+                <a:cs typeface="Courier New"/>
+              </a:rPr>
+              <a:t>', 'strip', '</a:t>
+            </a:r>
+            <a:r>
+              <a:rPr lang="en-CA" sz="2400" spc="-15" dirty="0" err="1">
+                <a:solidFill>
+                  <a:srgbClr val="00FF00"/>
+                </a:solidFill>
+                <a:latin typeface="Courier New"/>
+                <a:cs typeface="Courier New"/>
+              </a:rPr>
+              <a:t>swapcase</a:t>
+            </a:r>
+            <a:r>
+              <a:rPr lang="en-CA" sz="2400" spc="-15" dirty="0">
+                <a:solidFill>
+                  <a:srgbClr val="00FF00"/>
+                </a:solidFill>
+                <a:latin typeface="Courier New"/>
+                <a:cs typeface="Courier New"/>
+              </a:rPr>
+              <a:t>', 'title', 'translate', 'upper', '</a:t>
+            </a:r>
+            <a:r>
+              <a:rPr lang="en-CA" sz="2400" spc="-15" dirty="0" err="1">
+                <a:solidFill>
+                  <a:srgbClr val="00FF00"/>
+                </a:solidFill>
+                <a:latin typeface="Courier New"/>
+                <a:cs typeface="Courier New"/>
+              </a:rPr>
+              <a:t>zfill</a:t>
+            </a:r>
+            <a:r>
+              <a:rPr lang="en-CA" sz="2400" spc="-15" dirty="0">
+                <a:solidFill>
+                  <a:srgbClr val="00FF00"/>
+                </a:solidFill>
+                <a:latin typeface="Courier New"/>
+                <a:cs typeface="Courier New"/>
+              </a:rPr>
+              <a:t>']</a:t>
+            </a:r>
+          </a:p>
+        </p:txBody>
+      </p:sp>
+    </p:spTree>
+    <p:extLst>
+      <p:ext uri="{BB962C8B-B14F-4D97-AF65-F5344CB8AC3E}">
+        <p14:creationId xmlns:p14="http://schemas.microsoft.com/office/powerpoint/2010/main" val="3930113540"/>
       </p:ext>
     </p:extLst>
   </p:cSld>
@@ -11662,11 +12811,16 @@
           <a:p>
             <a:pPr lvl="1"/>
             <a:r>
-              <a:rPr lang="en-GB" b="0" i="0" u="none" strike="noStrike" dirty="0">
-                <a:effectLst/>
-                <a:latin typeface="Lato Extended"/>
-              </a:rPr>
-              <a:t>Term Test 1 Review: Jeopardy!</a:t>
+              <a:rPr lang="en-US" b="1" dirty="0">
+                <a:solidFill>
+                  <a:schemeClr val="accent6"/>
+                </a:solidFill>
+              </a:rPr>
+              <a:t>for </a:t>
+            </a:r>
+            <a:r>
+              <a:rPr lang="en-US" b="1" dirty="0"/>
+              <a:t>loops</a:t>
             </a:r>
           </a:p>
         </p:txBody>
@@ -11681,6 +12835,14 @@
   <p:clrMapOvr>
     <a:masterClrMapping/>
   </p:clrMapOvr>
+  <mc:AlternateContent xmlns:mc="http://schemas.openxmlformats.org/markup-compatibility/2006">
+    <mc:Choice xmlns:p14="http://schemas.microsoft.com/office/powerpoint/2010/main" Requires="p14">
+      <p:transition spd="slow" p14:dur="2000" advTm="12602"/>
+    </mc:Choice>
+    <mc:Fallback>
+      <p:transition spd="slow" advTm="12602"/>
+    </mc:Fallback>
+  </mc:AlternateContent>
 </p:sld>
 </file>
 
@@ -11726,7 +12888,15 @@
           <a:p>
             <a:r>
               <a:rPr lang="en-US" dirty="0"/>
-              <a:t>String Methods</a:t>
+              <a:t>String Method: </a:t>
+            </a:r>
+            <a:r>
+              <a:rPr lang="en-US" dirty="0">
+                <a:solidFill>
+                  <a:schemeClr val="accent6"/>
+                </a:solidFill>
+              </a:rPr>
+              <a:t>upper</a:t>
             </a:r>
           </a:p>
         </p:txBody>
@@ -11753,34 +12923,16 @@
           <a:lstStyle/>
           <a:p>
             <a:r>
+              <a:rPr lang="en-US" dirty="0">
+                <a:solidFill>
+                  <a:schemeClr val="accent6"/>
+                </a:solidFill>
+              </a:rPr>
+              <a:t>upper</a:t>
+            </a:r>
+            <a:r>
               <a:rPr lang="en-US" dirty="0"/>
-              <a:t>Strings are objects and just like other objects, the </a:t>
-            </a:r>
-            <a:r>
-              <a:rPr lang="en-US" dirty="0">
-                <a:solidFill>
-                  <a:schemeClr val="accent6"/>
-                </a:solidFill>
-              </a:rPr>
-              <a:t>str</a:t>
-            </a:r>
-            <a:r>
-              <a:rPr lang="en-US" dirty="0"/>
-              <a:t> type has associated methods that are only valid for strings</a:t>
-            </a:r>
-          </a:p>
-          <a:p>
-            <a:r>
-              <a:rPr lang="en-US" dirty="0"/>
-              <a:t>To find out which methods are associated with objects, use the built-in function </a:t>
-            </a:r>
-            <a:r>
-              <a:rPr lang="en-US" dirty="0" err="1">
-                <a:solidFill>
-                  <a:srgbClr val="00B0F0"/>
-                </a:solidFill>
-              </a:rPr>
-              <a:t>dir</a:t>
+              <a:t> is a string method that generates a new string that has all upper case characters</a:t>
             </a:r>
             <a:endParaRPr lang="en-US" dirty="0">
               <a:solidFill>
@@ -11799,10 +12951,10 @@
       </p:sp>
       <p:sp>
         <p:nvSpPr>
-          <p:cNvPr id="4" name="Content Placeholder 2">
+          <p:cNvPr id="5" name="Content Placeholder 2">
             <a:extLst>
               <a:ext uri="{FF2B5EF4-FFF2-40B4-BE49-F238E27FC236}">
-                <a16:creationId xmlns:a16="http://schemas.microsoft.com/office/drawing/2014/main" id="{AC88BD85-6339-D54E-9A75-9A7956CAAE6D}"/>
+                <a16:creationId xmlns:a16="http://schemas.microsoft.com/office/drawing/2014/main" id="{FF2FEE43-ED3E-6C4B-94C9-09B68F2057E7}"/>
               </a:ext>
             </a:extLst>
           </p:cNvPr>
@@ -11813,8 +12965,8 @@
         </p:nvSpPr>
         <p:spPr>
           <a:xfrm>
-            <a:off x="838199" y="3691516"/>
-            <a:ext cx="9109365" cy="2969587"/>
+            <a:off x="112986" y="3092426"/>
+            <a:ext cx="11853042" cy="3318446"/>
           </a:xfrm>
           <a:prstGeom prst="rect">
             <a:avLst/>
@@ -11822,7 +12974,7 @@
         </p:spPr>
         <p:txBody>
           <a:bodyPr vert="horz" lIns="91440" tIns="45720" rIns="91440" bIns="45720" rtlCol="0">
-            <a:normAutofit fontScale="62500" lnSpcReduction="20000"/>
+            <a:normAutofit fontScale="92500"/>
           </a:bodyPr>
           <a:lstStyle>
             <a:lvl1pPr marL="228600" indent="-228600" algn="l" defTabSz="914400" rtl="0" eaLnBrk="1" latinLnBrk="0" hangingPunct="1">
@@ -12028,7 +13180,7 @@
                 <a:latin typeface="Courier New"/>
                 <a:cs typeface="Courier New"/>
               </a:rPr>
-              <a:t>dir</a:t>
+              <a:t>white_rabbit</a:t>
             </a:r>
             <a:r>
               <a:rPr lang="en-CA" sz="2400" spc="-15" dirty="0">
@@ -12038,7 +13190,7 @@
                 <a:latin typeface="Courier New"/>
                 <a:cs typeface="Courier New"/>
               </a:rPr>
-              <a:t>(str)</a:t>
+              <a:t> = ”I’m late! I’m late! For a very important date!”</a:t>
             </a:r>
           </a:p>
           <a:p>
@@ -12048,6 +13200,21 @@
               </a:lnSpc>
               <a:buNone/>
             </a:pPr>
+            <a:endParaRPr lang="en-CA" sz="2400" spc="-15" dirty="0">
+              <a:solidFill>
+                <a:srgbClr val="00FF00"/>
+              </a:solidFill>
+              <a:latin typeface="Courier New"/>
+              <a:cs typeface="Courier New"/>
+            </a:endParaRPr>
+          </a:p>
+          <a:p>
+            <a:pPr marL="0" indent="0">
+              <a:lnSpc>
+                <a:spcPct val="100000"/>
+              </a:lnSpc>
+              <a:buNone/>
+            </a:pPr>
             <a:r>
               <a:rPr lang="en-CA" sz="2400" spc="-15" dirty="0">
                 <a:solidFill>
@@ -12056,7 +13223,7 @@
                 <a:latin typeface="Courier New"/>
                 <a:cs typeface="Courier New"/>
               </a:rPr>
-              <a:t>['__add__', '__class__', '__contains__', '__</a:t>
+              <a:t>&gt;&gt;&gt; </a:t>
             </a:r>
             <a:r>
               <a:rPr lang="en-CA" sz="2400" spc="-15" dirty="0" err="1">
@@ -12066,7 +13233,7 @@
                 <a:latin typeface="Courier New"/>
                 <a:cs typeface="Courier New"/>
               </a:rPr>
-              <a:t>delattr</a:t>
+              <a:t>white_rabbit.upper</a:t>
             </a:r>
             <a:r>
               <a:rPr lang="en-CA" sz="2400" spc="-15" dirty="0">
@@ -12076,7 +13243,58 @@
                 <a:latin typeface="Courier New"/>
                 <a:cs typeface="Courier New"/>
               </a:rPr>
-              <a:t>__', '__</a:t>
+              <a:t>()</a:t>
+            </a:r>
+          </a:p>
+          <a:p>
+            <a:pPr marL="0" indent="0">
+              <a:lnSpc>
+                <a:spcPct val="100000"/>
+              </a:lnSpc>
+              <a:buNone/>
+            </a:pPr>
+            <a:r>
+              <a:rPr lang="en-CA" sz="2400" spc="-15" dirty="0">
+                <a:solidFill>
+                  <a:srgbClr val="00FF00"/>
+                </a:solidFill>
+                <a:latin typeface="Courier New"/>
+                <a:cs typeface="Courier New"/>
+              </a:rPr>
+              <a:t>“I’M LATE! I’M LATE! FOR A VERY IMPORTANT DATE!”</a:t>
+            </a:r>
+          </a:p>
+          <a:p>
+            <a:pPr marL="0" indent="0">
+              <a:lnSpc>
+                <a:spcPct val="100000"/>
+              </a:lnSpc>
+              <a:buNone/>
+            </a:pPr>
+            <a:endParaRPr lang="en-CA" sz="2400" spc="-15" dirty="0">
+              <a:solidFill>
+                <a:srgbClr val="00FF00"/>
+              </a:solidFill>
+              <a:latin typeface="Courier New"/>
+              <a:cs typeface="Courier New"/>
+            </a:endParaRPr>
+          </a:p>
+          <a:p>
+            <a:pPr marL="0" indent="0">
+              <a:lnSpc>
+                <a:spcPct val="100000"/>
+              </a:lnSpc>
+              <a:buNone/>
+            </a:pPr>
+            <a:r>
+              <a:rPr lang="en-CA" sz="2400" spc="-15" dirty="0">
+                <a:solidFill>
+                  <a:srgbClr val="00FF00"/>
+                </a:solidFill>
+                <a:latin typeface="Courier New"/>
+                <a:cs typeface="Courier New"/>
+              </a:rPr>
+              <a:t>&gt;&gt;&gt; </a:t>
             </a:r>
             <a:r>
               <a:rPr lang="en-CA" sz="2400" spc="-15" dirty="0" err="1">
@@ -12086,8 +13304,23 @@
                 <a:latin typeface="Courier New"/>
                 <a:cs typeface="Courier New"/>
               </a:rPr>
-              <a:t>dir</a:t>
-            </a:r>
+              <a:t>white_rabbit</a:t>
+            </a:r>
+            <a:endParaRPr lang="en-CA" sz="2400" spc="-15" dirty="0">
+              <a:solidFill>
+                <a:srgbClr val="00FF00"/>
+              </a:solidFill>
+              <a:latin typeface="Courier New"/>
+              <a:cs typeface="Courier New"/>
+            </a:endParaRPr>
+          </a:p>
+          <a:p>
+            <a:pPr marL="0" indent="0">
+              <a:lnSpc>
+                <a:spcPct val="100000"/>
+              </a:lnSpc>
+              <a:buNone/>
+            </a:pPr>
             <a:r>
               <a:rPr lang="en-CA" sz="2400" spc="-15" dirty="0">
                 <a:solidFill>
@@ -12096,955 +13329,62 @@
                 <a:latin typeface="Courier New"/>
                 <a:cs typeface="Courier New"/>
               </a:rPr>
-              <a:t>__', '__doc__', '__eq__', '__format__', '__</a:t>
-            </a:r>
-            <a:r>
-              <a:rPr lang="en-CA" sz="2400" spc="-15" dirty="0" err="1">
-                <a:solidFill>
-                  <a:srgbClr val="00FF00"/>
-                </a:solidFill>
-                <a:latin typeface="Courier New"/>
-                <a:cs typeface="Courier New"/>
-              </a:rPr>
-              <a:t>ge</a:t>
-            </a:r>
-            <a:r>
-              <a:rPr lang="en-CA" sz="2400" spc="-15" dirty="0">
-                <a:solidFill>
-                  <a:srgbClr val="00FF00"/>
-                </a:solidFill>
-                <a:latin typeface="Courier New"/>
-                <a:cs typeface="Courier New"/>
-              </a:rPr>
-              <a:t>__', '__</a:t>
-            </a:r>
-            <a:r>
-              <a:rPr lang="en-CA" sz="2400" spc="-15" dirty="0" err="1">
-                <a:solidFill>
-                  <a:srgbClr val="00FF00"/>
-                </a:solidFill>
-                <a:latin typeface="Courier New"/>
-                <a:cs typeface="Courier New"/>
-              </a:rPr>
-              <a:t>getattribute</a:t>
-            </a:r>
-            <a:r>
-              <a:rPr lang="en-CA" sz="2400" spc="-15" dirty="0">
-                <a:solidFill>
-                  <a:srgbClr val="00FF00"/>
-                </a:solidFill>
-                <a:latin typeface="Courier New"/>
-                <a:cs typeface="Courier New"/>
-              </a:rPr>
-              <a:t>__', '__</a:t>
-            </a:r>
-            <a:r>
-              <a:rPr lang="en-CA" sz="2400" spc="-15" dirty="0" err="1">
-                <a:solidFill>
-                  <a:srgbClr val="00FF00"/>
-                </a:solidFill>
-                <a:latin typeface="Courier New"/>
-                <a:cs typeface="Courier New"/>
-              </a:rPr>
-              <a:t>getitem</a:t>
-            </a:r>
-            <a:r>
-              <a:rPr lang="en-CA" sz="2400" spc="-15" dirty="0">
-                <a:solidFill>
-                  <a:srgbClr val="00FF00"/>
-                </a:solidFill>
-                <a:latin typeface="Courier New"/>
-                <a:cs typeface="Courier New"/>
-              </a:rPr>
-              <a:t>__', '__</a:t>
-            </a:r>
-            <a:r>
-              <a:rPr lang="en-CA" sz="2400" spc="-15" dirty="0" err="1">
-                <a:solidFill>
-                  <a:srgbClr val="00FF00"/>
-                </a:solidFill>
-                <a:latin typeface="Courier New"/>
-                <a:cs typeface="Courier New"/>
-              </a:rPr>
-              <a:t>getnewargs</a:t>
-            </a:r>
-            <a:r>
-              <a:rPr lang="en-CA" sz="2400" spc="-15" dirty="0">
-                <a:solidFill>
-                  <a:srgbClr val="00FF00"/>
-                </a:solidFill>
-                <a:latin typeface="Courier New"/>
-                <a:cs typeface="Courier New"/>
-              </a:rPr>
-              <a:t>__', '__</a:t>
-            </a:r>
-            <a:r>
-              <a:rPr lang="en-CA" sz="2400" spc="-15" dirty="0" err="1">
-                <a:solidFill>
-                  <a:srgbClr val="00FF00"/>
-                </a:solidFill>
-                <a:latin typeface="Courier New"/>
-                <a:cs typeface="Courier New"/>
-              </a:rPr>
-              <a:t>gt</a:t>
-            </a:r>
-            <a:r>
-              <a:rPr lang="en-CA" sz="2400" spc="-15" dirty="0">
-                <a:solidFill>
-                  <a:srgbClr val="00FF00"/>
-                </a:solidFill>
-                <a:latin typeface="Courier New"/>
-                <a:cs typeface="Courier New"/>
-              </a:rPr>
-              <a:t>__', '__hash__', '__</a:t>
-            </a:r>
-            <a:r>
-              <a:rPr lang="en-CA" sz="2400" spc="-15" dirty="0" err="1">
-                <a:solidFill>
-                  <a:srgbClr val="00FF00"/>
-                </a:solidFill>
-                <a:latin typeface="Courier New"/>
-                <a:cs typeface="Courier New"/>
-              </a:rPr>
-              <a:t>init</a:t>
-            </a:r>
-            <a:r>
-              <a:rPr lang="en-CA" sz="2400" spc="-15" dirty="0">
-                <a:solidFill>
-                  <a:srgbClr val="00FF00"/>
-                </a:solidFill>
-                <a:latin typeface="Courier New"/>
-                <a:cs typeface="Courier New"/>
-              </a:rPr>
-              <a:t>__', '__</a:t>
-            </a:r>
-            <a:r>
-              <a:rPr lang="en-CA" sz="2400" spc="-15" dirty="0" err="1">
-                <a:solidFill>
-                  <a:srgbClr val="00FF00"/>
-                </a:solidFill>
-                <a:latin typeface="Courier New"/>
-                <a:cs typeface="Courier New"/>
-              </a:rPr>
-              <a:t>init_subclass</a:t>
-            </a:r>
-            <a:r>
-              <a:rPr lang="en-CA" sz="2400" spc="-15" dirty="0">
-                <a:solidFill>
-                  <a:srgbClr val="00FF00"/>
-                </a:solidFill>
-                <a:latin typeface="Courier New"/>
-                <a:cs typeface="Courier New"/>
-              </a:rPr>
-              <a:t>__', '__</a:t>
-            </a:r>
-            <a:r>
-              <a:rPr lang="en-CA" sz="2400" spc="-15" dirty="0" err="1">
-                <a:solidFill>
-                  <a:srgbClr val="00FF00"/>
-                </a:solidFill>
-                <a:latin typeface="Courier New"/>
-                <a:cs typeface="Courier New"/>
-              </a:rPr>
-              <a:t>iter</a:t>
-            </a:r>
-            <a:r>
-              <a:rPr lang="en-CA" sz="2400" spc="-15" dirty="0">
-                <a:solidFill>
-                  <a:srgbClr val="00FF00"/>
-                </a:solidFill>
-                <a:latin typeface="Courier New"/>
-                <a:cs typeface="Courier New"/>
-              </a:rPr>
-              <a:t>__', '__le__', '__</a:t>
-            </a:r>
-            <a:r>
-              <a:rPr lang="en-CA" sz="2400" spc="-15" dirty="0" err="1">
-                <a:solidFill>
-                  <a:srgbClr val="00FF00"/>
-                </a:solidFill>
-                <a:latin typeface="Courier New"/>
-                <a:cs typeface="Courier New"/>
-              </a:rPr>
-              <a:t>len</a:t>
-            </a:r>
-            <a:r>
-              <a:rPr lang="en-CA" sz="2400" spc="-15" dirty="0">
-                <a:solidFill>
-                  <a:srgbClr val="00FF00"/>
-                </a:solidFill>
-                <a:latin typeface="Courier New"/>
-                <a:cs typeface="Courier New"/>
-              </a:rPr>
-              <a:t>__', '__</a:t>
-            </a:r>
-            <a:r>
-              <a:rPr lang="en-CA" sz="2400" spc="-15" dirty="0" err="1">
-                <a:solidFill>
-                  <a:srgbClr val="00FF00"/>
-                </a:solidFill>
-                <a:latin typeface="Courier New"/>
-                <a:cs typeface="Courier New"/>
-              </a:rPr>
-              <a:t>lt</a:t>
-            </a:r>
-            <a:r>
-              <a:rPr lang="en-CA" sz="2400" spc="-15" dirty="0">
-                <a:solidFill>
-                  <a:srgbClr val="00FF00"/>
-                </a:solidFill>
-                <a:latin typeface="Courier New"/>
-                <a:cs typeface="Courier New"/>
-              </a:rPr>
-              <a:t>__', '__mod__', '__</a:t>
-            </a:r>
-            <a:r>
-              <a:rPr lang="en-CA" sz="2400" spc="-15" dirty="0" err="1">
-                <a:solidFill>
-                  <a:srgbClr val="00FF00"/>
-                </a:solidFill>
-                <a:latin typeface="Courier New"/>
-                <a:cs typeface="Courier New"/>
-              </a:rPr>
-              <a:t>mul</a:t>
-            </a:r>
-            <a:r>
-              <a:rPr lang="en-CA" sz="2400" spc="-15" dirty="0">
-                <a:solidFill>
-                  <a:srgbClr val="00FF00"/>
-                </a:solidFill>
-                <a:latin typeface="Courier New"/>
-                <a:cs typeface="Courier New"/>
-              </a:rPr>
-              <a:t>__', '__ne__', '__new__', '__reduce__', '__</a:t>
-            </a:r>
-            <a:r>
-              <a:rPr lang="en-CA" sz="2400" spc="-15" dirty="0" err="1">
-                <a:solidFill>
-                  <a:srgbClr val="00FF00"/>
-                </a:solidFill>
-                <a:latin typeface="Courier New"/>
-                <a:cs typeface="Courier New"/>
-              </a:rPr>
-              <a:t>reduce_ex</a:t>
-            </a:r>
-            <a:r>
-              <a:rPr lang="en-CA" sz="2400" spc="-15" dirty="0">
-                <a:solidFill>
-                  <a:srgbClr val="00FF00"/>
-                </a:solidFill>
-                <a:latin typeface="Courier New"/>
-                <a:cs typeface="Courier New"/>
-              </a:rPr>
-              <a:t>__', '__</a:t>
-            </a:r>
-            <a:r>
-              <a:rPr lang="en-CA" sz="2400" spc="-15" dirty="0" err="1">
-                <a:solidFill>
-                  <a:srgbClr val="00FF00"/>
-                </a:solidFill>
-                <a:latin typeface="Courier New"/>
-                <a:cs typeface="Courier New"/>
-              </a:rPr>
-              <a:t>repr</a:t>
-            </a:r>
-            <a:r>
-              <a:rPr lang="en-CA" sz="2400" spc="-15" dirty="0">
-                <a:solidFill>
-                  <a:srgbClr val="00FF00"/>
-                </a:solidFill>
-                <a:latin typeface="Courier New"/>
-                <a:cs typeface="Courier New"/>
-              </a:rPr>
-              <a:t>__', '__</a:t>
-            </a:r>
-            <a:r>
-              <a:rPr lang="en-CA" sz="2400" spc="-15" dirty="0" err="1">
-                <a:solidFill>
-                  <a:srgbClr val="00FF00"/>
-                </a:solidFill>
-                <a:latin typeface="Courier New"/>
-                <a:cs typeface="Courier New"/>
-              </a:rPr>
-              <a:t>rmod</a:t>
-            </a:r>
-            <a:r>
-              <a:rPr lang="en-CA" sz="2400" spc="-15" dirty="0">
-                <a:solidFill>
-                  <a:srgbClr val="00FF00"/>
-                </a:solidFill>
-                <a:latin typeface="Courier New"/>
-                <a:cs typeface="Courier New"/>
-              </a:rPr>
-              <a:t>__', '__</a:t>
-            </a:r>
-            <a:r>
-              <a:rPr lang="en-CA" sz="2400" spc="-15" dirty="0" err="1">
-                <a:solidFill>
-                  <a:srgbClr val="00FF00"/>
-                </a:solidFill>
-                <a:latin typeface="Courier New"/>
-                <a:cs typeface="Courier New"/>
-              </a:rPr>
-              <a:t>rmul</a:t>
-            </a:r>
-            <a:r>
-              <a:rPr lang="en-CA" sz="2400" spc="-15" dirty="0">
-                <a:solidFill>
-                  <a:srgbClr val="00FF00"/>
-                </a:solidFill>
-                <a:latin typeface="Courier New"/>
-                <a:cs typeface="Courier New"/>
-              </a:rPr>
-              <a:t>__', '__</a:t>
-            </a:r>
-            <a:r>
-              <a:rPr lang="en-CA" sz="2400" spc="-15" dirty="0" err="1">
-                <a:solidFill>
-                  <a:srgbClr val="00FF00"/>
-                </a:solidFill>
-                <a:latin typeface="Courier New"/>
-                <a:cs typeface="Courier New"/>
-              </a:rPr>
-              <a:t>setattr</a:t>
-            </a:r>
-            <a:r>
-              <a:rPr lang="en-CA" sz="2400" spc="-15" dirty="0">
-                <a:solidFill>
-                  <a:srgbClr val="00FF00"/>
-                </a:solidFill>
-                <a:latin typeface="Courier New"/>
-                <a:cs typeface="Courier New"/>
-              </a:rPr>
-              <a:t>__', '__</a:t>
-            </a:r>
-            <a:r>
-              <a:rPr lang="en-CA" sz="2400" spc="-15" dirty="0" err="1">
-                <a:solidFill>
-                  <a:srgbClr val="00FF00"/>
-                </a:solidFill>
-                <a:latin typeface="Courier New"/>
-                <a:cs typeface="Courier New"/>
-              </a:rPr>
-              <a:t>sizeof</a:t>
-            </a:r>
-            <a:r>
-              <a:rPr lang="en-CA" sz="2400" spc="-15" dirty="0">
-                <a:solidFill>
-                  <a:srgbClr val="00FF00"/>
-                </a:solidFill>
-                <a:latin typeface="Courier New"/>
-                <a:cs typeface="Courier New"/>
-              </a:rPr>
-              <a:t>__', '__str__', '__</a:t>
-            </a:r>
-            <a:r>
-              <a:rPr lang="en-CA" sz="2400" spc="-15" dirty="0" err="1">
-                <a:solidFill>
-                  <a:srgbClr val="00FF00"/>
-                </a:solidFill>
-                <a:latin typeface="Courier New"/>
-                <a:cs typeface="Courier New"/>
-              </a:rPr>
-              <a:t>subclasshook</a:t>
-            </a:r>
-            <a:r>
-              <a:rPr lang="en-CA" sz="2400" spc="-15" dirty="0">
-                <a:solidFill>
-                  <a:srgbClr val="00FF00"/>
-                </a:solidFill>
-                <a:latin typeface="Courier New"/>
-                <a:cs typeface="Courier New"/>
-              </a:rPr>
-              <a:t>__', 'capitalize', '</a:t>
-            </a:r>
-            <a:r>
-              <a:rPr lang="en-CA" sz="2400" spc="-15" dirty="0" err="1">
-                <a:solidFill>
-                  <a:srgbClr val="00FF00"/>
-                </a:solidFill>
-                <a:latin typeface="Courier New"/>
-                <a:cs typeface="Courier New"/>
-              </a:rPr>
-              <a:t>casefold</a:t>
-            </a:r>
-            <a:r>
-              <a:rPr lang="en-CA" sz="2400" spc="-15" dirty="0">
-                <a:solidFill>
-                  <a:srgbClr val="00FF00"/>
-                </a:solidFill>
-                <a:latin typeface="Courier New"/>
-                <a:cs typeface="Courier New"/>
-              </a:rPr>
-              <a:t>', 'center', 'count', 'encode', '</a:t>
-            </a:r>
-            <a:r>
-              <a:rPr lang="en-CA" sz="2400" spc="-15" dirty="0" err="1">
-                <a:solidFill>
-                  <a:srgbClr val="00FF00"/>
-                </a:solidFill>
-                <a:latin typeface="Courier New"/>
-                <a:cs typeface="Courier New"/>
-              </a:rPr>
-              <a:t>endswith</a:t>
-            </a:r>
-            <a:r>
-              <a:rPr lang="en-CA" sz="2400" spc="-15" dirty="0">
-                <a:solidFill>
-                  <a:srgbClr val="00FF00"/>
-                </a:solidFill>
-                <a:latin typeface="Courier New"/>
-                <a:cs typeface="Courier New"/>
-              </a:rPr>
-              <a:t>', '</a:t>
-            </a:r>
-            <a:r>
-              <a:rPr lang="en-CA" sz="2400" spc="-15" dirty="0" err="1">
-                <a:solidFill>
-                  <a:srgbClr val="00FF00"/>
-                </a:solidFill>
-                <a:latin typeface="Courier New"/>
-                <a:cs typeface="Courier New"/>
-              </a:rPr>
-              <a:t>expandtabs</a:t>
-            </a:r>
-            <a:r>
-              <a:rPr lang="en-CA" sz="2400" spc="-15" dirty="0">
-                <a:solidFill>
-                  <a:srgbClr val="00FF00"/>
-                </a:solidFill>
-                <a:latin typeface="Courier New"/>
-                <a:cs typeface="Courier New"/>
-              </a:rPr>
-              <a:t>', 'find', 'format', '</a:t>
-            </a:r>
-            <a:r>
-              <a:rPr lang="en-CA" sz="2400" spc="-15" dirty="0" err="1">
-                <a:solidFill>
-                  <a:srgbClr val="00FF00"/>
-                </a:solidFill>
-                <a:latin typeface="Courier New"/>
-                <a:cs typeface="Courier New"/>
-              </a:rPr>
-              <a:t>format_map</a:t>
-            </a:r>
-            <a:r>
-              <a:rPr lang="en-CA" sz="2400" spc="-15" dirty="0">
-                <a:solidFill>
-                  <a:srgbClr val="00FF00"/>
-                </a:solidFill>
-                <a:latin typeface="Courier New"/>
-                <a:cs typeface="Courier New"/>
-              </a:rPr>
-              <a:t>', 'index', '</a:t>
-            </a:r>
-            <a:r>
-              <a:rPr lang="en-CA" sz="2400" spc="-15" dirty="0" err="1">
-                <a:solidFill>
-                  <a:srgbClr val="00FF00"/>
-                </a:solidFill>
-                <a:latin typeface="Courier New"/>
-                <a:cs typeface="Courier New"/>
-              </a:rPr>
-              <a:t>isalnum</a:t>
-            </a:r>
-            <a:r>
-              <a:rPr lang="en-CA" sz="2400" spc="-15" dirty="0">
-                <a:solidFill>
-                  <a:srgbClr val="00FF00"/>
-                </a:solidFill>
-                <a:latin typeface="Courier New"/>
-                <a:cs typeface="Courier New"/>
-              </a:rPr>
-              <a:t>', '</a:t>
-            </a:r>
-            <a:r>
-              <a:rPr lang="en-CA" sz="2400" spc="-15" dirty="0" err="1">
-                <a:solidFill>
-                  <a:srgbClr val="00FF00"/>
-                </a:solidFill>
-                <a:latin typeface="Courier New"/>
-                <a:cs typeface="Courier New"/>
-              </a:rPr>
-              <a:t>isalpha</a:t>
-            </a:r>
-            <a:r>
-              <a:rPr lang="en-CA" sz="2400" spc="-15" dirty="0">
-                <a:solidFill>
-                  <a:srgbClr val="00FF00"/>
-                </a:solidFill>
-                <a:latin typeface="Courier New"/>
-                <a:cs typeface="Courier New"/>
-              </a:rPr>
-              <a:t>', '</a:t>
-            </a:r>
-            <a:r>
-              <a:rPr lang="en-CA" sz="2400" spc="-15" dirty="0" err="1">
-                <a:solidFill>
-                  <a:srgbClr val="00FF00"/>
-                </a:solidFill>
-                <a:latin typeface="Courier New"/>
-                <a:cs typeface="Courier New"/>
-              </a:rPr>
-              <a:t>isascii</a:t>
-            </a:r>
-            <a:r>
-              <a:rPr lang="en-CA" sz="2400" spc="-15" dirty="0">
-                <a:solidFill>
-                  <a:srgbClr val="00FF00"/>
-                </a:solidFill>
-                <a:latin typeface="Courier New"/>
-                <a:cs typeface="Courier New"/>
-              </a:rPr>
-              <a:t>', '</a:t>
-            </a:r>
-            <a:r>
-              <a:rPr lang="en-CA" sz="2400" spc="-15" dirty="0" err="1">
-                <a:solidFill>
-                  <a:srgbClr val="00FF00"/>
-                </a:solidFill>
-                <a:latin typeface="Courier New"/>
-                <a:cs typeface="Courier New"/>
-              </a:rPr>
-              <a:t>isdecimal</a:t>
-            </a:r>
-            <a:r>
-              <a:rPr lang="en-CA" sz="2400" spc="-15" dirty="0">
-                <a:solidFill>
-                  <a:srgbClr val="00FF00"/>
-                </a:solidFill>
-                <a:latin typeface="Courier New"/>
-                <a:cs typeface="Courier New"/>
-              </a:rPr>
-              <a:t>', '</a:t>
-            </a:r>
-            <a:r>
-              <a:rPr lang="en-CA" sz="2400" spc="-15" dirty="0" err="1">
-                <a:solidFill>
-                  <a:srgbClr val="00FF00"/>
-                </a:solidFill>
-                <a:latin typeface="Courier New"/>
-                <a:cs typeface="Courier New"/>
-              </a:rPr>
-              <a:t>isdigit</a:t>
-            </a:r>
-            <a:r>
-              <a:rPr lang="en-CA" sz="2400" spc="-15" dirty="0">
-                <a:solidFill>
-                  <a:srgbClr val="00FF00"/>
-                </a:solidFill>
-                <a:latin typeface="Courier New"/>
-                <a:cs typeface="Courier New"/>
-              </a:rPr>
-              <a:t>', '</a:t>
-            </a:r>
-            <a:r>
-              <a:rPr lang="en-CA" sz="2400" spc="-15" dirty="0" err="1">
-                <a:solidFill>
-                  <a:srgbClr val="00FF00"/>
-                </a:solidFill>
-                <a:latin typeface="Courier New"/>
-                <a:cs typeface="Courier New"/>
-              </a:rPr>
-              <a:t>isidentifier</a:t>
-            </a:r>
-            <a:r>
-              <a:rPr lang="en-CA" sz="2400" spc="-15" dirty="0">
-                <a:solidFill>
-                  <a:srgbClr val="00FF00"/>
-                </a:solidFill>
-                <a:latin typeface="Courier New"/>
-                <a:cs typeface="Courier New"/>
-              </a:rPr>
-              <a:t>', '</a:t>
-            </a:r>
-            <a:r>
-              <a:rPr lang="en-CA" sz="2400" spc="-15" dirty="0" err="1">
-                <a:solidFill>
-                  <a:srgbClr val="00FF00"/>
-                </a:solidFill>
-                <a:latin typeface="Courier New"/>
-                <a:cs typeface="Courier New"/>
-              </a:rPr>
-              <a:t>islower</a:t>
-            </a:r>
-            <a:r>
-              <a:rPr lang="en-CA" sz="2400" spc="-15" dirty="0">
-                <a:solidFill>
-                  <a:srgbClr val="00FF00"/>
-                </a:solidFill>
-                <a:latin typeface="Courier New"/>
-                <a:cs typeface="Courier New"/>
-              </a:rPr>
-              <a:t>', '</a:t>
-            </a:r>
-            <a:r>
-              <a:rPr lang="en-CA" sz="2400" spc="-15" dirty="0" err="1">
-                <a:solidFill>
-                  <a:srgbClr val="00FF00"/>
-                </a:solidFill>
-                <a:latin typeface="Courier New"/>
-                <a:cs typeface="Courier New"/>
-              </a:rPr>
-              <a:t>isnumeric</a:t>
-            </a:r>
-            <a:r>
-              <a:rPr lang="en-CA" sz="2400" spc="-15" dirty="0">
-                <a:solidFill>
-                  <a:srgbClr val="00FF00"/>
-                </a:solidFill>
-                <a:latin typeface="Courier New"/>
-                <a:cs typeface="Courier New"/>
-              </a:rPr>
-              <a:t>', '</a:t>
-            </a:r>
-            <a:r>
-              <a:rPr lang="en-CA" sz="2400" spc="-15" dirty="0" err="1">
-                <a:solidFill>
-                  <a:srgbClr val="00FF00"/>
-                </a:solidFill>
-                <a:latin typeface="Courier New"/>
-                <a:cs typeface="Courier New"/>
-              </a:rPr>
-              <a:t>isprintable</a:t>
-            </a:r>
-            <a:r>
-              <a:rPr lang="en-CA" sz="2400" spc="-15" dirty="0">
-                <a:solidFill>
-                  <a:srgbClr val="00FF00"/>
-                </a:solidFill>
-                <a:latin typeface="Courier New"/>
-                <a:cs typeface="Courier New"/>
-              </a:rPr>
-              <a:t>', '</a:t>
-            </a:r>
-            <a:r>
-              <a:rPr lang="en-CA" sz="2400" spc="-15" dirty="0" err="1">
-                <a:solidFill>
-                  <a:srgbClr val="00FF00"/>
-                </a:solidFill>
-                <a:latin typeface="Courier New"/>
-                <a:cs typeface="Courier New"/>
-              </a:rPr>
-              <a:t>isspace</a:t>
-            </a:r>
-            <a:r>
-              <a:rPr lang="en-CA" sz="2400" spc="-15" dirty="0">
-                <a:solidFill>
-                  <a:srgbClr val="00FF00"/>
-                </a:solidFill>
-                <a:latin typeface="Courier New"/>
-                <a:cs typeface="Courier New"/>
-              </a:rPr>
-              <a:t>', '</a:t>
-            </a:r>
-            <a:r>
-              <a:rPr lang="en-CA" sz="2400" spc="-15" dirty="0" err="1">
-                <a:solidFill>
-                  <a:srgbClr val="00FF00"/>
-                </a:solidFill>
-                <a:latin typeface="Courier New"/>
-                <a:cs typeface="Courier New"/>
-              </a:rPr>
-              <a:t>istitle</a:t>
-            </a:r>
-            <a:r>
-              <a:rPr lang="en-CA" sz="2400" spc="-15" dirty="0">
-                <a:solidFill>
-                  <a:srgbClr val="00FF00"/>
-                </a:solidFill>
-                <a:latin typeface="Courier New"/>
-                <a:cs typeface="Courier New"/>
-              </a:rPr>
-              <a:t>', '</a:t>
-            </a:r>
-            <a:r>
-              <a:rPr lang="en-CA" sz="2400" spc="-15" dirty="0" err="1">
-                <a:solidFill>
-                  <a:srgbClr val="00FF00"/>
-                </a:solidFill>
-                <a:latin typeface="Courier New"/>
-                <a:cs typeface="Courier New"/>
-              </a:rPr>
-              <a:t>isupper</a:t>
-            </a:r>
-            <a:r>
-              <a:rPr lang="en-CA" sz="2400" spc="-15" dirty="0">
-                <a:solidFill>
-                  <a:srgbClr val="00FF00"/>
-                </a:solidFill>
-                <a:latin typeface="Courier New"/>
-                <a:cs typeface="Courier New"/>
-              </a:rPr>
-              <a:t>', 'join', '</a:t>
-            </a:r>
-            <a:r>
-              <a:rPr lang="en-CA" sz="2400" spc="-15" dirty="0" err="1">
-                <a:solidFill>
-                  <a:srgbClr val="00FF00"/>
-                </a:solidFill>
-                <a:latin typeface="Courier New"/>
-                <a:cs typeface="Courier New"/>
-              </a:rPr>
-              <a:t>ljust</a:t>
-            </a:r>
-            <a:r>
-              <a:rPr lang="en-CA" sz="2400" spc="-15" dirty="0">
-                <a:solidFill>
-                  <a:srgbClr val="00FF00"/>
-                </a:solidFill>
-                <a:latin typeface="Courier New"/>
-                <a:cs typeface="Courier New"/>
-              </a:rPr>
-              <a:t>', 'lower', '</a:t>
-            </a:r>
-            <a:r>
-              <a:rPr lang="en-CA" sz="2400" spc="-15" dirty="0" err="1">
-                <a:solidFill>
-                  <a:srgbClr val="00FF00"/>
-                </a:solidFill>
-                <a:latin typeface="Courier New"/>
-                <a:cs typeface="Courier New"/>
-              </a:rPr>
-              <a:t>lstrip</a:t>
-            </a:r>
-            <a:r>
-              <a:rPr lang="en-CA" sz="2400" spc="-15" dirty="0">
-                <a:solidFill>
-                  <a:srgbClr val="00FF00"/>
-                </a:solidFill>
-                <a:latin typeface="Courier New"/>
-                <a:cs typeface="Courier New"/>
-              </a:rPr>
-              <a:t>', '</a:t>
-            </a:r>
-            <a:r>
-              <a:rPr lang="en-CA" sz="2400" spc="-15" dirty="0" err="1">
-                <a:solidFill>
-                  <a:srgbClr val="00FF00"/>
-                </a:solidFill>
-                <a:latin typeface="Courier New"/>
-                <a:cs typeface="Courier New"/>
-              </a:rPr>
-              <a:t>maketrans</a:t>
-            </a:r>
-            <a:r>
-              <a:rPr lang="en-CA" sz="2400" spc="-15" dirty="0">
-                <a:solidFill>
-                  <a:srgbClr val="00FF00"/>
-                </a:solidFill>
-                <a:latin typeface="Courier New"/>
-                <a:cs typeface="Courier New"/>
-              </a:rPr>
-              <a:t>', 'partition', 'replace', '</a:t>
-            </a:r>
-            <a:r>
-              <a:rPr lang="en-CA" sz="2400" spc="-15" dirty="0" err="1">
-                <a:solidFill>
-                  <a:srgbClr val="00FF00"/>
-                </a:solidFill>
-                <a:latin typeface="Courier New"/>
-                <a:cs typeface="Courier New"/>
-              </a:rPr>
-              <a:t>rfind</a:t>
-            </a:r>
-            <a:r>
-              <a:rPr lang="en-CA" sz="2400" spc="-15" dirty="0">
-                <a:solidFill>
-                  <a:srgbClr val="00FF00"/>
-                </a:solidFill>
-                <a:latin typeface="Courier New"/>
-                <a:cs typeface="Courier New"/>
-              </a:rPr>
-              <a:t>', '</a:t>
-            </a:r>
-            <a:r>
-              <a:rPr lang="en-CA" sz="2400" spc="-15" dirty="0" err="1">
-                <a:solidFill>
-                  <a:srgbClr val="00FF00"/>
-                </a:solidFill>
-                <a:latin typeface="Courier New"/>
-                <a:cs typeface="Courier New"/>
-              </a:rPr>
-              <a:t>rindex</a:t>
-            </a:r>
-            <a:r>
-              <a:rPr lang="en-CA" sz="2400" spc="-15" dirty="0">
-                <a:solidFill>
-                  <a:srgbClr val="00FF00"/>
-                </a:solidFill>
-                <a:latin typeface="Courier New"/>
-                <a:cs typeface="Courier New"/>
-              </a:rPr>
-              <a:t>', '</a:t>
-            </a:r>
-            <a:r>
-              <a:rPr lang="en-CA" sz="2400" spc="-15" dirty="0" err="1">
-                <a:solidFill>
-                  <a:srgbClr val="00FF00"/>
-                </a:solidFill>
-                <a:latin typeface="Courier New"/>
-                <a:cs typeface="Courier New"/>
-              </a:rPr>
-              <a:t>rjust</a:t>
-            </a:r>
-            <a:r>
-              <a:rPr lang="en-CA" sz="2400" spc="-15" dirty="0">
-                <a:solidFill>
-                  <a:srgbClr val="00FF00"/>
-                </a:solidFill>
-                <a:latin typeface="Courier New"/>
-                <a:cs typeface="Courier New"/>
-              </a:rPr>
-              <a:t>', '</a:t>
-            </a:r>
-            <a:r>
-              <a:rPr lang="en-CA" sz="2400" spc="-15" dirty="0" err="1">
-                <a:solidFill>
-                  <a:srgbClr val="00FF00"/>
-                </a:solidFill>
-                <a:latin typeface="Courier New"/>
-                <a:cs typeface="Courier New"/>
-              </a:rPr>
-              <a:t>rpartition</a:t>
-            </a:r>
-            <a:r>
-              <a:rPr lang="en-CA" sz="2400" spc="-15" dirty="0">
-                <a:solidFill>
-                  <a:srgbClr val="00FF00"/>
-                </a:solidFill>
-                <a:latin typeface="Courier New"/>
-                <a:cs typeface="Courier New"/>
-              </a:rPr>
-              <a:t>', '</a:t>
-            </a:r>
-            <a:r>
-              <a:rPr lang="en-CA" sz="2400" spc="-15" dirty="0" err="1">
-                <a:solidFill>
-                  <a:srgbClr val="00FF00"/>
-                </a:solidFill>
-                <a:latin typeface="Courier New"/>
-                <a:cs typeface="Courier New"/>
-              </a:rPr>
-              <a:t>rsplit</a:t>
-            </a:r>
-            <a:r>
-              <a:rPr lang="en-CA" sz="2400" spc="-15" dirty="0">
-                <a:solidFill>
-                  <a:srgbClr val="00FF00"/>
-                </a:solidFill>
-                <a:latin typeface="Courier New"/>
-                <a:cs typeface="Courier New"/>
-              </a:rPr>
-              <a:t>', '</a:t>
-            </a:r>
-            <a:r>
-              <a:rPr lang="en-CA" sz="2400" spc="-15" dirty="0" err="1">
-                <a:solidFill>
-                  <a:srgbClr val="00FF00"/>
-                </a:solidFill>
-                <a:latin typeface="Courier New"/>
-                <a:cs typeface="Courier New"/>
-              </a:rPr>
-              <a:t>rstrip</a:t>
-            </a:r>
-            <a:r>
-              <a:rPr lang="en-CA" sz="2400" spc="-15" dirty="0">
-                <a:solidFill>
-                  <a:srgbClr val="00FF00"/>
-                </a:solidFill>
-                <a:latin typeface="Courier New"/>
-                <a:cs typeface="Courier New"/>
-              </a:rPr>
-              <a:t>', 'split', '</a:t>
-            </a:r>
-            <a:r>
-              <a:rPr lang="en-CA" sz="2400" spc="-15" dirty="0" err="1">
-                <a:solidFill>
-                  <a:srgbClr val="00FF00"/>
-                </a:solidFill>
-                <a:latin typeface="Courier New"/>
-                <a:cs typeface="Courier New"/>
-              </a:rPr>
-              <a:t>splitlines</a:t>
-            </a:r>
-            <a:r>
-              <a:rPr lang="en-CA" sz="2400" spc="-15" dirty="0">
-                <a:solidFill>
-                  <a:srgbClr val="00FF00"/>
-                </a:solidFill>
-                <a:latin typeface="Courier New"/>
-                <a:cs typeface="Courier New"/>
-              </a:rPr>
-              <a:t>', '</a:t>
-            </a:r>
-            <a:r>
-              <a:rPr lang="en-CA" sz="2400" spc="-15" dirty="0" err="1">
-                <a:solidFill>
-                  <a:srgbClr val="00FF00"/>
-                </a:solidFill>
-                <a:latin typeface="Courier New"/>
-                <a:cs typeface="Courier New"/>
-              </a:rPr>
-              <a:t>startswith</a:t>
-            </a:r>
-            <a:r>
-              <a:rPr lang="en-CA" sz="2400" spc="-15" dirty="0">
-                <a:solidFill>
-                  <a:srgbClr val="00FF00"/>
-                </a:solidFill>
-                <a:latin typeface="Courier New"/>
-                <a:cs typeface="Courier New"/>
-              </a:rPr>
-              <a:t>', 'strip', '</a:t>
-            </a:r>
-            <a:r>
-              <a:rPr lang="en-CA" sz="2400" spc="-15" dirty="0" err="1">
-                <a:solidFill>
-                  <a:srgbClr val="00FF00"/>
-                </a:solidFill>
-                <a:latin typeface="Courier New"/>
-                <a:cs typeface="Courier New"/>
-              </a:rPr>
-              <a:t>swapcase</a:t>
-            </a:r>
-            <a:r>
-              <a:rPr lang="en-CA" sz="2400" spc="-15" dirty="0">
-                <a:solidFill>
-                  <a:srgbClr val="00FF00"/>
-                </a:solidFill>
-                <a:latin typeface="Courier New"/>
-                <a:cs typeface="Courier New"/>
-              </a:rPr>
-              <a:t>', 'title', 'translate', 'upper', '</a:t>
-            </a:r>
-            <a:r>
-              <a:rPr lang="en-CA" sz="2400" spc="-15" dirty="0" err="1">
-                <a:solidFill>
-                  <a:srgbClr val="00FF00"/>
-                </a:solidFill>
-                <a:latin typeface="Courier New"/>
-                <a:cs typeface="Courier New"/>
-              </a:rPr>
-              <a:t>zfill</a:t>
-            </a:r>
-            <a:r>
-              <a:rPr lang="en-CA" sz="2400" spc="-15" dirty="0">
-                <a:solidFill>
-                  <a:srgbClr val="00FF00"/>
-                </a:solidFill>
-                <a:latin typeface="Courier New"/>
-                <a:cs typeface="Courier New"/>
-              </a:rPr>
-              <a:t>']</a:t>
+              <a:t>“I’m late! I’m late! For a very important date!”</a:t>
             </a:r>
           </a:p>
         </p:txBody>
       </p:sp>
+      <p:pic>
+        <p:nvPicPr>
+          <p:cNvPr id="2050" name="Picture 2" descr="White Rabbit &amp;quot;I&amp;#39;m late!&amp;quot; Blank Template - Imgflip">
+            <a:extLst>
+              <a:ext uri="{FF2B5EF4-FFF2-40B4-BE49-F238E27FC236}">
+                <a16:creationId xmlns:a16="http://schemas.microsoft.com/office/drawing/2014/main" id="{A96D8802-0227-E446-AEFA-595823BFB49D}"/>
+              </a:ext>
+            </a:extLst>
+          </p:cNvPr>
+          <p:cNvPicPr>
+            <a:picLocks noChangeAspect="1" noChangeArrowheads="1"/>
+          </p:cNvPicPr>
+          <p:nvPr/>
+        </p:nvPicPr>
+        <p:blipFill>
+          <a:blip r:embed="rId2">
+            <a:extLst>
+              <a:ext uri="{28A0092B-C50C-407E-A947-70E740481C1C}">
+                <a14:useLocalDpi xmlns:a14="http://schemas.microsoft.com/office/drawing/2010/main" val="0"/>
+              </a:ext>
+            </a:extLst>
+          </a:blip>
+          <a:srcRect/>
+          <a:stretch>
+            <a:fillRect/>
+          </a:stretch>
+        </p:blipFill>
+        <p:spPr bwMode="auto">
+          <a:xfrm>
+            <a:off x="8322447" y="3749580"/>
+            <a:ext cx="3031353" cy="2661292"/>
+          </a:xfrm>
+          <a:prstGeom prst="rect">
+            <a:avLst/>
+          </a:prstGeom>
+          <a:noFill/>
+          <a:extLst>
+            <a:ext uri="{909E8E84-426E-40DD-AFC4-6F175D3DCCD1}">
+              <a14:hiddenFill xmlns:a14="http://schemas.microsoft.com/office/drawing/2010/main">
+                <a:solidFill>
+                  <a:srgbClr val="FFFFFF"/>
+                </a:solidFill>
+              </a14:hiddenFill>
+            </a:ext>
+          </a:extLst>
+        </p:spPr>
+      </p:pic>
     </p:spTree>
     <p:extLst>
       <p:ext uri="{BB962C8B-B14F-4D97-AF65-F5344CB8AC3E}">
-        <p14:creationId xmlns:p14="http://schemas.microsoft.com/office/powerpoint/2010/main" val="3930113540"/>
+        <p14:creationId xmlns:p14="http://schemas.microsoft.com/office/powerpoint/2010/main" val="2603938331"/>
       </p:ext>
     </p:extLst>
   </p:cSld>
@@ -13104,7 +13444,7 @@
                   <a:schemeClr val="accent6"/>
                 </a:solidFill>
               </a:rPr>
-              <a:t>upper</a:t>
+              <a:t>lower</a:t>
             </a:r>
           </a:p>
         </p:txBody>
@@ -13136,11 +13476,11 @@
                   <a:schemeClr val="accent6"/>
                 </a:solidFill>
               </a:rPr>
-              <a:t>upper</a:t>
+              <a:t>lower</a:t>
             </a:r>
             <a:r>
               <a:rPr lang="en-US" dirty="0"/>
-              <a:t> is a string method that generates a new string that has all upper case characters</a:t>
+              <a:t> is a string method that generates a new string that has all lower case characters</a:t>
             </a:r>
             <a:endParaRPr lang="en-US" dirty="0">
               <a:solidFill>
@@ -13154,391 +13494,6 @@
                 <a:srgbClr val="00B0F0"/>
               </a:solidFill>
             </a:endParaRPr>
-          </a:p>
-        </p:txBody>
-      </p:sp>
-      <p:sp>
-        <p:nvSpPr>
-          <p:cNvPr id="5" name="Content Placeholder 2">
-            <a:extLst>
-              <a:ext uri="{FF2B5EF4-FFF2-40B4-BE49-F238E27FC236}">
-                <a16:creationId xmlns:a16="http://schemas.microsoft.com/office/drawing/2014/main" id="{FF2FEE43-ED3E-6C4B-94C9-09B68F2057E7}"/>
-              </a:ext>
-            </a:extLst>
-          </p:cNvPr>
-          <p:cNvSpPr txBox="1">
-            <a:spLocks/>
-          </p:cNvSpPr>
-          <p:nvPr/>
-        </p:nvSpPr>
-        <p:spPr>
-          <a:xfrm>
-            <a:off x="112986" y="3092426"/>
-            <a:ext cx="11853042" cy="3318446"/>
-          </a:xfrm>
-          <a:prstGeom prst="rect">
-            <a:avLst/>
-          </a:prstGeom>
-        </p:spPr>
-        <p:txBody>
-          <a:bodyPr vert="horz" lIns="91440" tIns="45720" rIns="91440" bIns="45720" rtlCol="0">
-            <a:normAutofit fontScale="92500"/>
-          </a:bodyPr>
-          <a:lstStyle>
-            <a:lvl1pPr marL="228600" indent="-228600" algn="l" defTabSz="914400" rtl="0" eaLnBrk="1" latinLnBrk="0" hangingPunct="1">
-              <a:lnSpc>
-                <a:spcPct val="90000"/>
-              </a:lnSpc>
-              <a:spcBef>
-                <a:spcPts val="1000"/>
-              </a:spcBef>
-              <a:buClr>
-                <a:srgbClr val="007EE5"/>
-              </a:buClr>
-              <a:buFont typeface="Wingdings" panose="05000000000000000000" pitchFamily="2" charset="2"/>
-              <a:buChar char="§"/>
-              <a:defRPr sz="2800" kern="1200">
-                <a:solidFill>
-                  <a:srgbClr val="FFFFFF"/>
-                </a:solidFill>
-                <a:latin typeface="+mn-lt"/>
-                <a:ea typeface="+mn-ea"/>
-                <a:cs typeface="+mn-cs"/>
-              </a:defRPr>
-            </a:lvl1pPr>
-            <a:lvl2pPr marL="685800" indent="-228600" algn="l" defTabSz="914400" rtl="0" eaLnBrk="1" latinLnBrk="0" hangingPunct="1">
-              <a:lnSpc>
-                <a:spcPct val="90000"/>
-              </a:lnSpc>
-              <a:spcBef>
-                <a:spcPts val="500"/>
-              </a:spcBef>
-              <a:buClr>
-                <a:srgbClr val="007EE5"/>
-              </a:buClr>
-              <a:buFont typeface="Wingdings" panose="05000000000000000000" pitchFamily="2" charset="2"/>
-              <a:buChar char="§"/>
-              <a:defRPr sz="2400" kern="1200">
-                <a:solidFill>
-                  <a:srgbClr val="FFFFFF"/>
-                </a:solidFill>
-                <a:latin typeface="+mn-lt"/>
-                <a:ea typeface="+mn-ea"/>
-                <a:cs typeface="+mn-cs"/>
-              </a:defRPr>
-            </a:lvl2pPr>
-            <a:lvl3pPr marL="1143000" indent="-228600" algn="l" defTabSz="914400" rtl="0" eaLnBrk="1" latinLnBrk="0" hangingPunct="1">
-              <a:lnSpc>
-                <a:spcPct val="90000"/>
-              </a:lnSpc>
-              <a:spcBef>
-                <a:spcPts val="500"/>
-              </a:spcBef>
-              <a:buClr>
-                <a:srgbClr val="007EE5"/>
-              </a:buClr>
-              <a:buFont typeface="Wingdings" panose="05000000000000000000" pitchFamily="2" charset="2"/>
-              <a:buChar char="§"/>
-              <a:defRPr sz="2000" kern="1200">
-                <a:solidFill>
-                  <a:srgbClr val="FFFFFF"/>
-                </a:solidFill>
-                <a:latin typeface="+mn-lt"/>
-                <a:ea typeface="+mn-ea"/>
-                <a:cs typeface="+mn-cs"/>
-              </a:defRPr>
-            </a:lvl3pPr>
-            <a:lvl4pPr marL="1600200" indent="-228600" algn="l" defTabSz="914400" rtl="0" eaLnBrk="1" latinLnBrk="0" hangingPunct="1">
-              <a:lnSpc>
-                <a:spcPct val="90000"/>
-              </a:lnSpc>
-              <a:spcBef>
-                <a:spcPts val="500"/>
-              </a:spcBef>
-              <a:buClr>
-                <a:srgbClr val="007EE5"/>
-              </a:buClr>
-              <a:buFont typeface="Wingdings" panose="05000000000000000000" pitchFamily="2" charset="2"/>
-              <a:buChar char="§"/>
-              <a:defRPr sz="1800" kern="1200">
-                <a:solidFill>
-                  <a:srgbClr val="FFFFFF"/>
-                </a:solidFill>
-                <a:latin typeface="+mn-lt"/>
-                <a:ea typeface="+mn-ea"/>
-                <a:cs typeface="+mn-cs"/>
-              </a:defRPr>
-            </a:lvl4pPr>
-            <a:lvl5pPr marL="2057400" indent="-228600" algn="l" defTabSz="914400" rtl="0" eaLnBrk="1" latinLnBrk="0" hangingPunct="1">
-              <a:lnSpc>
-                <a:spcPct val="90000"/>
-              </a:lnSpc>
-              <a:spcBef>
-                <a:spcPts val="500"/>
-              </a:spcBef>
-              <a:buClr>
-                <a:srgbClr val="007EE5"/>
-              </a:buClr>
-              <a:buFont typeface="Wingdings" panose="05000000000000000000" pitchFamily="2" charset="2"/>
-              <a:buChar char="§"/>
-              <a:defRPr sz="1800" kern="1200">
-                <a:solidFill>
-                  <a:srgbClr val="FFFFFF"/>
-                </a:solidFill>
-                <a:latin typeface="+mn-lt"/>
-                <a:ea typeface="+mn-ea"/>
-                <a:cs typeface="+mn-cs"/>
-              </a:defRPr>
-            </a:lvl5pPr>
-            <a:lvl6pPr marL="2514600" indent="-228600" algn="l" defTabSz="914400" rtl="0" eaLnBrk="1" latinLnBrk="0" hangingPunct="1">
-              <a:lnSpc>
-                <a:spcPct val="90000"/>
-              </a:lnSpc>
-              <a:spcBef>
-                <a:spcPts val="500"/>
-              </a:spcBef>
-              <a:buFont typeface="Arial" panose="020B0604020202020204" pitchFamily="34" charset="0"/>
-              <a:buChar char="•"/>
-              <a:defRPr sz="1800" kern="1200">
-                <a:solidFill>
-                  <a:schemeClr val="tx1"/>
-                </a:solidFill>
-                <a:latin typeface="+mn-lt"/>
-                <a:ea typeface="+mn-ea"/>
-                <a:cs typeface="+mn-cs"/>
-              </a:defRPr>
-            </a:lvl6pPr>
-            <a:lvl7pPr marL="2971800" indent="-228600" algn="l" defTabSz="914400" rtl="0" eaLnBrk="1" latinLnBrk="0" hangingPunct="1">
-              <a:lnSpc>
-                <a:spcPct val="90000"/>
-              </a:lnSpc>
-              <a:spcBef>
-                <a:spcPts val="500"/>
-              </a:spcBef>
-              <a:buFont typeface="Arial" panose="020B0604020202020204" pitchFamily="34" charset="0"/>
-              <a:buChar char="•"/>
-              <a:defRPr sz="1800" kern="1200">
-                <a:solidFill>
-                  <a:schemeClr val="tx1"/>
-                </a:solidFill>
-                <a:latin typeface="+mn-lt"/>
-                <a:ea typeface="+mn-ea"/>
-                <a:cs typeface="+mn-cs"/>
-              </a:defRPr>
-            </a:lvl7pPr>
-            <a:lvl8pPr marL="3429000" indent="-228600" algn="l" defTabSz="914400" rtl="0" eaLnBrk="1" latinLnBrk="0" hangingPunct="1">
-              <a:lnSpc>
-                <a:spcPct val="90000"/>
-              </a:lnSpc>
-              <a:spcBef>
-                <a:spcPts val="500"/>
-              </a:spcBef>
-              <a:buFont typeface="Arial" panose="020B0604020202020204" pitchFamily="34" charset="0"/>
-              <a:buChar char="•"/>
-              <a:defRPr sz="1800" kern="1200">
-                <a:solidFill>
-                  <a:schemeClr val="tx1"/>
-                </a:solidFill>
-                <a:latin typeface="+mn-lt"/>
-                <a:ea typeface="+mn-ea"/>
-                <a:cs typeface="+mn-cs"/>
-              </a:defRPr>
-            </a:lvl8pPr>
-            <a:lvl9pPr marL="3886200" indent="-228600" algn="l" defTabSz="914400" rtl="0" eaLnBrk="1" latinLnBrk="0" hangingPunct="1">
-              <a:lnSpc>
-                <a:spcPct val="90000"/>
-              </a:lnSpc>
-              <a:spcBef>
-                <a:spcPts val="500"/>
-              </a:spcBef>
-              <a:buFont typeface="Arial" panose="020B0604020202020204" pitchFamily="34" charset="0"/>
-              <a:buChar char="•"/>
-              <a:defRPr sz="1800" kern="1200">
-                <a:solidFill>
-                  <a:schemeClr val="tx1"/>
-                </a:solidFill>
-                <a:latin typeface="+mn-lt"/>
-                <a:ea typeface="+mn-ea"/>
-                <a:cs typeface="+mn-cs"/>
-              </a:defRPr>
-            </a:lvl9pPr>
-          </a:lstStyle>
-          <a:p>
-            <a:pPr marL="0" indent="0">
-              <a:lnSpc>
-                <a:spcPct val="100000"/>
-              </a:lnSpc>
-              <a:buNone/>
-            </a:pPr>
-            <a:r>
-              <a:rPr lang="en-CA" sz="2400" spc="-15" dirty="0">
-                <a:solidFill>
-                  <a:srgbClr val="00FF00"/>
-                </a:solidFill>
-                <a:latin typeface="Courier New"/>
-                <a:cs typeface="Courier New"/>
-              </a:rPr>
-              <a:t>&gt;&gt;&gt; </a:t>
-            </a:r>
-            <a:r>
-              <a:rPr lang="en-CA" sz="2400" spc="-15" dirty="0" err="1">
-                <a:solidFill>
-                  <a:srgbClr val="00FF00"/>
-                </a:solidFill>
-                <a:latin typeface="Courier New"/>
-                <a:cs typeface="Courier New"/>
-              </a:rPr>
-              <a:t>white_rabbit</a:t>
-            </a:r>
-            <a:r>
-              <a:rPr lang="en-CA" sz="2400" spc="-15" dirty="0">
-                <a:solidFill>
-                  <a:srgbClr val="00FF00"/>
-                </a:solidFill>
-                <a:latin typeface="Courier New"/>
-                <a:cs typeface="Courier New"/>
-              </a:rPr>
-              <a:t> = ”I’m late! I’m late! For a very important date!”</a:t>
-            </a:r>
-          </a:p>
-          <a:p>
-            <a:pPr marL="0" indent="0">
-              <a:lnSpc>
-                <a:spcPct val="100000"/>
-              </a:lnSpc>
-              <a:buNone/>
-            </a:pPr>
-            <a:endParaRPr lang="en-CA" sz="2400" spc="-15" dirty="0">
-              <a:solidFill>
-                <a:srgbClr val="00FF00"/>
-              </a:solidFill>
-              <a:latin typeface="Courier New"/>
-              <a:cs typeface="Courier New"/>
-            </a:endParaRPr>
-          </a:p>
-          <a:p>
-            <a:pPr marL="0" indent="0">
-              <a:lnSpc>
-                <a:spcPct val="100000"/>
-              </a:lnSpc>
-              <a:buNone/>
-            </a:pPr>
-            <a:r>
-              <a:rPr lang="en-CA" sz="2400" spc="-15" dirty="0">
-                <a:solidFill>
-                  <a:srgbClr val="00FF00"/>
-                </a:solidFill>
-                <a:latin typeface="Courier New"/>
-                <a:cs typeface="Courier New"/>
-              </a:rPr>
-              <a:t>&gt;&gt;&gt; </a:t>
-            </a:r>
-            <a:r>
-              <a:rPr lang="en-CA" sz="2400" spc="-15" dirty="0" err="1">
-                <a:solidFill>
-                  <a:srgbClr val="00FF00"/>
-                </a:solidFill>
-                <a:latin typeface="Courier New"/>
-                <a:cs typeface="Courier New"/>
-              </a:rPr>
-              <a:t>white_rabbit.upper</a:t>
-            </a:r>
-            <a:r>
-              <a:rPr lang="en-CA" sz="2400" spc="-15" dirty="0">
-                <a:solidFill>
-                  <a:srgbClr val="00FF00"/>
-                </a:solidFill>
-                <a:latin typeface="Courier New"/>
-                <a:cs typeface="Courier New"/>
-              </a:rPr>
-              <a:t>()</a:t>
-            </a:r>
-          </a:p>
-          <a:p>
-            <a:pPr marL="0" indent="0">
-              <a:lnSpc>
-                <a:spcPct val="100000"/>
-              </a:lnSpc>
-              <a:buNone/>
-            </a:pPr>
-            <a:r>
-              <a:rPr lang="en-CA" sz="2400" spc="-15" dirty="0">
-                <a:solidFill>
-                  <a:srgbClr val="00FF00"/>
-                </a:solidFill>
-                <a:latin typeface="Courier New"/>
-                <a:cs typeface="Courier New"/>
-              </a:rPr>
-              <a:t>“I’M LATE! I’M LATE! FOR A VERY IMPORTANT DATE!”</a:t>
-            </a:r>
-          </a:p>
-          <a:p>
-            <a:pPr marL="0" indent="0">
-              <a:lnSpc>
-                <a:spcPct val="100000"/>
-              </a:lnSpc>
-              <a:buNone/>
-            </a:pPr>
-            <a:endParaRPr lang="en-CA" sz="2400" spc="-15" dirty="0">
-              <a:solidFill>
-                <a:srgbClr val="00FF00"/>
-              </a:solidFill>
-              <a:latin typeface="Courier New"/>
-              <a:cs typeface="Courier New"/>
-            </a:endParaRPr>
-          </a:p>
-          <a:p>
-            <a:pPr marL="0" indent="0">
-              <a:lnSpc>
-                <a:spcPct val="100000"/>
-              </a:lnSpc>
-              <a:buNone/>
-            </a:pPr>
-            <a:r>
-              <a:rPr lang="en-CA" sz="2400" spc="-15" dirty="0">
-                <a:solidFill>
-                  <a:srgbClr val="00FF00"/>
-                </a:solidFill>
-                <a:latin typeface="Courier New"/>
-                <a:cs typeface="Courier New"/>
-              </a:rPr>
-              <a:t>&gt;&gt;&gt; </a:t>
-            </a:r>
-            <a:r>
-              <a:rPr lang="en-CA" sz="2400" spc="-15" dirty="0" err="1">
-                <a:solidFill>
-                  <a:srgbClr val="00FF00"/>
-                </a:solidFill>
-                <a:latin typeface="Courier New"/>
-                <a:cs typeface="Courier New"/>
-              </a:rPr>
-              <a:t>white_rabbit</a:t>
-            </a:r>
-            <a:endParaRPr lang="en-CA" sz="2400" spc="-15" dirty="0">
-              <a:solidFill>
-                <a:srgbClr val="00FF00"/>
-              </a:solidFill>
-              <a:latin typeface="Courier New"/>
-              <a:cs typeface="Courier New"/>
-            </a:endParaRPr>
-          </a:p>
-          <a:p>
-            <a:pPr marL="0" indent="0">
-              <a:lnSpc>
-                <a:spcPct val="100000"/>
-              </a:lnSpc>
-              <a:buNone/>
-            </a:pPr>
-            <a:r>
-              <a:rPr lang="en-CA" sz="2400" spc="-15" dirty="0">
-                <a:solidFill>
-                  <a:srgbClr val="00FF00"/>
-                </a:solidFill>
-                <a:latin typeface="Courier New"/>
-                <a:cs typeface="Courier New"/>
-              </a:rPr>
-              <a:t>“I’m late! I’m late! For a very important date!”</a:t>
-            </a:r>
           </a:p>
         </p:txBody>
       </p:sp>
@@ -13589,10 +13544,435 @@
           </a:extLst>
         </p:spPr>
       </p:pic>
+      <p:sp>
+        <p:nvSpPr>
+          <p:cNvPr id="6" name="Content Placeholder 2">
+            <a:extLst>
+              <a:ext uri="{FF2B5EF4-FFF2-40B4-BE49-F238E27FC236}">
+                <a16:creationId xmlns:a16="http://schemas.microsoft.com/office/drawing/2014/main" id="{B12391A7-5272-AC4B-99EA-7E92B704046E}"/>
+              </a:ext>
+            </a:extLst>
+          </p:cNvPr>
+          <p:cNvSpPr txBox="1">
+            <a:spLocks/>
+          </p:cNvSpPr>
+          <p:nvPr/>
+        </p:nvSpPr>
+        <p:spPr>
+          <a:xfrm>
+            <a:off x="112986" y="3092426"/>
+            <a:ext cx="11853042" cy="3318446"/>
+          </a:xfrm>
+          <a:prstGeom prst="rect">
+            <a:avLst/>
+          </a:prstGeom>
+        </p:spPr>
+        <p:txBody>
+          <a:bodyPr vert="horz" lIns="91440" tIns="45720" rIns="91440" bIns="45720" rtlCol="0">
+            <a:normAutofit fontScale="92500"/>
+          </a:bodyPr>
+          <a:lstStyle>
+            <a:lvl1pPr marL="228600" indent="-228600" algn="l" defTabSz="914400" rtl="0" eaLnBrk="1" latinLnBrk="0" hangingPunct="1">
+              <a:lnSpc>
+                <a:spcPct val="90000"/>
+              </a:lnSpc>
+              <a:spcBef>
+                <a:spcPts val="1000"/>
+              </a:spcBef>
+              <a:buClr>
+                <a:srgbClr val="007EE5"/>
+              </a:buClr>
+              <a:buFont typeface="Wingdings" panose="05000000000000000000" pitchFamily="2" charset="2"/>
+              <a:buChar char="§"/>
+              <a:defRPr sz="2800" kern="1200">
+                <a:solidFill>
+                  <a:srgbClr val="FFFFFF"/>
+                </a:solidFill>
+                <a:latin typeface="+mn-lt"/>
+                <a:ea typeface="+mn-ea"/>
+                <a:cs typeface="+mn-cs"/>
+              </a:defRPr>
+            </a:lvl1pPr>
+            <a:lvl2pPr marL="685800" indent="-228600" algn="l" defTabSz="914400" rtl="0" eaLnBrk="1" latinLnBrk="0" hangingPunct="1">
+              <a:lnSpc>
+                <a:spcPct val="90000"/>
+              </a:lnSpc>
+              <a:spcBef>
+                <a:spcPts val="500"/>
+              </a:spcBef>
+              <a:buClr>
+                <a:srgbClr val="007EE5"/>
+              </a:buClr>
+              <a:buFont typeface="Wingdings" panose="05000000000000000000" pitchFamily="2" charset="2"/>
+              <a:buChar char="§"/>
+              <a:defRPr sz="2400" kern="1200">
+                <a:solidFill>
+                  <a:srgbClr val="FFFFFF"/>
+                </a:solidFill>
+                <a:latin typeface="+mn-lt"/>
+                <a:ea typeface="+mn-ea"/>
+                <a:cs typeface="+mn-cs"/>
+              </a:defRPr>
+            </a:lvl2pPr>
+            <a:lvl3pPr marL="1143000" indent="-228600" algn="l" defTabSz="914400" rtl="0" eaLnBrk="1" latinLnBrk="0" hangingPunct="1">
+              <a:lnSpc>
+                <a:spcPct val="90000"/>
+              </a:lnSpc>
+              <a:spcBef>
+                <a:spcPts val="500"/>
+              </a:spcBef>
+              <a:buClr>
+                <a:srgbClr val="007EE5"/>
+              </a:buClr>
+              <a:buFont typeface="Wingdings" panose="05000000000000000000" pitchFamily="2" charset="2"/>
+              <a:buChar char="§"/>
+              <a:defRPr sz="2000" kern="1200">
+                <a:solidFill>
+                  <a:srgbClr val="FFFFFF"/>
+                </a:solidFill>
+                <a:latin typeface="+mn-lt"/>
+                <a:ea typeface="+mn-ea"/>
+                <a:cs typeface="+mn-cs"/>
+              </a:defRPr>
+            </a:lvl3pPr>
+            <a:lvl4pPr marL="1600200" indent="-228600" algn="l" defTabSz="914400" rtl="0" eaLnBrk="1" latinLnBrk="0" hangingPunct="1">
+              <a:lnSpc>
+                <a:spcPct val="90000"/>
+              </a:lnSpc>
+              <a:spcBef>
+                <a:spcPts val="500"/>
+              </a:spcBef>
+              <a:buClr>
+                <a:srgbClr val="007EE5"/>
+              </a:buClr>
+              <a:buFont typeface="Wingdings" panose="05000000000000000000" pitchFamily="2" charset="2"/>
+              <a:buChar char="§"/>
+              <a:defRPr sz="1800" kern="1200">
+                <a:solidFill>
+                  <a:srgbClr val="FFFFFF"/>
+                </a:solidFill>
+                <a:latin typeface="+mn-lt"/>
+                <a:ea typeface="+mn-ea"/>
+                <a:cs typeface="+mn-cs"/>
+              </a:defRPr>
+            </a:lvl4pPr>
+            <a:lvl5pPr marL="2057400" indent="-228600" algn="l" defTabSz="914400" rtl="0" eaLnBrk="1" latinLnBrk="0" hangingPunct="1">
+              <a:lnSpc>
+                <a:spcPct val="90000"/>
+              </a:lnSpc>
+              <a:spcBef>
+                <a:spcPts val="500"/>
+              </a:spcBef>
+              <a:buClr>
+                <a:srgbClr val="007EE5"/>
+              </a:buClr>
+              <a:buFont typeface="Wingdings" panose="05000000000000000000" pitchFamily="2" charset="2"/>
+              <a:buChar char="§"/>
+              <a:defRPr sz="1800" kern="1200">
+                <a:solidFill>
+                  <a:srgbClr val="FFFFFF"/>
+                </a:solidFill>
+                <a:latin typeface="+mn-lt"/>
+                <a:ea typeface="+mn-ea"/>
+                <a:cs typeface="+mn-cs"/>
+              </a:defRPr>
+            </a:lvl5pPr>
+            <a:lvl6pPr marL="2514600" indent="-228600" algn="l" defTabSz="914400" rtl="0" eaLnBrk="1" latinLnBrk="0" hangingPunct="1">
+              <a:lnSpc>
+                <a:spcPct val="90000"/>
+              </a:lnSpc>
+              <a:spcBef>
+                <a:spcPts val="500"/>
+              </a:spcBef>
+              <a:buFont typeface="Arial" panose="020B0604020202020204" pitchFamily="34" charset="0"/>
+              <a:buChar char="•"/>
+              <a:defRPr sz="1800" kern="1200">
+                <a:solidFill>
+                  <a:schemeClr val="tx1"/>
+                </a:solidFill>
+                <a:latin typeface="+mn-lt"/>
+                <a:ea typeface="+mn-ea"/>
+                <a:cs typeface="+mn-cs"/>
+              </a:defRPr>
+            </a:lvl6pPr>
+            <a:lvl7pPr marL="2971800" indent="-228600" algn="l" defTabSz="914400" rtl="0" eaLnBrk="1" latinLnBrk="0" hangingPunct="1">
+              <a:lnSpc>
+                <a:spcPct val="90000"/>
+              </a:lnSpc>
+              <a:spcBef>
+                <a:spcPts val="500"/>
+              </a:spcBef>
+              <a:buFont typeface="Arial" panose="020B0604020202020204" pitchFamily="34" charset="0"/>
+              <a:buChar char="•"/>
+              <a:defRPr sz="1800" kern="1200">
+                <a:solidFill>
+                  <a:schemeClr val="tx1"/>
+                </a:solidFill>
+                <a:latin typeface="+mn-lt"/>
+                <a:ea typeface="+mn-ea"/>
+                <a:cs typeface="+mn-cs"/>
+              </a:defRPr>
+            </a:lvl7pPr>
+            <a:lvl8pPr marL="3429000" indent="-228600" algn="l" defTabSz="914400" rtl="0" eaLnBrk="1" latinLnBrk="0" hangingPunct="1">
+              <a:lnSpc>
+                <a:spcPct val="90000"/>
+              </a:lnSpc>
+              <a:spcBef>
+                <a:spcPts val="500"/>
+              </a:spcBef>
+              <a:buFont typeface="Arial" panose="020B0604020202020204" pitchFamily="34" charset="0"/>
+              <a:buChar char="•"/>
+              <a:defRPr sz="1800" kern="1200">
+                <a:solidFill>
+                  <a:schemeClr val="tx1"/>
+                </a:solidFill>
+                <a:latin typeface="+mn-lt"/>
+                <a:ea typeface="+mn-ea"/>
+                <a:cs typeface="+mn-cs"/>
+              </a:defRPr>
+            </a:lvl8pPr>
+            <a:lvl9pPr marL="3886200" indent="-228600" algn="l" defTabSz="914400" rtl="0" eaLnBrk="1" latinLnBrk="0" hangingPunct="1">
+              <a:lnSpc>
+                <a:spcPct val="90000"/>
+              </a:lnSpc>
+              <a:spcBef>
+                <a:spcPts val="500"/>
+              </a:spcBef>
+              <a:buFont typeface="Arial" panose="020B0604020202020204" pitchFamily="34" charset="0"/>
+              <a:buChar char="•"/>
+              <a:defRPr sz="1800" kern="1200">
+                <a:solidFill>
+                  <a:schemeClr val="tx1"/>
+                </a:solidFill>
+                <a:latin typeface="+mn-lt"/>
+                <a:ea typeface="+mn-ea"/>
+                <a:cs typeface="+mn-cs"/>
+              </a:defRPr>
+            </a:lvl9pPr>
+          </a:lstStyle>
+          <a:p>
+            <a:pPr marL="0" indent="0">
+              <a:lnSpc>
+                <a:spcPct val="100000"/>
+              </a:lnSpc>
+              <a:buNone/>
+            </a:pPr>
+            <a:r>
+              <a:rPr lang="en-CA" sz="2400" spc="-15" dirty="0">
+                <a:solidFill>
+                  <a:srgbClr val="00FF00"/>
+                </a:solidFill>
+                <a:latin typeface="Courier New"/>
+                <a:cs typeface="Courier New"/>
+              </a:rPr>
+              <a:t>&gt;&gt;&gt; </a:t>
+            </a:r>
+            <a:r>
+              <a:rPr lang="en-CA" sz="2400" spc="-15" dirty="0" err="1">
+                <a:solidFill>
+                  <a:srgbClr val="00FF00"/>
+                </a:solidFill>
+                <a:latin typeface="Courier New"/>
+                <a:cs typeface="Courier New"/>
+              </a:rPr>
+              <a:t>white_rabbit</a:t>
+            </a:r>
+            <a:r>
+              <a:rPr lang="en-CA" sz="2400" spc="-15" dirty="0">
+                <a:solidFill>
+                  <a:srgbClr val="00FF00"/>
+                </a:solidFill>
+                <a:latin typeface="Courier New"/>
+                <a:cs typeface="Courier New"/>
+              </a:rPr>
+              <a:t> = ”I’m late! I’m late! For a very important date!”</a:t>
+            </a:r>
+          </a:p>
+          <a:p>
+            <a:pPr marL="0" indent="0">
+              <a:lnSpc>
+                <a:spcPct val="100000"/>
+              </a:lnSpc>
+              <a:buNone/>
+            </a:pPr>
+            <a:endParaRPr lang="en-CA" sz="2400" spc="-15" dirty="0">
+              <a:solidFill>
+                <a:srgbClr val="00FF00"/>
+              </a:solidFill>
+              <a:latin typeface="Courier New"/>
+              <a:cs typeface="Courier New"/>
+            </a:endParaRPr>
+          </a:p>
+          <a:p>
+            <a:pPr marL="0" indent="0">
+              <a:lnSpc>
+                <a:spcPct val="100000"/>
+              </a:lnSpc>
+              <a:buNone/>
+            </a:pPr>
+            <a:r>
+              <a:rPr lang="en-CA" sz="2400" spc="-15" dirty="0">
+                <a:solidFill>
+                  <a:srgbClr val="00FF00"/>
+                </a:solidFill>
+                <a:latin typeface="Courier New"/>
+                <a:cs typeface="Courier New"/>
+              </a:rPr>
+              <a:t>&gt;&gt;&gt; </a:t>
+            </a:r>
+            <a:r>
+              <a:rPr lang="en-CA" sz="2400" spc="-15" dirty="0" err="1">
+                <a:solidFill>
+                  <a:srgbClr val="00FF00"/>
+                </a:solidFill>
+                <a:latin typeface="Courier New"/>
+                <a:cs typeface="Courier New"/>
+              </a:rPr>
+              <a:t>white_rabbit.lower</a:t>
+            </a:r>
+            <a:r>
+              <a:rPr lang="en-CA" sz="2400" spc="-15" dirty="0">
+                <a:solidFill>
+                  <a:srgbClr val="00FF00"/>
+                </a:solidFill>
+                <a:latin typeface="Courier New"/>
+                <a:cs typeface="Courier New"/>
+              </a:rPr>
+              <a:t>()</a:t>
+            </a:r>
+          </a:p>
+          <a:p>
+            <a:pPr marL="0" indent="0">
+              <a:lnSpc>
+                <a:spcPct val="100000"/>
+              </a:lnSpc>
+              <a:buNone/>
+            </a:pPr>
+            <a:r>
+              <a:rPr lang="en-CA" sz="2400" spc="-15" dirty="0">
+                <a:solidFill>
+                  <a:srgbClr val="00FF00"/>
+                </a:solidFill>
+                <a:latin typeface="Courier New"/>
+                <a:cs typeface="Courier New"/>
+              </a:rPr>
+              <a:t>”</a:t>
+            </a:r>
+            <a:r>
+              <a:rPr lang="en-CA" sz="2400" spc="-15" dirty="0" err="1">
+                <a:solidFill>
+                  <a:srgbClr val="00FF00"/>
+                </a:solidFill>
+                <a:latin typeface="Courier New"/>
+                <a:cs typeface="Courier New"/>
+              </a:rPr>
+              <a:t>i’m</a:t>
+            </a:r>
+            <a:r>
+              <a:rPr lang="en-CA" sz="2400" spc="-15" dirty="0">
+                <a:solidFill>
+                  <a:srgbClr val="00FF00"/>
+                </a:solidFill>
+                <a:latin typeface="Courier New"/>
+                <a:cs typeface="Courier New"/>
+              </a:rPr>
+              <a:t> late! </a:t>
+            </a:r>
+            <a:r>
+              <a:rPr lang="en-CA" sz="2400" spc="-15" dirty="0" err="1">
+                <a:solidFill>
+                  <a:srgbClr val="00FF00"/>
+                </a:solidFill>
+                <a:latin typeface="Courier New"/>
+                <a:cs typeface="Courier New"/>
+              </a:rPr>
+              <a:t>i’m</a:t>
+            </a:r>
+            <a:r>
+              <a:rPr lang="en-CA" sz="2400" spc="-15" dirty="0">
+                <a:solidFill>
+                  <a:srgbClr val="00FF00"/>
+                </a:solidFill>
+                <a:latin typeface="Courier New"/>
+                <a:cs typeface="Courier New"/>
+              </a:rPr>
+              <a:t> late! for a very important date!”</a:t>
+            </a:r>
+          </a:p>
+          <a:p>
+            <a:pPr marL="0" indent="0">
+              <a:lnSpc>
+                <a:spcPct val="100000"/>
+              </a:lnSpc>
+              <a:buNone/>
+            </a:pPr>
+            <a:endParaRPr lang="en-CA" sz="2400" spc="-15" dirty="0">
+              <a:solidFill>
+                <a:srgbClr val="00FF00"/>
+              </a:solidFill>
+              <a:latin typeface="Courier New"/>
+              <a:cs typeface="Courier New"/>
+            </a:endParaRPr>
+          </a:p>
+          <a:p>
+            <a:pPr marL="0" indent="0">
+              <a:lnSpc>
+                <a:spcPct val="100000"/>
+              </a:lnSpc>
+              <a:buNone/>
+            </a:pPr>
+            <a:r>
+              <a:rPr lang="en-CA" sz="2400" spc="-15" dirty="0">
+                <a:solidFill>
+                  <a:srgbClr val="00FF00"/>
+                </a:solidFill>
+                <a:latin typeface="Courier New"/>
+                <a:cs typeface="Courier New"/>
+              </a:rPr>
+              <a:t>&gt;&gt;&gt; </a:t>
+            </a:r>
+            <a:r>
+              <a:rPr lang="en-CA" sz="2400" spc="-15" dirty="0" err="1">
+                <a:solidFill>
+                  <a:srgbClr val="00FF00"/>
+                </a:solidFill>
+                <a:latin typeface="Courier New"/>
+                <a:cs typeface="Courier New"/>
+              </a:rPr>
+              <a:t>white_rabbit</a:t>
+            </a:r>
+            <a:endParaRPr lang="en-CA" sz="2400" spc="-15" dirty="0">
+              <a:solidFill>
+                <a:srgbClr val="00FF00"/>
+              </a:solidFill>
+              <a:latin typeface="Courier New"/>
+              <a:cs typeface="Courier New"/>
+            </a:endParaRPr>
+          </a:p>
+          <a:p>
+            <a:pPr marL="0" indent="0">
+              <a:lnSpc>
+                <a:spcPct val="100000"/>
+              </a:lnSpc>
+              <a:buNone/>
+            </a:pPr>
+            <a:r>
+              <a:rPr lang="en-CA" sz="2400" spc="-15" dirty="0">
+                <a:solidFill>
+                  <a:srgbClr val="00FF00"/>
+                </a:solidFill>
+                <a:latin typeface="Courier New"/>
+                <a:cs typeface="Courier New"/>
+              </a:rPr>
+              <a:t>“I’m late! I’m late! For a very important date!”</a:t>
+            </a:r>
+          </a:p>
+        </p:txBody>
+      </p:sp>
     </p:spTree>
     <p:extLst>
       <p:ext uri="{BB962C8B-B14F-4D97-AF65-F5344CB8AC3E}">
-        <p14:creationId xmlns:p14="http://schemas.microsoft.com/office/powerpoint/2010/main" val="2603938331"/>
+        <p14:creationId xmlns:p14="http://schemas.microsoft.com/office/powerpoint/2010/main" val="1227739032"/>
       </p:ext>
     </p:extLst>
   </p:cSld>
@@ -13652,7 +14032,35 @@
                   <a:schemeClr val="accent6"/>
                 </a:solidFill>
               </a:rPr>
-              <a:t>lower</a:t>
+              <a:t>find </a:t>
+            </a:r>
+            <a:r>
+              <a:rPr lang="en-US" dirty="0">
+                <a:solidFill>
+                  <a:schemeClr val="accent2"/>
+                </a:solidFill>
+              </a:rPr>
+              <a:t>(</a:t>
+            </a:r>
+            <a:r>
+              <a:rPr lang="en-US" dirty="0"/>
+              <a:t>and </a:t>
+            </a:r>
+            <a:r>
+              <a:rPr lang="en-US" dirty="0" err="1">
+                <a:solidFill>
+                  <a:schemeClr val="accent6"/>
+                </a:solidFill>
+              </a:rPr>
+              <a:t>rfind</a:t>
+            </a:r>
+            <a:r>
+              <a:rPr lang="en-US" dirty="0">
+                <a:solidFill>
+                  <a:schemeClr val="accent2"/>
+                </a:solidFill>
+              </a:rPr>
+              <a:t>)</a:t>
             </a:r>
           </a:p>
         </p:txBody>
@@ -13673,35 +14081,454 @@
             <p:ph idx="1"/>
           </p:nvPr>
         </p:nvSpPr>
-        <p:spPr/>
+        <p:spPr>
+          <a:xfrm>
+            <a:off x="838200" y="1575393"/>
+            <a:ext cx="11127828" cy="4835479"/>
+          </a:xfrm>
+        </p:spPr>
         <p:txBody>
           <a:bodyPr/>
           <a:lstStyle/>
           <a:p>
             <a:r>
+              <a:rPr lang="en-US" dirty="0"/>
+              <a:t>The method </a:t>
+            </a:r>
+            <a:r>
               <a:rPr lang="en-US" dirty="0">
                 <a:solidFill>
                   <a:schemeClr val="accent6"/>
                 </a:solidFill>
               </a:rPr>
-              <a:t>lower</a:t>
+              <a:t>find</a:t>
             </a:r>
             <a:r>
               <a:rPr lang="en-US" dirty="0"/>
-              <a:t> is a string method that generates a new string that has all lower case characters</a:t>
-            </a:r>
+              <a:t> returns first index where a substring is found</a:t>
+            </a:r>
+          </a:p>
+          <a:p>
+            <a:r>
+              <a:rPr lang="en-US" dirty="0"/>
+              <a:t>The method </a:t>
+            </a:r>
+            <a:r>
+              <a:rPr lang="en-US" dirty="0" err="1">
+                <a:solidFill>
+                  <a:schemeClr val="accent6"/>
+                </a:solidFill>
+              </a:rPr>
+              <a:t>rfind</a:t>
+            </a:r>
+            <a:r>
+              <a:rPr lang="en-US" dirty="0"/>
+              <a:t> returns the last index where a substring is found</a:t>
+            </a:r>
+          </a:p>
+          <a:p>
+            <a:r>
+              <a:rPr lang="en-US" dirty="0"/>
+              <a:t>Returns -1 if no such substring exists</a:t>
+            </a:r>
+          </a:p>
+          <a:p>
+            <a:endParaRPr lang="en-US" dirty="0"/>
+          </a:p>
+          <a:p>
             <a:endParaRPr lang="en-US" dirty="0">
               <a:solidFill>
                 <a:srgbClr val="00B0F0"/>
               </a:solidFill>
             </a:endParaRPr>
           </a:p>
-          <a:p>
-            <a:endParaRPr lang="en-US" dirty="0">
+        </p:txBody>
+      </p:sp>
+      <p:sp>
+        <p:nvSpPr>
+          <p:cNvPr id="5" name="Content Placeholder 2">
+            <a:extLst>
+              <a:ext uri="{FF2B5EF4-FFF2-40B4-BE49-F238E27FC236}">
+                <a16:creationId xmlns:a16="http://schemas.microsoft.com/office/drawing/2014/main" id="{FF2FEE43-ED3E-6C4B-94C9-09B68F2057E7}"/>
+              </a:ext>
+            </a:extLst>
+          </p:cNvPr>
+          <p:cNvSpPr txBox="1">
+            <a:spLocks/>
+          </p:cNvSpPr>
+          <p:nvPr/>
+        </p:nvSpPr>
+        <p:spPr>
+          <a:xfrm>
+            <a:off x="112986" y="3092426"/>
+            <a:ext cx="11853042" cy="3318446"/>
+          </a:xfrm>
+          <a:prstGeom prst="rect">
+            <a:avLst/>
+          </a:prstGeom>
+        </p:spPr>
+        <p:txBody>
+          <a:bodyPr vert="horz" lIns="91440" tIns="45720" rIns="91440" bIns="45720" rtlCol="0">
+            <a:normAutofit fontScale="92500"/>
+          </a:bodyPr>
+          <a:lstStyle>
+            <a:lvl1pPr marL="228600" indent="-228600" algn="l" defTabSz="914400" rtl="0" eaLnBrk="1" latinLnBrk="0" hangingPunct="1">
+              <a:lnSpc>
+                <a:spcPct val="90000"/>
+              </a:lnSpc>
+              <a:spcBef>
+                <a:spcPts val="1000"/>
+              </a:spcBef>
+              <a:buClr>
+                <a:srgbClr val="007EE5"/>
+              </a:buClr>
+              <a:buFont typeface="Wingdings" panose="05000000000000000000" pitchFamily="2" charset="2"/>
+              <a:buChar char="§"/>
+              <a:defRPr sz="2800" kern="1200">
+                <a:solidFill>
+                  <a:srgbClr val="FFFFFF"/>
+                </a:solidFill>
+                <a:latin typeface="+mn-lt"/>
+                <a:ea typeface="+mn-ea"/>
+                <a:cs typeface="+mn-cs"/>
+              </a:defRPr>
+            </a:lvl1pPr>
+            <a:lvl2pPr marL="685800" indent="-228600" algn="l" defTabSz="914400" rtl="0" eaLnBrk="1" latinLnBrk="0" hangingPunct="1">
+              <a:lnSpc>
+                <a:spcPct val="90000"/>
+              </a:lnSpc>
+              <a:spcBef>
+                <a:spcPts val="500"/>
+              </a:spcBef>
+              <a:buClr>
+                <a:srgbClr val="007EE5"/>
+              </a:buClr>
+              <a:buFont typeface="Wingdings" panose="05000000000000000000" pitchFamily="2" charset="2"/>
+              <a:buChar char="§"/>
+              <a:defRPr sz="2400" kern="1200">
+                <a:solidFill>
+                  <a:srgbClr val="FFFFFF"/>
+                </a:solidFill>
+                <a:latin typeface="+mn-lt"/>
+                <a:ea typeface="+mn-ea"/>
+                <a:cs typeface="+mn-cs"/>
+              </a:defRPr>
+            </a:lvl2pPr>
+            <a:lvl3pPr marL="1143000" indent="-228600" algn="l" defTabSz="914400" rtl="0" eaLnBrk="1" latinLnBrk="0" hangingPunct="1">
+              <a:lnSpc>
+                <a:spcPct val="90000"/>
+              </a:lnSpc>
+              <a:spcBef>
+                <a:spcPts val="500"/>
+              </a:spcBef>
+              <a:buClr>
+                <a:srgbClr val="007EE5"/>
+              </a:buClr>
+              <a:buFont typeface="Wingdings" panose="05000000000000000000" pitchFamily="2" charset="2"/>
+              <a:buChar char="§"/>
+              <a:defRPr sz="2000" kern="1200">
+                <a:solidFill>
+                  <a:srgbClr val="FFFFFF"/>
+                </a:solidFill>
+                <a:latin typeface="+mn-lt"/>
+                <a:ea typeface="+mn-ea"/>
+                <a:cs typeface="+mn-cs"/>
+              </a:defRPr>
+            </a:lvl3pPr>
+            <a:lvl4pPr marL="1600200" indent="-228600" algn="l" defTabSz="914400" rtl="0" eaLnBrk="1" latinLnBrk="0" hangingPunct="1">
+              <a:lnSpc>
+                <a:spcPct val="90000"/>
+              </a:lnSpc>
+              <a:spcBef>
+                <a:spcPts val="500"/>
+              </a:spcBef>
+              <a:buClr>
+                <a:srgbClr val="007EE5"/>
+              </a:buClr>
+              <a:buFont typeface="Wingdings" panose="05000000000000000000" pitchFamily="2" charset="2"/>
+              <a:buChar char="§"/>
+              <a:defRPr sz="1800" kern="1200">
+                <a:solidFill>
+                  <a:srgbClr val="FFFFFF"/>
+                </a:solidFill>
+                <a:latin typeface="+mn-lt"/>
+                <a:ea typeface="+mn-ea"/>
+                <a:cs typeface="+mn-cs"/>
+              </a:defRPr>
+            </a:lvl4pPr>
+            <a:lvl5pPr marL="2057400" indent="-228600" algn="l" defTabSz="914400" rtl="0" eaLnBrk="1" latinLnBrk="0" hangingPunct="1">
+              <a:lnSpc>
+                <a:spcPct val="90000"/>
+              </a:lnSpc>
+              <a:spcBef>
+                <a:spcPts val="500"/>
+              </a:spcBef>
+              <a:buClr>
+                <a:srgbClr val="007EE5"/>
+              </a:buClr>
+              <a:buFont typeface="Wingdings" panose="05000000000000000000" pitchFamily="2" charset="2"/>
+              <a:buChar char="§"/>
+              <a:defRPr sz="1800" kern="1200">
+                <a:solidFill>
+                  <a:srgbClr val="FFFFFF"/>
+                </a:solidFill>
+                <a:latin typeface="+mn-lt"/>
+                <a:ea typeface="+mn-ea"/>
+                <a:cs typeface="+mn-cs"/>
+              </a:defRPr>
+            </a:lvl5pPr>
+            <a:lvl6pPr marL="2514600" indent="-228600" algn="l" defTabSz="914400" rtl="0" eaLnBrk="1" latinLnBrk="0" hangingPunct="1">
+              <a:lnSpc>
+                <a:spcPct val="90000"/>
+              </a:lnSpc>
+              <a:spcBef>
+                <a:spcPts val="500"/>
+              </a:spcBef>
+              <a:buFont typeface="Arial" panose="020B0604020202020204" pitchFamily="34" charset="0"/>
+              <a:buChar char="•"/>
+              <a:defRPr sz="1800" kern="1200">
+                <a:solidFill>
+                  <a:schemeClr val="tx1"/>
+                </a:solidFill>
+                <a:latin typeface="+mn-lt"/>
+                <a:ea typeface="+mn-ea"/>
+                <a:cs typeface="+mn-cs"/>
+              </a:defRPr>
+            </a:lvl6pPr>
+            <a:lvl7pPr marL="2971800" indent="-228600" algn="l" defTabSz="914400" rtl="0" eaLnBrk="1" latinLnBrk="0" hangingPunct="1">
+              <a:lnSpc>
+                <a:spcPct val="90000"/>
+              </a:lnSpc>
+              <a:spcBef>
+                <a:spcPts val="500"/>
+              </a:spcBef>
+              <a:buFont typeface="Arial" panose="020B0604020202020204" pitchFamily="34" charset="0"/>
+              <a:buChar char="•"/>
+              <a:defRPr sz="1800" kern="1200">
+                <a:solidFill>
+                  <a:schemeClr val="tx1"/>
+                </a:solidFill>
+                <a:latin typeface="+mn-lt"/>
+                <a:ea typeface="+mn-ea"/>
+                <a:cs typeface="+mn-cs"/>
+              </a:defRPr>
+            </a:lvl7pPr>
+            <a:lvl8pPr marL="3429000" indent="-228600" algn="l" defTabSz="914400" rtl="0" eaLnBrk="1" latinLnBrk="0" hangingPunct="1">
+              <a:lnSpc>
+                <a:spcPct val="90000"/>
+              </a:lnSpc>
+              <a:spcBef>
+                <a:spcPts val="500"/>
+              </a:spcBef>
+              <a:buFont typeface="Arial" panose="020B0604020202020204" pitchFamily="34" charset="0"/>
+              <a:buChar char="•"/>
+              <a:defRPr sz="1800" kern="1200">
+                <a:solidFill>
+                  <a:schemeClr val="tx1"/>
+                </a:solidFill>
+                <a:latin typeface="+mn-lt"/>
+                <a:ea typeface="+mn-ea"/>
+                <a:cs typeface="+mn-cs"/>
+              </a:defRPr>
+            </a:lvl8pPr>
+            <a:lvl9pPr marL="3886200" indent="-228600" algn="l" defTabSz="914400" rtl="0" eaLnBrk="1" latinLnBrk="0" hangingPunct="1">
+              <a:lnSpc>
+                <a:spcPct val="90000"/>
+              </a:lnSpc>
+              <a:spcBef>
+                <a:spcPts val="500"/>
+              </a:spcBef>
+              <a:buFont typeface="Arial" panose="020B0604020202020204" pitchFamily="34" charset="0"/>
+              <a:buChar char="•"/>
+              <a:defRPr sz="1800" kern="1200">
+                <a:solidFill>
+                  <a:schemeClr val="tx1"/>
+                </a:solidFill>
+                <a:latin typeface="+mn-lt"/>
+                <a:ea typeface="+mn-ea"/>
+                <a:cs typeface="+mn-cs"/>
+              </a:defRPr>
+            </a:lvl9pPr>
+          </a:lstStyle>
+          <a:p>
+            <a:pPr marL="0" indent="0">
+              <a:lnSpc>
+                <a:spcPct val="100000"/>
+              </a:lnSpc>
+              <a:buNone/>
+            </a:pPr>
+            <a:r>
+              <a:rPr lang="en-CA" sz="2400" spc="-15" dirty="0">
+                <a:solidFill>
+                  <a:srgbClr val="00FF00"/>
+                </a:solidFill>
+                <a:latin typeface="Courier New"/>
+                <a:cs typeface="Courier New"/>
+              </a:rPr>
+              <a:t>&gt;&gt;&gt; </a:t>
+            </a:r>
+            <a:r>
+              <a:rPr lang="en-CA" sz="2400" spc="-15" dirty="0" err="1">
+                <a:solidFill>
+                  <a:srgbClr val="00FF00"/>
+                </a:solidFill>
+                <a:latin typeface="Courier New"/>
+                <a:cs typeface="Courier New"/>
+              </a:rPr>
+              <a:t>white_rabbit</a:t>
+            </a:r>
+            <a:r>
+              <a:rPr lang="en-CA" sz="2400" spc="-15" dirty="0">
+                <a:solidFill>
+                  <a:srgbClr val="00FF00"/>
+                </a:solidFill>
+                <a:latin typeface="Courier New"/>
+                <a:cs typeface="Courier New"/>
+              </a:rPr>
+              <a:t> = ”I’m late! I’m late! For a very important date!”</a:t>
+            </a:r>
+          </a:p>
+          <a:p>
+            <a:pPr marL="0" indent="0">
+              <a:lnSpc>
+                <a:spcPct val="100000"/>
+              </a:lnSpc>
+              <a:buNone/>
+            </a:pPr>
+            <a:endParaRPr lang="en-CA" sz="2400" spc="-15" dirty="0">
               <a:solidFill>
-                <a:srgbClr val="00B0F0"/>
+                <a:srgbClr val="00FF00"/>
               </a:solidFill>
+              <a:latin typeface="Courier New"/>
+              <a:cs typeface="Courier New"/>
             </a:endParaRPr>
+          </a:p>
+          <a:p>
+            <a:pPr marL="0" indent="0">
+              <a:lnSpc>
+                <a:spcPct val="100000"/>
+              </a:lnSpc>
+              <a:buNone/>
+            </a:pPr>
+            <a:r>
+              <a:rPr lang="en-CA" sz="2400" spc="-15" dirty="0">
+                <a:solidFill>
+                  <a:srgbClr val="00FF00"/>
+                </a:solidFill>
+                <a:latin typeface="Courier New"/>
+                <a:cs typeface="Courier New"/>
+              </a:rPr>
+              <a:t>&gt;&gt;&gt; </a:t>
+            </a:r>
+            <a:r>
+              <a:rPr lang="en-CA" sz="2400" spc="-15" dirty="0" err="1">
+                <a:solidFill>
+                  <a:srgbClr val="00FF00"/>
+                </a:solidFill>
+                <a:latin typeface="Courier New"/>
+                <a:cs typeface="Courier New"/>
+              </a:rPr>
+              <a:t>white_rabbit.find</a:t>
+            </a:r>
+            <a:r>
+              <a:rPr lang="en-CA" sz="2400" spc="-15" dirty="0">
+                <a:solidFill>
+                  <a:srgbClr val="00FF00"/>
+                </a:solidFill>
+                <a:latin typeface="Courier New"/>
+                <a:cs typeface="Courier New"/>
+              </a:rPr>
+              <a:t>(‘late’)</a:t>
+            </a:r>
+          </a:p>
+          <a:p>
+            <a:pPr marL="0" indent="0">
+              <a:lnSpc>
+                <a:spcPct val="100000"/>
+              </a:lnSpc>
+              <a:buNone/>
+            </a:pPr>
+            <a:r>
+              <a:rPr lang="en-CA" sz="2400" spc="-15" dirty="0">
+                <a:solidFill>
+                  <a:srgbClr val="00FF00"/>
+                </a:solidFill>
+                <a:latin typeface="Courier New"/>
+                <a:cs typeface="Courier New"/>
+              </a:rPr>
+              <a:t>4</a:t>
+            </a:r>
+          </a:p>
+          <a:p>
+            <a:pPr marL="0" indent="0">
+              <a:lnSpc>
+                <a:spcPct val="100000"/>
+              </a:lnSpc>
+              <a:buNone/>
+            </a:pPr>
+            <a:endParaRPr lang="en-CA" sz="2400" spc="-15" dirty="0">
+              <a:solidFill>
+                <a:srgbClr val="00FF00"/>
+              </a:solidFill>
+              <a:latin typeface="Courier New"/>
+              <a:cs typeface="Courier New"/>
+            </a:endParaRPr>
+          </a:p>
+          <a:p>
+            <a:pPr marL="0" indent="0">
+              <a:lnSpc>
+                <a:spcPct val="100000"/>
+              </a:lnSpc>
+              <a:buNone/>
+            </a:pPr>
+            <a:r>
+              <a:rPr lang="en-CA" sz="2400" spc="-15" dirty="0">
+                <a:solidFill>
+                  <a:srgbClr val="00FF00"/>
+                </a:solidFill>
+                <a:latin typeface="Courier New"/>
+                <a:cs typeface="Courier New"/>
+              </a:rPr>
+              <a:t>&gt;&gt;&gt; </a:t>
+            </a:r>
+            <a:r>
+              <a:rPr lang="en-CA" sz="2400" spc="-15" dirty="0" err="1">
+                <a:solidFill>
+                  <a:srgbClr val="00FF00"/>
+                </a:solidFill>
+                <a:latin typeface="Courier New"/>
+                <a:cs typeface="Courier New"/>
+              </a:rPr>
+              <a:t>white_rabbit.rfind</a:t>
+            </a:r>
+            <a:r>
+              <a:rPr lang="en-CA" sz="2400" spc="-15" dirty="0">
+                <a:solidFill>
+                  <a:srgbClr val="00FF00"/>
+                </a:solidFill>
+                <a:latin typeface="Courier New"/>
+                <a:cs typeface="Courier New"/>
+              </a:rPr>
+              <a:t>(‘late’)</a:t>
+            </a:r>
+          </a:p>
+          <a:p>
+            <a:pPr marL="0" indent="0">
+              <a:lnSpc>
+                <a:spcPct val="100000"/>
+              </a:lnSpc>
+              <a:buNone/>
+            </a:pPr>
+            <a:r>
+              <a:rPr lang="en-CA" sz="2400" spc="-15" dirty="0">
+                <a:solidFill>
+                  <a:srgbClr val="00FF00"/>
+                </a:solidFill>
+                <a:latin typeface="Courier New"/>
+                <a:cs typeface="Courier New"/>
+              </a:rPr>
+              <a:t>14</a:t>
+            </a:r>
           </a:p>
         </p:txBody>
       </p:sp>
@@ -13720,7 +14547,7 @@
           <p:nvPr/>
         </p:nvPicPr>
         <p:blipFill>
-          <a:blip r:embed="rId2">
+          <a:blip r:embed="rId3">
             <a:extLst>
               <a:ext uri="{28A0092B-C50C-407E-A947-70E740481C1C}">
                 <a14:useLocalDpi xmlns:a14="http://schemas.microsoft.com/office/drawing/2010/main" val="0"/>
@@ -13752,435 +14579,10 @@
           </a:extLst>
         </p:spPr>
       </p:pic>
-      <p:sp>
-        <p:nvSpPr>
-          <p:cNvPr id="6" name="Content Placeholder 2">
-            <a:extLst>
-              <a:ext uri="{FF2B5EF4-FFF2-40B4-BE49-F238E27FC236}">
-                <a16:creationId xmlns:a16="http://schemas.microsoft.com/office/drawing/2014/main" id="{B12391A7-5272-AC4B-99EA-7E92B704046E}"/>
-              </a:ext>
-            </a:extLst>
-          </p:cNvPr>
-          <p:cNvSpPr txBox="1">
-            <a:spLocks/>
-          </p:cNvSpPr>
-          <p:nvPr/>
-        </p:nvSpPr>
-        <p:spPr>
-          <a:xfrm>
-            <a:off x="112986" y="3092426"/>
-            <a:ext cx="11853042" cy="3318446"/>
-          </a:xfrm>
-          <a:prstGeom prst="rect">
-            <a:avLst/>
-          </a:prstGeom>
-        </p:spPr>
-        <p:txBody>
-          <a:bodyPr vert="horz" lIns="91440" tIns="45720" rIns="91440" bIns="45720" rtlCol="0">
-            <a:normAutofit fontScale="92500"/>
-          </a:bodyPr>
-          <a:lstStyle>
-            <a:lvl1pPr marL="228600" indent="-228600" algn="l" defTabSz="914400" rtl="0" eaLnBrk="1" latinLnBrk="0" hangingPunct="1">
-              <a:lnSpc>
-                <a:spcPct val="90000"/>
-              </a:lnSpc>
-              <a:spcBef>
-                <a:spcPts val="1000"/>
-              </a:spcBef>
-              <a:buClr>
-                <a:srgbClr val="007EE5"/>
-              </a:buClr>
-              <a:buFont typeface="Wingdings" panose="05000000000000000000" pitchFamily="2" charset="2"/>
-              <a:buChar char="§"/>
-              <a:defRPr sz="2800" kern="1200">
-                <a:solidFill>
-                  <a:srgbClr val="FFFFFF"/>
-                </a:solidFill>
-                <a:latin typeface="+mn-lt"/>
-                <a:ea typeface="+mn-ea"/>
-                <a:cs typeface="+mn-cs"/>
-              </a:defRPr>
-            </a:lvl1pPr>
-            <a:lvl2pPr marL="685800" indent="-228600" algn="l" defTabSz="914400" rtl="0" eaLnBrk="1" latinLnBrk="0" hangingPunct="1">
-              <a:lnSpc>
-                <a:spcPct val="90000"/>
-              </a:lnSpc>
-              <a:spcBef>
-                <a:spcPts val="500"/>
-              </a:spcBef>
-              <a:buClr>
-                <a:srgbClr val="007EE5"/>
-              </a:buClr>
-              <a:buFont typeface="Wingdings" panose="05000000000000000000" pitchFamily="2" charset="2"/>
-              <a:buChar char="§"/>
-              <a:defRPr sz="2400" kern="1200">
-                <a:solidFill>
-                  <a:srgbClr val="FFFFFF"/>
-                </a:solidFill>
-                <a:latin typeface="+mn-lt"/>
-                <a:ea typeface="+mn-ea"/>
-                <a:cs typeface="+mn-cs"/>
-              </a:defRPr>
-            </a:lvl2pPr>
-            <a:lvl3pPr marL="1143000" indent="-228600" algn="l" defTabSz="914400" rtl="0" eaLnBrk="1" latinLnBrk="0" hangingPunct="1">
-              <a:lnSpc>
-                <a:spcPct val="90000"/>
-              </a:lnSpc>
-              <a:spcBef>
-                <a:spcPts val="500"/>
-              </a:spcBef>
-              <a:buClr>
-                <a:srgbClr val="007EE5"/>
-              </a:buClr>
-              <a:buFont typeface="Wingdings" panose="05000000000000000000" pitchFamily="2" charset="2"/>
-              <a:buChar char="§"/>
-              <a:defRPr sz="2000" kern="1200">
-                <a:solidFill>
-                  <a:srgbClr val="FFFFFF"/>
-                </a:solidFill>
-                <a:latin typeface="+mn-lt"/>
-                <a:ea typeface="+mn-ea"/>
-                <a:cs typeface="+mn-cs"/>
-              </a:defRPr>
-            </a:lvl3pPr>
-            <a:lvl4pPr marL="1600200" indent="-228600" algn="l" defTabSz="914400" rtl="0" eaLnBrk="1" latinLnBrk="0" hangingPunct="1">
-              <a:lnSpc>
-                <a:spcPct val="90000"/>
-              </a:lnSpc>
-              <a:spcBef>
-                <a:spcPts val="500"/>
-              </a:spcBef>
-              <a:buClr>
-                <a:srgbClr val="007EE5"/>
-              </a:buClr>
-              <a:buFont typeface="Wingdings" panose="05000000000000000000" pitchFamily="2" charset="2"/>
-              <a:buChar char="§"/>
-              <a:defRPr sz="1800" kern="1200">
-                <a:solidFill>
-                  <a:srgbClr val="FFFFFF"/>
-                </a:solidFill>
-                <a:latin typeface="+mn-lt"/>
-                <a:ea typeface="+mn-ea"/>
-                <a:cs typeface="+mn-cs"/>
-              </a:defRPr>
-            </a:lvl4pPr>
-            <a:lvl5pPr marL="2057400" indent="-228600" algn="l" defTabSz="914400" rtl="0" eaLnBrk="1" latinLnBrk="0" hangingPunct="1">
-              <a:lnSpc>
-                <a:spcPct val="90000"/>
-              </a:lnSpc>
-              <a:spcBef>
-                <a:spcPts val="500"/>
-              </a:spcBef>
-              <a:buClr>
-                <a:srgbClr val="007EE5"/>
-              </a:buClr>
-              <a:buFont typeface="Wingdings" panose="05000000000000000000" pitchFamily="2" charset="2"/>
-              <a:buChar char="§"/>
-              <a:defRPr sz="1800" kern="1200">
-                <a:solidFill>
-                  <a:srgbClr val="FFFFFF"/>
-                </a:solidFill>
-                <a:latin typeface="+mn-lt"/>
-                <a:ea typeface="+mn-ea"/>
-                <a:cs typeface="+mn-cs"/>
-              </a:defRPr>
-            </a:lvl5pPr>
-            <a:lvl6pPr marL="2514600" indent="-228600" algn="l" defTabSz="914400" rtl="0" eaLnBrk="1" latinLnBrk="0" hangingPunct="1">
-              <a:lnSpc>
-                <a:spcPct val="90000"/>
-              </a:lnSpc>
-              <a:spcBef>
-                <a:spcPts val="500"/>
-              </a:spcBef>
-              <a:buFont typeface="Arial" panose="020B0604020202020204" pitchFamily="34" charset="0"/>
-              <a:buChar char="•"/>
-              <a:defRPr sz="1800" kern="1200">
-                <a:solidFill>
-                  <a:schemeClr val="tx1"/>
-                </a:solidFill>
-                <a:latin typeface="+mn-lt"/>
-                <a:ea typeface="+mn-ea"/>
-                <a:cs typeface="+mn-cs"/>
-              </a:defRPr>
-            </a:lvl6pPr>
-            <a:lvl7pPr marL="2971800" indent="-228600" algn="l" defTabSz="914400" rtl="0" eaLnBrk="1" latinLnBrk="0" hangingPunct="1">
-              <a:lnSpc>
-                <a:spcPct val="90000"/>
-              </a:lnSpc>
-              <a:spcBef>
-                <a:spcPts val="500"/>
-              </a:spcBef>
-              <a:buFont typeface="Arial" panose="020B0604020202020204" pitchFamily="34" charset="0"/>
-              <a:buChar char="•"/>
-              <a:defRPr sz="1800" kern="1200">
-                <a:solidFill>
-                  <a:schemeClr val="tx1"/>
-                </a:solidFill>
-                <a:latin typeface="+mn-lt"/>
-                <a:ea typeface="+mn-ea"/>
-                <a:cs typeface="+mn-cs"/>
-              </a:defRPr>
-            </a:lvl7pPr>
-            <a:lvl8pPr marL="3429000" indent="-228600" algn="l" defTabSz="914400" rtl="0" eaLnBrk="1" latinLnBrk="0" hangingPunct="1">
-              <a:lnSpc>
-                <a:spcPct val="90000"/>
-              </a:lnSpc>
-              <a:spcBef>
-                <a:spcPts val="500"/>
-              </a:spcBef>
-              <a:buFont typeface="Arial" panose="020B0604020202020204" pitchFamily="34" charset="0"/>
-              <a:buChar char="•"/>
-              <a:defRPr sz="1800" kern="1200">
-                <a:solidFill>
-                  <a:schemeClr val="tx1"/>
-                </a:solidFill>
-                <a:latin typeface="+mn-lt"/>
-                <a:ea typeface="+mn-ea"/>
-                <a:cs typeface="+mn-cs"/>
-              </a:defRPr>
-            </a:lvl8pPr>
-            <a:lvl9pPr marL="3886200" indent="-228600" algn="l" defTabSz="914400" rtl="0" eaLnBrk="1" latinLnBrk="0" hangingPunct="1">
-              <a:lnSpc>
-                <a:spcPct val="90000"/>
-              </a:lnSpc>
-              <a:spcBef>
-                <a:spcPts val="500"/>
-              </a:spcBef>
-              <a:buFont typeface="Arial" panose="020B0604020202020204" pitchFamily="34" charset="0"/>
-              <a:buChar char="•"/>
-              <a:defRPr sz="1800" kern="1200">
-                <a:solidFill>
-                  <a:schemeClr val="tx1"/>
-                </a:solidFill>
-                <a:latin typeface="+mn-lt"/>
-                <a:ea typeface="+mn-ea"/>
-                <a:cs typeface="+mn-cs"/>
-              </a:defRPr>
-            </a:lvl9pPr>
-          </a:lstStyle>
-          <a:p>
-            <a:pPr marL="0" indent="0">
-              <a:lnSpc>
-                <a:spcPct val="100000"/>
-              </a:lnSpc>
-              <a:buNone/>
-            </a:pPr>
-            <a:r>
-              <a:rPr lang="en-CA" sz="2400" spc="-15" dirty="0">
-                <a:solidFill>
-                  <a:srgbClr val="00FF00"/>
-                </a:solidFill>
-                <a:latin typeface="Courier New"/>
-                <a:cs typeface="Courier New"/>
-              </a:rPr>
-              <a:t>&gt;&gt;&gt; </a:t>
-            </a:r>
-            <a:r>
-              <a:rPr lang="en-CA" sz="2400" spc="-15" dirty="0" err="1">
-                <a:solidFill>
-                  <a:srgbClr val="00FF00"/>
-                </a:solidFill>
-                <a:latin typeface="Courier New"/>
-                <a:cs typeface="Courier New"/>
-              </a:rPr>
-              <a:t>white_rabbit</a:t>
-            </a:r>
-            <a:r>
-              <a:rPr lang="en-CA" sz="2400" spc="-15" dirty="0">
-                <a:solidFill>
-                  <a:srgbClr val="00FF00"/>
-                </a:solidFill>
-                <a:latin typeface="Courier New"/>
-                <a:cs typeface="Courier New"/>
-              </a:rPr>
-              <a:t> = ”I’m late! I’m late! For a very important date!”</a:t>
-            </a:r>
-          </a:p>
-          <a:p>
-            <a:pPr marL="0" indent="0">
-              <a:lnSpc>
-                <a:spcPct val="100000"/>
-              </a:lnSpc>
-              <a:buNone/>
-            </a:pPr>
-            <a:endParaRPr lang="en-CA" sz="2400" spc="-15" dirty="0">
-              <a:solidFill>
-                <a:srgbClr val="00FF00"/>
-              </a:solidFill>
-              <a:latin typeface="Courier New"/>
-              <a:cs typeface="Courier New"/>
-            </a:endParaRPr>
-          </a:p>
-          <a:p>
-            <a:pPr marL="0" indent="0">
-              <a:lnSpc>
-                <a:spcPct val="100000"/>
-              </a:lnSpc>
-              <a:buNone/>
-            </a:pPr>
-            <a:r>
-              <a:rPr lang="en-CA" sz="2400" spc="-15" dirty="0">
-                <a:solidFill>
-                  <a:srgbClr val="00FF00"/>
-                </a:solidFill>
-                <a:latin typeface="Courier New"/>
-                <a:cs typeface="Courier New"/>
-              </a:rPr>
-              <a:t>&gt;&gt;&gt; </a:t>
-            </a:r>
-            <a:r>
-              <a:rPr lang="en-CA" sz="2400" spc="-15" dirty="0" err="1">
-                <a:solidFill>
-                  <a:srgbClr val="00FF00"/>
-                </a:solidFill>
-                <a:latin typeface="Courier New"/>
-                <a:cs typeface="Courier New"/>
-              </a:rPr>
-              <a:t>white_rabbit.lower</a:t>
-            </a:r>
-            <a:r>
-              <a:rPr lang="en-CA" sz="2400" spc="-15" dirty="0">
-                <a:solidFill>
-                  <a:srgbClr val="00FF00"/>
-                </a:solidFill>
-                <a:latin typeface="Courier New"/>
-                <a:cs typeface="Courier New"/>
-              </a:rPr>
-              <a:t>()</a:t>
-            </a:r>
-          </a:p>
-          <a:p>
-            <a:pPr marL="0" indent="0">
-              <a:lnSpc>
-                <a:spcPct val="100000"/>
-              </a:lnSpc>
-              <a:buNone/>
-            </a:pPr>
-            <a:r>
-              <a:rPr lang="en-CA" sz="2400" spc="-15" dirty="0">
-                <a:solidFill>
-                  <a:srgbClr val="00FF00"/>
-                </a:solidFill>
-                <a:latin typeface="Courier New"/>
-                <a:cs typeface="Courier New"/>
-              </a:rPr>
-              <a:t>”</a:t>
-            </a:r>
-            <a:r>
-              <a:rPr lang="en-CA" sz="2400" spc="-15" dirty="0" err="1">
-                <a:solidFill>
-                  <a:srgbClr val="00FF00"/>
-                </a:solidFill>
-                <a:latin typeface="Courier New"/>
-                <a:cs typeface="Courier New"/>
-              </a:rPr>
-              <a:t>i’m</a:t>
-            </a:r>
-            <a:r>
-              <a:rPr lang="en-CA" sz="2400" spc="-15" dirty="0">
-                <a:solidFill>
-                  <a:srgbClr val="00FF00"/>
-                </a:solidFill>
-                <a:latin typeface="Courier New"/>
-                <a:cs typeface="Courier New"/>
-              </a:rPr>
-              <a:t> late! </a:t>
-            </a:r>
-            <a:r>
-              <a:rPr lang="en-CA" sz="2400" spc="-15" dirty="0" err="1">
-                <a:solidFill>
-                  <a:srgbClr val="00FF00"/>
-                </a:solidFill>
-                <a:latin typeface="Courier New"/>
-                <a:cs typeface="Courier New"/>
-              </a:rPr>
-              <a:t>i’m</a:t>
-            </a:r>
-            <a:r>
-              <a:rPr lang="en-CA" sz="2400" spc="-15" dirty="0">
-                <a:solidFill>
-                  <a:srgbClr val="00FF00"/>
-                </a:solidFill>
-                <a:latin typeface="Courier New"/>
-                <a:cs typeface="Courier New"/>
-              </a:rPr>
-              <a:t> late! for a very important date!”</a:t>
-            </a:r>
-          </a:p>
-          <a:p>
-            <a:pPr marL="0" indent="0">
-              <a:lnSpc>
-                <a:spcPct val="100000"/>
-              </a:lnSpc>
-              <a:buNone/>
-            </a:pPr>
-            <a:endParaRPr lang="en-CA" sz="2400" spc="-15" dirty="0">
-              <a:solidFill>
-                <a:srgbClr val="00FF00"/>
-              </a:solidFill>
-              <a:latin typeface="Courier New"/>
-              <a:cs typeface="Courier New"/>
-            </a:endParaRPr>
-          </a:p>
-          <a:p>
-            <a:pPr marL="0" indent="0">
-              <a:lnSpc>
-                <a:spcPct val="100000"/>
-              </a:lnSpc>
-              <a:buNone/>
-            </a:pPr>
-            <a:r>
-              <a:rPr lang="en-CA" sz="2400" spc="-15" dirty="0">
-                <a:solidFill>
-                  <a:srgbClr val="00FF00"/>
-                </a:solidFill>
-                <a:latin typeface="Courier New"/>
-                <a:cs typeface="Courier New"/>
-              </a:rPr>
-              <a:t>&gt;&gt;&gt; </a:t>
-            </a:r>
-            <a:r>
-              <a:rPr lang="en-CA" sz="2400" spc="-15" dirty="0" err="1">
-                <a:solidFill>
-                  <a:srgbClr val="00FF00"/>
-                </a:solidFill>
-                <a:latin typeface="Courier New"/>
-                <a:cs typeface="Courier New"/>
-              </a:rPr>
-              <a:t>white_rabbit</a:t>
-            </a:r>
-            <a:endParaRPr lang="en-CA" sz="2400" spc="-15" dirty="0">
-              <a:solidFill>
-                <a:srgbClr val="00FF00"/>
-              </a:solidFill>
-              <a:latin typeface="Courier New"/>
-              <a:cs typeface="Courier New"/>
-            </a:endParaRPr>
-          </a:p>
-          <a:p>
-            <a:pPr marL="0" indent="0">
-              <a:lnSpc>
-                <a:spcPct val="100000"/>
-              </a:lnSpc>
-              <a:buNone/>
-            </a:pPr>
-            <a:r>
-              <a:rPr lang="en-CA" sz="2400" spc="-15" dirty="0">
-                <a:solidFill>
-                  <a:srgbClr val="00FF00"/>
-                </a:solidFill>
-                <a:latin typeface="Courier New"/>
-                <a:cs typeface="Courier New"/>
-              </a:rPr>
-              <a:t>“I’m late! I’m late! For a very important date!”</a:t>
-            </a:r>
-          </a:p>
-        </p:txBody>
-      </p:sp>
     </p:spTree>
     <p:extLst>
       <p:ext uri="{BB962C8B-B14F-4D97-AF65-F5344CB8AC3E}">
-        <p14:creationId xmlns:p14="http://schemas.microsoft.com/office/powerpoint/2010/main" val="1227739032"/>
+        <p14:creationId xmlns:p14="http://schemas.microsoft.com/office/powerpoint/2010/main" val="3765079452"/>
       </p:ext>
     </p:extLst>
   </p:cSld>
@@ -14240,616 +14642,6 @@
                   <a:schemeClr val="accent6"/>
                 </a:solidFill>
               </a:rPr>
-              <a:t>find </a:t>
-            </a:r>
-            <a:r>
-              <a:rPr lang="en-US" dirty="0">
-                <a:solidFill>
-                  <a:schemeClr val="accent2"/>
-                </a:solidFill>
-              </a:rPr>
-              <a:t>(</a:t>
-            </a:r>
-            <a:r>
-              <a:rPr lang="en-US" dirty="0"/>
-              <a:t>and </a:t>
-            </a:r>
-            <a:r>
-              <a:rPr lang="en-US" dirty="0" err="1">
-                <a:solidFill>
-                  <a:schemeClr val="accent6"/>
-                </a:solidFill>
-              </a:rPr>
-              <a:t>rfind</a:t>
-            </a:r>
-            <a:r>
-              <a:rPr lang="en-US" dirty="0">
-                <a:solidFill>
-                  <a:schemeClr val="accent2"/>
-                </a:solidFill>
-              </a:rPr>
-              <a:t>)</a:t>
-            </a:r>
-          </a:p>
-        </p:txBody>
-      </p:sp>
-      <p:sp>
-        <p:nvSpPr>
-          <p:cNvPr id="3" name="Content Placeholder 2">
-            <a:extLst>
-              <a:ext uri="{FF2B5EF4-FFF2-40B4-BE49-F238E27FC236}">
-                <a16:creationId xmlns:a16="http://schemas.microsoft.com/office/drawing/2014/main" id="{EC57B960-1118-4C42-8919-04D0AD72EF45}"/>
-              </a:ext>
-            </a:extLst>
-          </p:cNvPr>
-          <p:cNvSpPr>
-            <a:spLocks noGrp="1"/>
-          </p:cNvSpPr>
-          <p:nvPr>
-            <p:ph idx="1"/>
-          </p:nvPr>
-        </p:nvSpPr>
-        <p:spPr>
-          <a:xfrm>
-            <a:off x="838200" y="1575393"/>
-            <a:ext cx="11127828" cy="4835479"/>
-          </a:xfrm>
-        </p:spPr>
-        <p:txBody>
-          <a:bodyPr/>
-          <a:lstStyle/>
-          <a:p>
-            <a:r>
-              <a:rPr lang="en-US" dirty="0"/>
-              <a:t>The method </a:t>
-            </a:r>
-            <a:r>
-              <a:rPr lang="en-US" dirty="0">
-                <a:solidFill>
-                  <a:schemeClr val="accent6"/>
-                </a:solidFill>
-              </a:rPr>
-              <a:t>find</a:t>
-            </a:r>
-            <a:r>
-              <a:rPr lang="en-US" dirty="0"/>
-              <a:t> returns first index where a substring is found</a:t>
-            </a:r>
-          </a:p>
-          <a:p>
-            <a:r>
-              <a:rPr lang="en-US" dirty="0"/>
-              <a:t>The method </a:t>
-            </a:r>
-            <a:r>
-              <a:rPr lang="en-US" dirty="0" err="1">
-                <a:solidFill>
-                  <a:schemeClr val="accent6"/>
-                </a:solidFill>
-              </a:rPr>
-              <a:t>rfind</a:t>
-            </a:r>
-            <a:r>
-              <a:rPr lang="en-US" dirty="0"/>
-              <a:t> returns the last index where a substring is found</a:t>
-            </a:r>
-          </a:p>
-          <a:p>
-            <a:r>
-              <a:rPr lang="en-US" dirty="0"/>
-              <a:t>Returns -1 if no such substring exists</a:t>
-            </a:r>
-          </a:p>
-          <a:p>
-            <a:endParaRPr lang="en-US" dirty="0"/>
-          </a:p>
-          <a:p>
-            <a:endParaRPr lang="en-US" dirty="0">
-              <a:solidFill>
-                <a:srgbClr val="00B0F0"/>
-              </a:solidFill>
-            </a:endParaRPr>
-          </a:p>
-        </p:txBody>
-      </p:sp>
-      <p:sp>
-        <p:nvSpPr>
-          <p:cNvPr id="5" name="Content Placeholder 2">
-            <a:extLst>
-              <a:ext uri="{FF2B5EF4-FFF2-40B4-BE49-F238E27FC236}">
-                <a16:creationId xmlns:a16="http://schemas.microsoft.com/office/drawing/2014/main" id="{FF2FEE43-ED3E-6C4B-94C9-09B68F2057E7}"/>
-              </a:ext>
-            </a:extLst>
-          </p:cNvPr>
-          <p:cNvSpPr txBox="1">
-            <a:spLocks/>
-          </p:cNvSpPr>
-          <p:nvPr/>
-        </p:nvSpPr>
-        <p:spPr>
-          <a:xfrm>
-            <a:off x="112986" y="3092426"/>
-            <a:ext cx="11853042" cy="3318446"/>
-          </a:xfrm>
-          <a:prstGeom prst="rect">
-            <a:avLst/>
-          </a:prstGeom>
-        </p:spPr>
-        <p:txBody>
-          <a:bodyPr vert="horz" lIns="91440" tIns="45720" rIns="91440" bIns="45720" rtlCol="0">
-            <a:normAutofit fontScale="92500"/>
-          </a:bodyPr>
-          <a:lstStyle>
-            <a:lvl1pPr marL="228600" indent="-228600" algn="l" defTabSz="914400" rtl="0" eaLnBrk="1" latinLnBrk="0" hangingPunct="1">
-              <a:lnSpc>
-                <a:spcPct val="90000"/>
-              </a:lnSpc>
-              <a:spcBef>
-                <a:spcPts val="1000"/>
-              </a:spcBef>
-              <a:buClr>
-                <a:srgbClr val="007EE5"/>
-              </a:buClr>
-              <a:buFont typeface="Wingdings" panose="05000000000000000000" pitchFamily="2" charset="2"/>
-              <a:buChar char="§"/>
-              <a:defRPr sz="2800" kern="1200">
-                <a:solidFill>
-                  <a:srgbClr val="FFFFFF"/>
-                </a:solidFill>
-                <a:latin typeface="+mn-lt"/>
-                <a:ea typeface="+mn-ea"/>
-                <a:cs typeface="+mn-cs"/>
-              </a:defRPr>
-            </a:lvl1pPr>
-            <a:lvl2pPr marL="685800" indent="-228600" algn="l" defTabSz="914400" rtl="0" eaLnBrk="1" latinLnBrk="0" hangingPunct="1">
-              <a:lnSpc>
-                <a:spcPct val="90000"/>
-              </a:lnSpc>
-              <a:spcBef>
-                <a:spcPts val="500"/>
-              </a:spcBef>
-              <a:buClr>
-                <a:srgbClr val="007EE5"/>
-              </a:buClr>
-              <a:buFont typeface="Wingdings" panose="05000000000000000000" pitchFamily="2" charset="2"/>
-              <a:buChar char="§"/>
-              <a:defRPr sz="2400" kern="1200">
-                <a:solidFill>
-                  <a:srgbClr val="FFFFFF"/>
-                </a:solidFill>
-                <a:latin typeface="+mn-lt"/>
-                <a:ea typeface="+mn-ea"/>
-                <a:cs typeface="+mn-cs"/>
-              </a:defRPr>
-            </a:lvl2pPr>
-            <a:lvl3pPr marL="1143000" indent="-228600" algn="l" defTabSz="914400" rtl="0" eaLnBrk="1" latinLnBrk="0" hangingPunct="1">
-              <a:lnSpc>
-                <a:spcPct val="90000"/>
-              </a:lnSpc>
-              <a:spcBef>
-                <a:spcPts val="500"/>
-              </a:spcBef>
-              <a:buClr>
-                <a:srgbClr val="007EE5"/>
-              </a:buClr>
-              <a:buFont typeface="Wingdings" panose="05000000000000000000" pitchFamily="2" charset="2"/>
-              <a:buChar char="§"/>
-              <a:defRPr sz="2000" kern="1200">
-                <a:solidFill>
-                  <a:srgbClr val="FFFFFF"/>
-                </a:solidFill>
-                <a:latin typeface="+mn-lt"/>
-                <a:ea typeface="+mn-ea"/>
-                <a:cs typeface="+mn-cs"/>
-              </a:defRPr>
-            </a:lvl3pPr>
-            <a:lvl4pPr marL="1600200" indent="-228600" algn="l" defTabSz="914400" rtl="0" eaLnBrk="1" latinLnBrk="0" hangingPunct="1">
-              <a:lnSpc>
-                <a:spcPct val="90000"/>
-              </a:lnSpc>
-              <a:spcBef>
-                <a:spcPts val="500"/>
-              </a:spcBef>
-              <a:buClr>
-                <a:srgbClr val="007EE5"/>
-              </a:buClr>
-              <a:buFont typeface="Wingdings" panose="05000000000000000000" pitchFamily="2" charset="2"/>
-              <a:buChar char="§"/>
-              <a:defRPr sz="1800" kern="1200">
-                <a:solidFill>
-                  <a:srgbClr val="FFFFFF"/>
-                </a:solidFill>
-                <a:latin typeface="+mn-lt"/>
-                <a:ea typeface="+mn-ea"/>
-                <a:cs typeface="+mn-cs"/>
-              </a:defRPr>
-            </a:lvl4pPr>
-            <a:lvl5pPr marL="2057400" indent="-228600" algn="l" defTabSz="914400" rtl="0" eaLnBrk="1" latinLnBrk="0" hangingPunct="1">
-              <a:lnSpc>
-                <a:spcPct val="90000"/>
-              </a:lnSpc>
-              <a:spcBef>
-                <a:spcPts val="500"/>
-              </a:spcBef>
-              <a:buClr>
-                <a:srgbClr val="007EE5"/>
-              </a:buClr>
-              <a:buFont typeface="Wingdings" panose="05000000000000000000" pitchFamily="2" charset="2"/>
-              <a:buChar char="§"/>
-              <a:defRPr sz="1800" kern="1200">
-                <a:solidFill>
-                  <a:srgbClr val="FFFFFF"/>
-                </a:solidFill>
-                <a:latin typeface="+mn-lt"/>
-                <a:ea typeface="+mn-ea"/>
-                <a:cs typeface="+mn-cs"/>
-              </a:defRPr>
-            </a:lvl5pPr>
-            <a:lvl6pPr marL="2514600" indent="-228600" algn="l" defTabSz="914400" rtl="0" eaLnBrk="1" latinLnBrk="0" hangingPunct="1">
-              <a:lnSpc>
-                <a:spcPct val="90000"/>
-              </a:lnSpc>
-              <a:spcBef>
-                <a:spcPts val="500"/>
-              </a:spcBef>
-              <a:buFont typeface="Arial" panose="020B0604020202020204" pitchFamily="34" charset="0"/>
-              <a:buChar char="•"/>
-              <a:defRPr sz="1800" kern="1200">
-                <a:solidFill>
-                  <a:schemeClr val="tx1"/>
-                </a:solidFill>
-                <a:latin typeface="+mn-lt"/>
-                <a:ea typeface="+mn-ea"/>
-                <a:cs typeface="+mn-cs"/>
-              </a:defRPr>
-            </a:lvl6pPr>
-            <a:lvl7pPr marL="2971800" indent="-228600" algn="l" defTabSz="914400" rtl="0" eaLnBrk="1" latinLnBrk="0" hangingPunct="1">
-              <a:lnSpc>
-                <a:spcPct val="90000"/>
-              </a:lnSpc>
-              <a:spcBef>
-                <a:spcPts val="500"/>
-              </a:spcBef>
-              <a:buFont typeface="Arial" panose="020B0604020202020204" pitchFamily="34" charset="0"/>
-              <a:buChar char="•"/>
-              <a:defRPr sz="1800" kern="1200">
-                <a:solidFill>
-                  <a:schemeClr val="tx1"/>
-                </a:solidFill>
-                <a:latin typeface="+mn-lt"/>
-                <a:ea typeface="+mn-ea"/>
-                <a:cs typeface="+mn-cs"/>
-              </a:defRPr>
-            </a:lvl7pPr>
-            <a:lvl8pPr marL="3429000" indent="-228600" algn="l" defTabSz="914400" rtl="0" eaLnBrk="1" latinLnBrk="0" hangingPunct="1">
-              <a:lnSpc>
-                <a:spcPct val="90000"/>
-              </a:lnSpc>
-              <a:spcBef>
-                <a:spcPts val="500"/>
-              </a:spcBef>
-              <a:buFont typeface="Arial" panose="020B0604020202020204" pitchFamily="34" charset="0"/>
-              <a:buChar char="•"/>
-              <a:defRPr sz="1800" kern="1200">
-                <a:solidFill>
-                  <a:schemeClr val="tx1"/>
-                </a:solidFill>
-                <a:latin typeface="+mn-lt"/>
-                <a:ea typeface="+mn-ea"/>
-                <a:cs typeface="+mn-cs"/>
-              </a:defRPr>
-            </a:lvl8pPr>
-            <a:lvl9pPr marL="3886200" indent="-228600" algn="l" defTabSz="914400" rtl="0" eaLnBrk="1" latinLnBrk="0" hangingPunct="1">
-              <a:lnSpc>
-                <a:spcPct val="90000"/>
-              </a:lnSpc>
-              <a:spcBef>
-                <a:spcPts val="500"/>
-              </a:spcBef>
-              <a:buFont typeface="Arial" panose="020B0604020202020204" pitchFamily="34" charset="0"/>
-              <a:buChar char="•"/>
-              <a:defRPr sz="1800" kern="1200">
-                <a:solidFill>
-                  <a:schemeClr val="tx1"/>
-                </a:solidFill>
-                <a:latin typeface="+mn-lt"/>
-                <a:ea typeface="+mn-ea"/>
-                <a:cs typeface="+mn-cs"/>
-              </a:defRPr>
-            </a:lvl9pPr>
-          </a:lstStyle>
-          <a:p>
-            <a:pPr marL="0" indent="0">
-              <a:lnSpc>
-                <a:spcPct val="100000"/>
-              </a:lnSpc>
-              <a:buNone/>
-            </a:pPr>
-            <a:r>
-              <a:rPr lang="en-CA" sz="2400" spc="-15" dirty="0">
-                <a:solidFill>
-                  <a:srgbClr val="00FF00"/>
-                </a:solidFill>
-                <a:latin typeface="Courier New"/>
-                <a:cs typeface="Courier New"/>
-              </a:rPr>
-              <a:t>&gt;&gt;&gt; </a:t>
-            </a:r>
-            <a:r>
-              <a:rPr lang="en-CA" sz="2400" spc="-15" dirty="0" err="1">
-                <a:solidFill>
-                  <a:srgbClr val="00FF00"/>
-                </a:solidFill>
-                <a:latin typeface="Courier New"/>
-                <a:cs typeface="Courier New"/>
-              </a:rPr>
-              <a:t>white_rabbit</a:t>
-            </a:r>
-            <a:r>
-              <a:rPr lang="en-CA" sz="2400" spc="-15" dirty="0">
-                <a:solidFill>
-                  <a:srgbClr val="00FF00"/>
-                </a:solidFill>
-                <a:latin typeface="Courier New"/>
-                <a:cs typeface="Courier New"/>
-              </a:rPr>
-              <a:t> = ”I’m late! I’m late! For a very important date!”</a:t>
-            </a:r>
-          </a:p>
-          <a:p>
-            <a:pPr marL="0" indent="0">
-              <a:lnSpc>
-                <a:spcPct val="100000"/>
-              </a:lnSpc>
-              <a:buNone/>
-            </a:pPr>
-            <a:endParaRPr lang="en-CA" sz="2400" spc="-15" dirty="0">
-              <a:solidFill>
-                <a:srgbClr val="00FF00"/>
-              </a:solidFill>
-              <a:latin typeface="Courier New"/>
-              <a:cs typeface="Courier New"/>
-            </a:endParaRPr>
-          </a:p>
-          <a:p>
-            <a:pPr marL="0" indent="0">
-              <a:lnSpc>
-                <a:spcPct val="100000"/>
-              </a:lnSpc>
-              <a:buNone/>
-            </a:pPr>
-            <a:r>
-              <a:rPr lang="en-CA" sz="2400" spc="-15" dirty="0">
-                <a:solidFill>
-                  <a:srgbClr val="00FF00"/>
-                </a:solidFill>
-                <a:latin typeface="Courier New"/>
-                <a:cs typeface="Courier New"/>
-              </a:rPr>
-              <a:t>&gt;&gt;&gt; </a:t>
-            </a:r>
-            <a:r>
-              <a:rPr lang="en-CA" sz="2400" spc="-15" dirty="0" err="1">
-                <a:solidFill>
-                  <a:srgbClr val="00FF00"/>
-                </a:solidFill>
-                <a:latin typeface="Courier New"/>
-                <a:cs typeface="Courier New"/>
-              </a:rPr>
-              <a:t>white_rabbit.find</a:t>
-            </a:r>
-            <a:r>
-              <a:rPr lang="en-CA" sz="2400" spc="-15" dirty="0">
-                <a:solidFill>
-                  <a:srgbClr val="00FF00"/>
-                </a:solidFill>
-                <a:latin typeface="Courier New"/>
-                <a:cs typeface="Courier New"/>
-              </a:rPr>
-              <a:t>(‘late’)</a:t>
-            </a:r>
-          </a:p>
-          <a:p>
-            <a:pPr marL="0" indent="0">
-              <a:lnSpc>
-                <a:spcPct val="100000"/>
-              </a:lnSpc>
-              <a:buNone/>
-            </a:pPr>
-            <a:r>
-              <a:rPr lang="en-CA" sz="2400" spc="-15" dirty="0">
-                <a:solidFill>
-                  <a:srgbClr val="00FF00"/>
-                </a:solidFill>
-                <a:latin typeface="Courier New"/>
-                <a:cs typeface="Courier New"/>
-              </a:rPr>
-              <a:t>4</a:t>
-            </a:r>
-          </a:p>
-          <a:p>
-            <a:pPr marL="0" indent="0">
-              <a:lnSpc>
-                <a:spcPct val="100000"/>
-              </a:lnSpc>
-              <a:buNone/>
-            </a:pPr>
-            <a:endParaRPr lang="en-CA" sz="2400" spc="-15" dirty="0">
-              <a:solidFill>
-                <a:srgbClr val="00FF00"/>
-              </a:solidFill>
-              <a:latin typeface="Courier New"/>
-              <a:cs typeface="Courier New"/>
-            </a:endParaRPr>
-          </a:p>
-          <a:p>
-            <a:pPr marL="0" indent="0">
-              <a:lnSpc>
-                <a:spcPct val="100000"/>
-              </a:lnSpc>
-              <a:buNone/>
-            </a:pPr>
-            <a:r>
-              <a:rPr lang="en-CA" sz="2400" spc="-15" dirty="0">
-                <a:solidFill>
-                  <a:srgbClr val="00FF00"/>
-                </a:solidFill>
-                <a:latin typeface="Courier New"/>
-                <a:cs typeface="Courier New"/>
-              </a:rPr>
-              <a:t>&gt;&gt;&gt; </a:t>
-            </a:r>
-            <a:r>
-              <a:rPr lang="en-CA" sz="2400" spc="-15" dirty="0" err="1">
-                <a:solidFill>
-                  <a:srgbClr val="00FF00"/>
-                </a:solidFill>
-                <a:latin typeface="Courier New"/>
-                <a:cs typeface="Courier New"/>
-              </a:rPr>
-              <a:t>white_rabbit.rfind</a:t>
-            </a:r>
-            <a:r>
-              <a:rPr lang="en-CA" sz="2400" spc="-15" dirty="0">
-                <a:solidFill>
-                  <a:srgbClr val="00FF00"/>
-                </a:solidFill>
-                <a:latin typeface="Courier New"/>
-                <a:cs typeface="Courier New"/>
-              </a:rPr>
-              <a:t>(‘late’)</a:t>
-            </a:r>
-          </a:p>
-          <a:p>
-            <a:pPr marL="0" indent="0">
-              <a:lnSpc>
-                <a:spcPct val="100000"/>
-              </a:lnSpc>
-              <a:buNone/>
-            </a:pPr>
-            <a:r>
-              <a:rPr lang="en-CA" sz="2400" spc="-15" dirty="0">
-                <a:solidFill>
-                  <a:srgbClr val="00FF00"/>
-                </a:solidFill>
-                <a:latin typeface="Courier New"/>
-                <a:cs typeface="Courier New"/>
-              </a:rPr>
-              <a:t>14</a:t>
-            </a:r>
-          </a:p>
-        </p:txBody>
-      </p:sp>
-      <p:pic>
-        <p:nvPicPr>
-          <p:cNvPr id="2050" name="Picture 2" descr="White Rabbit &amp;quot;I&amp;#39;m late!&amp;quot; Blank Template - Imgflip">
-            <a:extLst>
-              <a:ext uri="{FF2B5EF4-FFF2-40B4-BE49-F238E27FC236}">
-                <a16:creationId xmlns:a16="http://schemas.microsoft.com/office/drawing/2014/main" id="{A96D8802-0227-E446-AEFA-595823BFB49D}"/>
-              </a:ext>
-            </a:extLst>
-          </p:cNvPr>
-          <p:cNvPicPr>
-            <a:picLocks noChangeAspect="1" noChangeArrowheads="1"/>
-          </p:cNvPicPr>
-          <p:nvPr/>
-        </p:nvPicPr>
-        <p:blipFill>
-          <a:blip r:embed="rId3">
-            <a:extLst>
-              <a:ext uri="{28A0092B-C50C-407E-A947-70E740481C1C}">
-                <a14:useLocalDpi xmlns:a14="http://schemas.microsoft.com/office/drawing/2010/main" val="0"/>
-              </a:ext>
-            </a:extLst>
-          </a:blip>
-          <a:srcRect/>
-          <a:stretch>
-            <a:fillRect/>
-          </a:stretch>
-        </p:blipFill>
-        <p:spPr bwMode="auto">
-          <a:xfrm>
-            <a:off x="8322447" y="3749580"/>
-            <a:ext cx="3031353" cy="2661292"/>
-          </a:xfrm>
-          <a:prstGeom prst="rect">
-            <a:avLst/>
-          </a:prstGeom>
-          <a:noFill/>
-          <a:extLst>
-            <a:ext uri="{909E8E84-426E-40DD-AFC4-6F175D3DCCD1}">
-              <a14:hiddenFill xmlns:a14="http://schemas.microsoft.com/office/drawing/2010/main">
-                <a:solidFill>
-                  <a:srgbClr val="FFFFFF"/>
-                </a:solidFill>
-              </a14:hiddenFill>
-            </a:ext>
-          </a:extLst>
-        </p:spPr>
-      </p:pic>
-    </p:spTree>
-    <p:extLst>
-      <p:ext uri="{BB962C8B-B14F-4D97-AF65-F5344CB8AC3E}">
-        <p14:creationId xmlns:p14="http://schemas.microsoft.com/office/powerpoint/2010/main" val="3765079452"/>
-      </p:ext>
-    </p:extLst>
-  </p:cSld>
-  <p:clrMapOvr>
-    <a:masterClrMapping/>
-  </p:clrMapOvr>
-</p:sld>
-</file>
-
-<file path=ppt/slides/slide24.xml><?xml version="1.0" encoding="utf-8"?>
-<p:sld xmlns:a="http://schemas.openxmlformats.org/drawingml/2006/main" xmlns:r="http://schemas.openxmlformats.org/officeDocument/2006/relationships" xmlns:p="http://schemas.openxmlformats.org/presentationml/2006/main">
-  <p:cSld>
-    <p:spTree>
-      <p:nvGrpSpPr>
-        <p:cNvPr id="1" name=""/>
-        <p:cNvGrpSpPr/>
-        <p:nvPr/>
-      </p:nvGrpSpPr>
-      <p:grpSpPr>
-        <a:xfrm>
-          <a:off x="0" y="0"/>
-          <a:ext cx="0" cy="0"/>
-          <a:chOff x="0" y="0"/>
-          <a:chExt cx="0" cy="0"/>
-        </a:xfrm>
-      </p:grpSpPr>
-      <p:sp>
-        <p:nvSpPr>
-          <p:cNvPr id="2" name="Title 1">
-            <a:extLst>
-              <a:ext uri="{FF2B5EF4-FFF2-40B4-BE49-F238E27FC236}">
-                <a16:creationId xmlns:a16="http://schemas.microsoft.com/office/drawing/2014/main" id="{30E3161A-E17B-D441-9A47-659DE5D944D7}"/>
-              </a:ext>
-            </a:extLst>
-          </p:cNvPr>
-          <p:cNvSpPr>
-            <a:spLocks noGrp="1"/>
-          </p:cNvSpPr>
-          <p:nvPr>
-            <p:ph type="title"/>
-          </p:nvPr>
-        </p:nvSpPr>
-        <p:spPr/>
-        <p:txBody>
-          <a:bodyPr>
-            <a:normAutofit fontScale="90000"/>
-          </a:bodyPr>
-          <a:lstStyle/>
-          <a:p>
-            <a:r>
-              <a:rPr lang="en-US" dirty="0"/>
-              <a:t>String Method: </a:t>
-            </a:r>
-            <a:r>
-              <a:rPr lang="en-US" dirty="0">
-                <a:solidFill>
-                  <a:schemeClr val="accent6"/>
-                </a:solidFill>
-              </a:rPr>
               <a:t>replace</a:t>
             </a:r>
           </a:p>
@@ -15344,7 +15136,7 @@
 </p:sld>
 </file>
 
-<file path=ppt/slides/slide25.xml><?xml version="1.0" encoding="utf-8"?>
+<file path=ppt/slides/slide24.xml><?xml version="1.0" encoding="utf-8"?>
 <p:sld xmlns:a="http://schemas.openxmlformats.org/drawingml/2006/main" xmlns:r="http://schemas.openxmlformats.org/officeDocument/2006/relationships" xmlns:p="http://schemas.openxmlformats.org/presentationml/2006/main">
   <p:cSld>
     <p:spTree>
@@ -16118,7 +15910,7 @@
 </p:sld>
 </file>
 
-<file path=ppt/slides/slide26.xml><?xml version="1.0" encoding="utf-8"?>
+<file path=ppt/slides/slide25.xml><?xml version="1.0" encoding="utf-8"?>
 <p:sld xmlns:a="http://schemas.openxmlformats.org/drawingml/2006/main" xmlns:r="http://schemas.openxmlformats.org/officeDocument/2006/relationships" xmlns:p="http://schemas.openxmlformats.org/presentationml/2006/main">
   <p:cSld>
     <p:spTree>
@@ -16311,8 +16103,8 @@
         </p:nvSpPr>
         <p:spPr>
           <a:xfrm>
-            <a:off x="4971042" y="3240079"/>
-            <a:ext cx="6994986" cy="3362524"/>
+            <a:off x="4971042" y="2757479"/>
+            <a:ext cx="6994986" cy="4131965"/>
           </a:xfrm>
           <a:prstGeom prst="rect">
             <a:avLst/>
@@ -16682,6 +16474,16 @@
               <a:t>r</a:t>
             </a:r>
             <a:r>
+              <a:rPr lang="en-US" sz="2400" dirty="0">
+                <a:solidFill>
+                  <a:schemeClr val="accent6"/>
+                </a:solidFill>
+                <a:latin typeface="Courier" pitchFamily="2" charset="0"/>
+                <a:cs typeface="Arial"/>
+              </a:rPr>
+              <a:t>()</a:t>
+            </a:r>
+            <a:r>
               <a:rPr sz="2400" spc="-10" dirty="0">
                 <a:solidFill>
                   <a:schemeClr val="accent6"/>
@@ -16756,6 +16558,16 @@
               <a:t>r</a:t>
             </a:r>
             <a:r>
+              <a:rPr lang="en-US" sz="2400" dirty="0">
+                <a:solidFill>
+                  <a:schemeClr val="accent6"/>
+                </a:solidFill>
+                <a:latin typeface="Courier" pitchFamily="2" charset="0"/>
+                <a:cs typeface="Arial"/>
+              </a:rPr>
+              <a:t>()</a:t>
+            </a:r>
+            <a:r>
               <a:rPr sz="2400" spc="-10" dirty="0">
                 <a:solidFill>
                   <a:schemeClr val="accent6"/>
@@ -16819,6 +16631,16 @@
               </a:rPr>
               <a:t>ind</a:t>
             </a:r>
+            <a:r>
+              <a:rPr lang="en-US" sz="2400" dirty="0">
+                <a:solidFill>
+                  <a:schemeClr val="accent6"/>
+                </a:solidFill>
+                <a:latin typeface="Courier" pitchFamily="2" charset="0"/>
+                <a:cs typeface="Arial"/>
+              </a:rPr>
+              <a:t>()</a:t>
+            </a:r>
             <a:endParaRPr sz="2400" dirty="0">
               <a:solidFill>
                 <a:schemeClr val="accent6"/>
@@ -16896,6 +16718,16 @@
               </a:rPr>
               <a:t>ind</a:t>
             </a:r>
+            <a:r>
+              <a:rPr lang="en-US" sz="2400" dirty="0">
+                <a:solidFill>
+                  <a:schemeClr val="accent6"/>
+                </a:solidFill>
+                <a:latin typeface="Courier" pitchFamily="2" charset="0"/>
+                <a:cs typeface="Arial"/>
+              </a:rPr>
+              <a:t>()</a:t>
+            </a:r>
             <a:endParaRPr lang="en-US" sz="2400" spc="-10" dirty="0">
               <a:solidFill>
                 <a:schemeClr val="accent6"/>
@@ -16953,6 +16785,16 @@
               </a:rPr>
               <a:t>replace</a:t>
             </a:r>
+            <a:r>
+              <a:rPr lang="en-US" sz="2400" dirty="0">
+                <a:solidFill>
+                  <a:schemeClr val="accent6"/>
+                </a:solidFill>
+                <a:latin typeface="Courier" pitchFamily="2" charset="0"/>
+                <a:cs typeface="Arial"/>
+              </a:rPr>
+              <a:t>()</a:t>
+            </a:r>
             <a:endParaRPr lang="en-US" sz="2400" spc="-10" dirty="0">
               <a:solidFill>
                 <a:schemeClr val="accent6"/>
@@ -17038,17 +16880,161 @@
                 <a:latin typeface="Courier" pitchFamily="2" charset="0"/>
                 <a:cs typeface="Arial"/>
               </a:rPr>
-              <a:t>alize</a:t>
-            </a:r>
-            <a:r>
-              <a:rPr sz="2400" spc="-5" dirty="0">
+              <a:t>aliz</a:t>
+            </a:r>
+            <a:r>
+              <a:rPr lang="en-US" sz="2400" dirty="0" err="1">
                 <a:solidFill>
                   <a:schemeClr val="accent6"/>
                 </a:solidFill>
                 <a:latin typeface="Courier" pitchFamily="2" charset="0"/>
                 <a:cs typeface="Arial"/>
               </a:rPr>
-              <a:t> </a:t>
+              <a:t>e</a:t>
+            </a:r>
+            <a:r>
+              <a:rPr lang="en-US" sz="2400" dirty="0">
+                <a:solidFill>
+                  <a:schemeClr val="accent6"/>
+                </a:solidFill>
+                <a:latin typeface="Courier" pitchFamily="2" charset="0"/>
+                <a:cs typeface="Arial"/>
+              </a:rPr>
+              <a:t>()</a:t>
+            </a:r>
+            <a:endParaRPr lang="en-US" sz="2400" spc="-5" dirty="0">
+              <a:solidFill>
+                <a:schemeClr val="accent6"/>
+              </a:solidFill>
+              <a:latin typeface="Courier" pitchFamily="2" charset="0"/>
+              <a:cs typeface="Arial"/>
+            </a:endParaRPr>
+          </a:p>
+          <a:p>
+            <a:pPr marL="12700" marR="21590">
+              <a:lnSpc>
+                <a:spcPts val="2870"/>
+              </a:lnSpc>
+              <a:spcBef>
+                <a:spcPts val="125"/>
+              </a:spcBef>
+            </a:pPr>
+            <a:r>
+              <a:rPr lang="en-US" sz="2400" spc="-15" dirty="0" err="1">
+                <a:solidFill>
+                  <a:schemeClr val="accent6"/>
+                </a:solidFill>
+                <a:latin typeface="Courier" pitchFamily="2" charset="0"/>
+                <a:cs typeface="Arial"/>
+              </a:rPr>
+              <a:t>st</a:t>
+            </a:r>
+            <a:r>
+              <a:rPr lang="en-US" sz="2400" spc="-135" dirty="0" err="1">
+                <a:solidFill>
+                  <a:schemeClr val="accent6"/>
+                </a:solidFill>
+                <a:latin typeface="Courier" pitchFamily="2" charset="0"/>
+                <a:cs typeface="Arial"/>
+              </a:rPr>
+              <a:t>r</a:t>
+            </a:r>
+            <a:r>
+              <a:rPr lang="en-US" sz="2400" spc="-15" dirty="0" err="1">
+                <a:solidFill>
+                  <a:schemeClr val="accent6"/>
+                </a:solidFill>
+                <a:latin typeface="Courier" pitchFamily="2" charset="0"/>
+                <a:cs typeface="Arial"/>
+              </a:rPr>
+              <a:t>.</a:t>
+            </a:r>
+            <a:r>
+              <a:rPr lang="en-US" sz="2400" dirty="0" err="1">
+                <a:solidFill>
+                  <a:schemeClr val="accent6"/>
+                </a:solidFill>
+                <a:latin typeface="Courier" pitchFamily="2" charset="0"/>
+                <a:cs typeface="Arial"/>
+              </a:rPr>
+              <a:t>strip</a:t>
+            </a:r>
+            <a:r>
+              <a:rPr lang="en-US" sz="2400" dirty="0">
+                <a:solidFill>
+                  <a:schemeClr val="accent6"/>
+                </a:solidFill>
+                <a:latin typeface="Courier" pitchFamily="2" charset="0"/>
+                <a:cs typeface="Arial"/>
+              </a:rPr>
+              <a:t>()</a:t>
+            </a:r>
+            <a:endParaRPr lang="en-US" sz="2400" spc="-5" dirty="0">
+              <a:solidFill>
+                <a:schemeClr val="accent6"/>
+              </a:solidFill>
+              <a:latin typeface="Courier" pitchFamily="2" charset="0"/>
+              <a:cs typeface="Arial"/>
+            </a:endParaRPr>
+          </a:p>
+          <a:p>
+            <a:pPr marL="12700" marR="21590">
+              <a:lnSpc>
+                <a:spcPts val="2870"/>
+              </a:lnSpc>
+              <a:spcBef>
+                <a:spcPts val="125"/>
+              </a:spcBef>
+            </a:pPr>
+            <a:r>
+              <a:rPr lang="en-US" sz="2400" spc="-15" dirty="0" err="1">
+                <a:solidFill>
+                  <a:schemeClr val="accent6"/>
+                </a:solidFill>
+                <a:latin typeface="Courier" pitchFamily="2" charset="0"/>
+                <a:cs typeface="Arial"/>
+              </a:rPr>
+              <a:t>st</a:t>
+            </a:r>
+            <a:r>
+              <a:rPr lang="en-US" sz="2400" spc="-135" dirty="0" err="1">
+                <a:solidFill>
+                  <a:schemeClr val="accent6"/>
+                </a:solidFill>
+                <a:latin typeface="Courier" pitchFamily="2" charset="0"/>
+                <a:cs typeface="Arial"/>
+              </a:rPr>
+              <a:t>r</a:t>
+            </a:r>
+            <a:r>
+              <a:rPr lang="en-US" sz="2400" spc="-15" dirty="0" err="1">
+                <a:solidFill>
+                  <a:schemeClr val="accent6"/>
+                </a:solidFill>
+                <a:latin typeface="Courier" pitchFamily="2" charset="0"/>
+                <a:cs typeface="Arial"/>
+              </a:rPr>
+              <a:t>.</a:t>
+            </a:r>
+            <a:r>
+              <a:rPr lang="en-US" sz="2400" dirty="0" err="1">
+                <a:solidFill>
+                  <a:schemeClr val="accent6"/>
+                </a:solidFill>
+                <a:latin typeface="Courier" pitchFamily="2" charset="0"/>
+                <a:cs typeface="Arial"/>
+              </a:rPr>
+              <a:t>split</a:t>
+            </a:r>
+            <a:r>
+              <a:rPr lang="en-US" sz="2400" dirty="0">
+                <a:solidFill>
+                  <a:schemeClr val="accent6"/>
+                </a:solidFill>
+                <a:latin typeface="Courier" pitchFamily="2" charset="0"/>
+                <a:cs typeface="Arial"/>
+              </a:rPr>
+              <a:t>()</a:t>
             </a:r>
             <a:endParaRPr lang="en-US" sz="2400" spc="-5" dirty="0">
               <a:solidFill>
@@ -17277,7 +17263,7 @@
 </p:sld>
 </file>
 
-<file path=ppt/slides/slide27.xml><?xml version="1.0" encoding="utf-8"?>
+<file path=ppt/slides/slide26.xml><?xml version="1.0" encoding="utf-8"?>
 <p:sld xmlns:a="http://schemas.openxmlformats.org/drawingml/2006/main" xmlns:r="http://schemas.openxmlformats.org/officeDocument/2006/relationships" xmlns:p="http://schemas.openxmlformats.org/presentationml/2006/main">
   <p:cSld>
     <p:spTree>
@@ -17562,310 +17548,7 @@
 </p:sld>
 </file>
 
-<file path=ppt/slides/slide28.xml><?xml version="1.0" encoding="utf-8"?>
-<p:sld xmlns:a="http://schemas.openxmlformats.org/drawingml/2006/main" xmlns:r="http://schemas.openxmlformats.org/officeDocument/2006/relationships" xmlns:p="http://schemas.openxmlformats.org/presentationml/2006/main" show="0">
-  <p:cSld>
-    <p:spTree>
-      <p:nvGrpSpPr>
-        <p:cNvPr id="1" name="">
-          <a:extLst>
-            <a:ext uri="{FF2B5EF4-FFF2-40B4-BE49-F238E27FC236}">
-              <a16:creationId xmlns:a16="http://schemas.microsoft.com/office/drawing/2014/main" id="{2C7A468D-C8E3-2242-AF5E-7C1F99C9BA4B}"/>
-            </a:ext>
-          </a:extLst>
-        </p:cNvPr>
-        <p:cNvGrpSpPr/>
-        <p:nvPr/>
-      </p:nvGrpSpPr>
-      <p:grpSpPr>
-        <a:xfrm>
-          <a:off x="0" y="0"/>
-          <a:ext cx="0" cy="0"/>
-          <a:chOff x="0" y="0"/>
-          <a:chExt cx="0" cy="0"/>
-        </a:xfrm>
-      </p:grpSpPr>
-      <p:sp>
-        <p:nvSpPr>
-          <p:cNvPr id="2" name="Title 1">
-            <a:extLst>
-              <a:ext uri="{FF2B5EF4-FFF2-40B4-BE49-F238E27FC236}">
-                <a16:creationId xmlns:a16="http://schemas.microsoft.com/office/drawing/2014/main" id="{83BD358C-45D5-572E-0EEC-72996D7148D9}"/>
-              </a:ext>
-            </a:extLst>
-          </p:cNvPr>
-          <p:cNvSpPr>
-            <a:spLocks noGrp="1"/>
-          </p:cNvSpPr>
-          <p:nvPr>
-            <p:ph type="title"/>
-          </p:nvPr>
-        </p:nvSpPr>
-        <p:spPr/>
-        <p:txBody>
-          <a:bodyPr>
-            <a:normAutofit fontScale="90000"/>
-          </a:bodyPr>
-          <a:lstStyle/>
-          <a:p>
-            <a:r>
-              <a:rPr lang="en-CA" dirty="0" err="1"/>
-              <a:t>Mentimeter</a:t>
-            </a:r>
-            <a:r>
-              <a:rPr lang="en-CA" dirty="0"/>
-              <a:t> Checkpoint</a:t>
-            </a:r>
-          </a:p>
-        </p:txBody>
-      </p:sp>
-      <p:sp>
-        <p:nvSpPr>
-          <p:cNvPr id="3" name="Content Placeholder 2">
-            <a:extLst>
-              <a:ext uri="{FF2B5EF4-FFF2-40B4-BE49-F238E27FC236}">
-                <a16:creationId xmlns:a16="http://schemas.microsoft.com/office/drawing/2014/main" id="{21A55314-AD7C-71E9-AC7C-5394B0FBE73A}"/>
-              </a:ext>
-            </a:extLst>
-          </p:cNvPr>
-          <p:cNvSpPr>
-            <a:spLocks noGrp="1"/>
-          </p:cNvSpPr>
-          <p:nvPr>
-            <p:ph idx="1"/>
-          </p:nvPr>
-        </p:nvSpPr>
-        <p:spPr/>
-        <p:txBody>
-          <a:bodyPr/>
-          <a:lstStyle/>
-          <a:p>
-            <a:r>
-              <a:rPr lang="en-CA" b="1" i="0" u="none" strike="noStrike" dirty="0">
-                <a:effectLst/>
-                <a:latin typeface="MentiText"/>
-              </a:rPr>
-              <a:t>Jo</a:t>
-            </a:r>
-            <a:r>
-              <a:rPr lang="en-CA" b="1" dirty="0">
-                <a:latin typeface="MentiText"/>
-              </a:rPr>
-              <a:t>in at </a:t>
-            </a:r>
-            <a:r>
-              <a:rPr lang="en-CA" b="1" dirty="0">
-                <a:solidFill>
-                  <a:srgbClr val="00FF00"/>
-                </a:solidFill>
-                <a:latin typeface="MentiText"/>
-                <a:hlinkClick r:id="rId2">
-                  <a:extLst>
-                    <a:ext uri="{A12FA001-AC4F-418D-AE19-62706E023703}">
-                      <ahyp:hlinkClr xmlns:ahyp="http://schemas.microsoft.com/office/drawing/2018/hyperlinkcolor" val="tx"/>
-                    </a:ext>
-                  </a:extLst>
-                </a:hlinkClick>
-              </a:rPr>
-              <a:t>www.menti.com</a:t>
-            </a:r>
-            <a:r>
-              <a:rPr lang="en-CA" b="1" dirty="0">
-                <a:latin typeface="MentiText"/>
-              </a:rPr>
-              <a:t>:</a:t>
-            </a:r>
-          </a:p>
-          <a:p>
-            <a:pPr lvl="1"/>
-            <a:r>
-              <a:rPr lang="en-CA" sz="2800" b="1" i="0" u="none" strike="noStrike" dirty="0">
-                <a:effectLst/>
-                <a:latin typeface="MentiText"/>
-              </a:rPr>
-              <a:t>Code: </a:t>
-            </a:r>
-            <a:r>
-              <a:rPr lang="en-GB" sz="2800" b="1" i="0" u="none" strike="noStrike" dirty="0">
-                <a:solidFill>
-                  <a:srgbClr val="FFFF00"/>
-                </a:solidFill>
-                <a:effectLst/>
-                <a:latin typeface="MentiText"/>
-              </a:rPr>
-              <a:t>3845 2545</a:t>
-            </a:r>
-          </a:p>
-          <a:p>
-            <a:pPr lvl="1"/>
-            <a:endParaRPr lang="en-GB" b="1" i="0" u="none" strike="noStrike" dirty="0">
-              <a:effectLst/>
-              <a:latin typeface="MentiText"/>
-            </a:endParaRPr>
-          </a:p>
-          <a:p>
-            <a:r>
-              <a:rPr lang="en-GB" b="1" dirty="0">
-                <a:latin typeface="MentiText"/>
-              </a:rPr>
-              <a:t>Link</a:t>
-            </a:r>
-            <a:r>
-              <a:rPr lang="en-GB" b="0" i="0" u="none" strike="noStrike" dirty="0">
-                <a:effectLst/>
-                <a:latin typeface="MentiText"/>
-              </a:rPr>
-              <a:t> </a:t>
-            </a:r>
-            <a:endParaRPr lang="en-CA" dirty="0">
-              <a:hlinkClick r:id="rId3">
-                <a:extLst>
-                  <a:ext uri="{A12FA001-AC4F-418D-AE19-62706E023703}">
-                    <ahyp:hlinkClr xmlns:ahyp="http://schemas.microsoft.com/office/drawing/2018/hyperlinkcolor" val="tx"/>
-                  </a:ext>
-                </a:extLst>
-              </a:hlinkClick>
-            </a:endParaRPr>
-          </a:p>
-          <a:p>
-            <a:pPr lvl="1"/>
-            <a:r>
-              <a:rPr lang="en-CA" dirty="0">
-                <a:solidFill>
-                  <a:srgbClr val="00FF00"/>
-                </a:solidFill>
-                <a:hlinkClick r:id="rId4">
-                  <a:extLst>
-                    <a:ext uri="{A12FA001-AC4F-418D-AE19-62706E023703}">
-                      <ahyp:hlinkClr xmlns:ahyp="http://schemas.microsoft.com/office/drawing/2018/hyperlinkcolor" val="tx"/>
-                    </a:ext>
-                  </a:extLst>
-                </a:hlinkClick>
-              </a:rPr>
-              <a:t>https://www.menti.com/alwk63o5mxsp</a:t>
-            </a:r>
-            <a:r>
-              <a:rPr lang="en-CA" dirty="0">
-                <a:solidFill>
-                  <a:srgbClr val="00FF00"/>
-                </a:solidFill>
-              </a:rPr>
-              <a:t> </a:t>
-            </a:r>
-          </a:p>
-        </p:txBody>
-      </p:sp>
-      <p:pic>
-        <p:nvPicPr>
-          <p:cNvPr id="1030" name="Picture 6" descr="Check Point Vector Images (over 9,600)">
-            <a:extLst>
-              <a:ext uri="{FF2B5EF4-FFF2-40B4-BE49-F238E27FC236}">
-                <a16:creationId xmlns:a16="http://schemas.microsoft.com/office/drawing/2014/main" id="{73300366-357E-D433-C563-B7C82FF6AA66}"/>
-              </a:ext>
-            </a:extLst>
-          </p:cNvPr>
-          <p:cNvPicPr>
-            <a:picLocks noChangeAspect="1" noChangeArrowheads="1"/>
-          </p:cNvPicPr>
-          <p:nvPr/>
-        </p:nvPicPr>
-        <p:blipFill>
-          <a:blip r:embed="rId5">
-            <a:extLst>
-              <a:ext uri="{BEBA8EAE-BF5A-486C-A8C5-ECC9F3942E4B}">
-                <a14:imgProps xmlns:a14="http://schemas.microsoft.com/office/drawing/2010/main">
-                  <a14:imgLayer r:embed="rId6">
-                    <a14:imgEffect>
-                      <a14:backgroundRemoval t="10000" b="90000" l="5100" r="96175">
-                        <a14:foregroundMark x1="5464" y1="27200" x2="5464" y2="59600"/>
-                        <a14:foregroundMark x1="5464" y1="59600" x2="7650" y2="69200"/>
-                        <a14:foregroundMark x1="94171" y1="24400" x2="94171" y2="62000"/>
-                        <a14:foregroundMark x1="95082" y1="76400" x2="96175" y2="69200"/>
-                      </a14:backgroundRemoval>
-                    </a14:imgEffect>
-                  </a14:imgLayer>
-                </a14:imgProps>
-              </a:ext>
-              <a:ext uri="{28A0092B-C50C-407E-A947-70E740481C1C}">
-                <a14:useLocalDpi xmlns:a14="http://schemas.microsoft.com/office/drawing/2010/main" val="0"/>
-              </a:ext>
-            </a:extLst>
-          </a:blip>
-          <a:srcRect/>
-          <a:stretch>
-            <a:fillRect/>
-          </a:stretch>
-        </p:blipFill>
-        <p:spPr bwMode="auto">
-          <a:xfrm>
-            <a:off x="7577464" y="503401"/>
-            <a:ext cx="3866106" cy="1760522"/>
-          </a:xfrm>
-          <a:prstGeom prst="rect">
-            <a:avLst/>
-          </a:prstGeom>
-          <a:noFill/>
-          <a:extLst>
-            <a:ext uri="{909E8E84-426E-40DD-AFC4-6F175D3DCCD1}">
-              <a14:hiddenFill xmlns:a14="http://schemas.microsoft.com/office/drawing/2010/main">
-                <a:solidFill>
-                  <a:srgbClr val="FFFFFF"/>
-                </a:solidFill>
-              </a14:hiddenFill>
-            </a:ext>
-          </a:extLst>
-        </p:spPr>
-      </p:pic>
-      <p:pic>
-        <p:nvPicPr>
-          <p:cNvPr id="6" name="Picture 5" descr="A qr code on a white background&#10;&#10;AI-generated content may be incorrect.">
-            <a:extLst>
-              <a:ext uri="{FF2B5EF4-FFF2-40B4-BE49-F238E27FC236}">
-                <a16:creationId xmlns:a16="http://schemas.microsoft.com/office/drawing/2014/main" id="{46DFD0CE-EEAF-3967-881D-EC4CBE91540B}"/>
-              </a:ext>
-            </a:extLst>
-          </p:cNvPr>
-          <p:cNvPicPr>
-            <a:picLocks noChangeAspect="1"/>
-          </p:cNvPicPr>
-          <p:nvPr/>
-        </p:nvPicPr>
-        <p:blipFill>
-          <a:blip r:embed="rId7">
-            <a:extLst>
-              <a:ext uri="{28A0092B-C50C-407E-A947-70E740481C1C}">
-                <a14:useLocalDpi xmlns:a14="http://schemas.microsoft.com/office/drawing/2010/main" val="0"/>
-              </a:ext>
-            </a:extLst>
-          </a:blip>
-          <a:stretch>
-            <a:fillRect/>
-          </a:stretch>
-        </p:blipFill>
-        <p:spPr>
-          <a:xfrm>
-            <a:off x="7577464" y="2203632"/>
-            <a:ext cx="4079461" cy="4079461"/>
-          </a:xfrm>
-          <a:prstGeom prst="rect">
-            <a:avLst/>
-          </a:prstGeom>
-        </p:spPr>
-      </p:pic>
-    </p:spTree>
-    <p:extLst>
-      <p:ext uri="{BB962C8B-B14F-4D97-AF65-F5344CB8AC3E}">
-        <p14:creationId xmlns:p14="http://schemas.microsoft.com/office/powerpoint/2010/main" val="1419154530"/>
-      </p:ext>
-    </p:extLst>
-  </p:cSld>
-  <p:clrMapOvr>
-    <a:masterClrMapping/>
-  </p:clrMapOvr>
-</p:sld>
-</file>
-
-<file path=ppt/slides/slide29.xml><?xml version="1.0" encoding="utf-8"?>
+<file path=ppt/slides/slide27.xml><?xml version="1.0" encoding="utf-8"?>
 <p:sld xmlns:a="http://schemas.openxmlformats.org/drawingml/2006/main" xmlns:r="http://schemas.openxmlformats.org/officeDocument/2006/relationships" xmlns:p="http://schemas.openxmlformats.org/presentationml/2006/main">
   <p:cSld>
     <p:spTree>
@@ -18346,7 +18029,7 @@
         <p:spPr>
           <a:xfrm>
             <a:off x="275492" y="1822448"/>
-            <a:ext cx="8129953" cy="4835479"/>
+            <a:ext cx="8792308" cy="4835479"/>
           </a:xfrm>
         </p:spPr>
         <p:txBody>
@@ -18367,7 +18050,15 @@
             </a:r>
             <a:r>
               <a:rPr lang="en-US" dirty="0"/>
-              <a:t>) type was briefly introduced in previous weeks</a:t>
+              <a:t>) type </a:t>
+            </a:r>
+            <a:r>
+              <a:rPr lang="en-US" dirty="0" err="1"/>
+              <a:t>wasintroduced</a:t>
+            </a:r>
+            <a:r>
+              <a:rPr lang="en-US" dirty="0"/>
+              <a:t> in previous weeks</a:t>
             </a:r>
           </a:p>
           <a:p>
@@ -18429,53 +18120,6 @@
           </a:p>
         </p:txBody>
       </p:sp>
-      <p:pic>
-        <p:nvPicPr>
-          <p:cNvPr id="9218" name="Picture 2" descr="there seems to be a problem with this string. swirl it around while i chase  it - Programmer Cat - quickmeme">
-            <a:extLst>
-              <a:ext uri="{FF2B5EF4-FFF2-40B4-BE49-F238E27FC236}">
-                <a16:creationId xmlns:a16="http://schemas.microsoft.com/office/drawing/2014/main" id="{BB625E8D-FC79-FF45-2540-DC8062A87EF4}"/>
-              </a:ext>
-            </a:extLst>
-          </p:cNvPr>
-          <p:cNvPicPr>
-            <a:picLocks noChangeAspect="1" noChangeArrowheads="1"/>
-          </p:cNvPicPr>
-          <p:nvPr/>
-        </p:nvPicPr>
-        <p:blipFill>
-          <a:blip r:embed="rId2">
-            <a:extLst>
-              <a:ext uri="{28A0092B-C50C-407E-A947-70E740481C1C}">
-                <a14:useLocalDpi xmlns:a14="http://schemas.microsoft.com/office/drawing/2010/main" val="0"/>
-              </a:ext>
-            </a:extLst>
-          </a:blip>
-          <a:srcRect/>
-          <a:stretch>
-            <a:fillRect/>
-          </a:stretch>
-        </p:blipFill>
-        <p:spPr bwMode="auto">
-          <a:xfrm>
-            <a:off x="8405445" y="1236401"/>
-            <a:ext cx="3651740" cy="4894085"/>
-          </a:xfrm>
-          <a:prstGeom prst="rect">
-            <a:avLst/>
-          </a:prstGeom>
-          <a:noFill/>
-          <a:extLst>
-            <a:ext uri="{909E8E84-426E-40DD-AFC4-6F175D3DCCD1}">
-              <a14:hiddenFill xmlns:a14="http://schemas.microsoft.com/office/drawing/2010/main">
-                <a:solidFill>
-                  <a:srgbClr val="FFFFFF"/>
-                </a:solidFill>
-              </a14:hiddenFill>
-            </a:ext>
-          </a:extLst>
-        </p:spPr>
-      </p:pic>
       <p:pic>
         <p:nvPicPr>
           <p:cNvPr id="5" name="Graphic 4" descr="Tick with solid fill">
@@ -18603,11 +18247,19 @@
   <p:clrMapOvr>
     <a:masterClrMapping/>
   </p:clrMapOvr>
+  <mc:AlternateContent xmlns:mc="http://schemas.openxmlformats.org/markup-compatibility/2006">
+    <mc:Choice xmlns:p14="http://schemas.microsoft.com/office/powerpoint/2010/main" Requires="p14">
+      <p:transition spd="slow" p14:dur="2000" advTm="75358"/>
+    </mc:Choice>
+    <mc:Fallback>
+      <p:transition spd="slow" advTm="75358"/>
+    </mc:Fallback>
+  </mc:AlternateContent>
 </p:sld>
 </file>
 
 <file path=ppt/slides/slide4.xml><?xml version="1.0" encoding="utf-8"?>
-<p:sld xmlns:a="http://schemas.openxmlformats.org/drawingml/2006/main" xmlns:r="http://schemas.openxmlformats.org/officeDocument/2006/relationships" xmlns:p="http://schemas.openxmlformats.org/presentationml/2006/main" show="0">
+<p:sld xmlns:a="http://schemas.openxmlformats.org/drawingml/2006/main" xmlns:r="http://schemas.openxmlformats.org/officeDocument/2006/relationships" xmlns:p="http://schemas.openxmlformats.org/presentationml/2006/main">
   <p:cSld>
     <p:spTree>
       <p:nvGrpSpPr>
@@ -19084,53 +18736,6 @@
       </p:sp>
       <p:pic>
         <p:nvPicPr>
-          <p:cNvPr id="9218" name="Picture 2" descr="there seems to be a problem with this string. swirl it around while i chase  it - Programmer Cat - quickmeme">
-            <a:extLst>
-              <a:ext uri="{FF2B5EF4-FFF2-40B4-BE49-F238E27FC236}">
-                <a16:creationId xmlns:a16="http://schemas.microsoft.com/office/drawing/2014/main" id="{9F65F3EF-97A1-D14D-AA55-34033C6C785B}"/>
-              </a:ext>
-            </a:extLst>
-          </p:cNvPr>
-          <p:cNvPicPr>
-            <a:picLocks noChangeAspect="1" noChangeArrowheads="1"/>
-          </p:cNvPicPr>
-          <p:nvPr/>
-        </p:nvPicPr>
-        <p:blipFill>
-          <a:blip r:embed="rId2">
-            <a:extLst>
-              <a:ext uri="{28A0092B-C50C-407E-A947-70E740481C1C}">
-                <a14:useLocalDpi xmlns:a14="http://schemas.microsoft.com/office/drawing/2010/main" val="0"/>
-              </a:ext>
-            </a:extLst>
-          </a:blip>
-          <a:srcRect/>
-          <a:stretch>
-            <a:fillRect/>
-          </a:stretch>
-        </p:blipFill>
-        <p:spPr bwMode="auto">
-          <a:xfrm>
-            <a:off x="8405445" y="1236401"/>
-            <a:ext cx="3651740" cy="4894085"/>
-          </a:xfrm>
-          <a:prstGeom prst="rect">
-            <a:avLst/>
-          </a:prstGeom>
-          <a:noFill/>
-          <a:extLst>
-            <a:ext uri="{909E8E84-426E-40DD-AFC4-6F175D3DCCD1}">
-              <a14:hiddenFill xmlns:a14="http://schemas.microsoft.com/office/drawing/2010/main">
-                <a:solidFill>
-                  <a:srgbClr val="FFFFFF"/>
-                </a:solidFill>
-              </a14:hiddenFill>
-            </a:ext>
-          </a:extLst>
-        </p:spPr>
-      </p:pic>
-      <p:pic>
-        <p:nvPicPr>
           <p:cNvPr id="5" name="Graphic 4" descr="Tick with solid fill">
             <a:extLst>
               <a:ext uri="{FF2B5EF4-FFF2-40B4-BE49-F238E27FC236}">
@@ -19144,13 +18749,13 @@
           <p:nvPr/>
         </p:nvPicPr>
         <p:blipFill>
-          <a:blip r:embed="rId3">
+          <a:blip r:embed="rId2">
             <a:extLst>
               <a:ext uri="{28A0092B-C50C-407E-A947-70E740481C1C}">
                 <a14:useLocalDpi xmlns:a14="http://schemas.microsoft.com/office/drawing/2010/main" val="0"/>
               </a:ext>
               <a:ext uri="{96DAC541-7B7A-43D3-8B79-37D633B846F1}">
-                <asvg:svgBlip xmlns:asvg="http://schemas.microsoft.com/office/drawing/2016/SVG/main" r:embed="rId4"/>
+                <asvg:svgBlip xmlns:asvg="http://schemas.microsoft.com/office/drawing/2016/SVG/main" r:embed="rId3"/>
               </a:ext>
             </a:extLst>
           </a:blip>
@@ -19183,13 +18788,13 @@
           <p:nvPr/>
         </p:nvPicPr>
         <p:blipFill>
-          <a:blip r:embed="rId3">
+          <a:blip r:embed="rId2">
             <a:extLst>
               <a:ext uri="{28A0092B-C50C-407E-A947-70E740481C1C}">
                 <a14:useLocalDpi xmlns:a14="http://schemas.microsoft.com/office/drawing/2010/main" val="0"/>
               </a:ext>
               <a:ext uri="{96DAC541-7B7A-43D3-8B79-37D633B846F1}">
-                <asvg:svgBlip xmlns:asvg="http://schemas.microsoft.com/office/drawing/2016/SVG/main" r:embed="rId4"/>
+                <asvg:svgBlip xmlns:asvg="http://schemas.microsoft.com/office/drawing/2016/SVG/main" r:embed="rId3"/>
               </a:ext>
             </a:extLst>
           </a:blip>
@@ -19222,13 +18827,13 @@
           <p:nvPr/>
         </p:nvPicPr>
         <p:blipFill>
-          <a:blip r:embed="rId3">
+          <a:blip r:embed="rId2">
             <a:extLst>
               <a:ext uri="{28A0092B-C50C-407E-A947-70E740481C1C}">
                 <a14:useLocalDpi xmlns:a14="http://schemas.microsoft.com/office/drawing/2010/main" val="0"/>
               </a:ext>
               <a:ext uri="{96DAC541-7B7A-43D3-8B79-37D633B846F1}">
-                <asvg:svgBlip xmlns:asvg="http://schemas.microsoft.com/office/drawing/2016/SVG/main" r:embed="rId4"/>
+                <asvg:svgBlip xmlns:asvg="http://schemas.microsoft.com/office/drawing/2016/SVG/main" r:embed="rId3"/>
               </a:ext>
             </a:extLst>
           </a:blip>
@@ -19256,6 +18861,14 @@
   <p:clrMapOvr>
     <a:masterClrMapping/>
   </p:clrMapOvr>
+  <mc:AlternateContent xmlns:mc="http://schemas.openxmlformats.org/markup-compatibility/2006">
+    <mc:Choice xmlns:p14="http://schemas.microsoft.com/office/powerpoint/2010/main" Requires="p14">
+      <p:transition spd="slow" p14:dur="2000" advTm="666"/>
+    </mc:Choice>
+    <mc:Fallback>
+      <p:transition spd="slow" advTm="666"/>
+    </mc:Fallback>
+  </mc:AlternateContent>
 </p:sld>
 </file>
 
@@ -20239,6 +19852,9 @@
         </p:txBody>
       </p:sp>
     </p:spTree>
+    <p:custDataLst>
+      <p:tags r:id="rId1"/>
+    </p:custDataLst>
     <p:extLst>
       <p:ext uri="{BB962C8B-B14F-4D97-AF65-F5344CB8AC3E}">
         <p14:creationId xmlns:p14="http://schemas.microsoft.com/office/powerpoint/2010/main" val="1248771398"/>
@@ -20248,6 +19864,14 @@
   <p:clrMapOvr>
     <a:masterClrMapping/>
   </p:clrMapOvr>
+  <mc:AlternateContent xmlns:mc="http://schemas.openxmlformats.org/markup-compatibility/2006">
+    <mc:Choice xmlns:p14="http://schemas.microsoft.com/office/powerpoint/2010/main" Requires="p14">
+      <p:transition spd="slow" p14:dur="2000" advTm="160650"/>
+    </mc:Choice>
+    <mc:Fallback>
+      <p:transition spd="slow" advTm="160650"/>
+    </mc:Fallback>
+  </mc:AlternateContent>
   <p:timing>
     <p:tnLst>
       <p:par>
@@ -22029,6 +21653,14 @@
   <p:clrMapOvr>
     <a:masterClrMapping/>
   </p:clrMapOvr>
+  <mc:AlternateContent xmlns:mc="http://schemas.openxmlformats.org/markup-compatibility/2006">
+    <mc:Choice xmlns:p14="http://schemas.microsoft.com/office/powerpoint/2010/main" Requires="p14">
+      <p:transition spd="slow" p14:dur="2000" advTm="67326"/>
+    </mc:Choice>
+    <mc:Fallback>
+      <p:transition spd="slow" advTm="67326"/>
+    </mc:Fallback>
+  </mc:AlternateContent>
 </p:sld>
 </file>
 
@@ -23181,6 +22813,14 @@
   <p:clrMapOvr>
     <a:masterClrMapping/>
   </p:clrMapOvr>
+  <mc:AlternateContent xmlns:mc="http://schemas.openxmlformats.org/markup-compatibility/2006">
+    <mc:Choice xmlns:p14="http://schemas.microsoft.com/office/powerpoint/2010/main" Requires="p14">
+      <p:transition spd="slow" p14:dur="2000" advTm="21465"/>
+    </mc:Choice>
+    <mc:Fallback>
+      <p:transition spd="slow" advTm="21465"/>
+    </mc:Fallback>
+  </mc:AlternateContent>
   <p:timing>
     <p:tnLst>
       <p:par>
@@ -23486,6 +23126,12 @@
     </p:bldLst>
   </p:timing>
 </p:sld>
+</file>
+
+<file path=ppt/tags/tag1.xml><?xml version="1.0" encoding="utf-8"?>
+<p:tagLst xmlns:a="http://schemas.openxmlformats.org/drawingml/2006/main" xmlns:r="http://schemas.openxmlformats.org/officeDocument/2006/relationships" xmlns:p="http://schemas.openxmlformats.org/presentationml/2006/main">
+  <p:tag name="TIMING" val="|5.4|142.9|1.6|8.9"/>
+</p:tagLst>
 </file>
 
 <file path=ppt/theme/theme1.xml><?xml version="1.0" encoding="utf-8"?>
